--- a/ABC-startup/ABC STARTUPU - zadanie warsztatowe 5_a_b.pptx
+++ b/ABC-startup/ABC STARTUPU - zadanie warsztatowe 5_a_b.pptx
@@ -56,7 +56,7 @@
         <p:spPr>
           <a:xfrm>
             <a:off x="457200" y="274680"/>
-            <a:ext cx="8229240" cy="1142640"/>
+            <a:ext cx="8228880" cy="1142280"/>
           </a:xfrm>
           <a:prstGeom prst="rect">
             <a:avLst/>
@@ -71,14 +71,14 @@
             <a:noAutofit/>
           </a:bodyPr>
           <a:p>
-            <a:pPr indent="0">
+            <a:pPr indent="0" algn="ctr">
               <a:buNone/>
             </a:pPr>
-            <a:endParaRPr b="0" lang="pl-PL" sz="1800" spc="-1" strike="noStrike">
-              <a:solidFill>
-                <a:schemeClr val="dk1"/>
-              </a:solidFill>
-              <a:latin typeface="Calibri"/>
+            <a:endParaRPr b="0" lang="en-US" sz="4400" spc="-1" strike="noStrike">
+              <a:solidFill>
+                <a:srgbClr val="000000"/>
+              </a:solidFill>
+              <a:latin typeface="Arial"/>
             </a:endParaRPr>
           </a:p>
         </p:txBody>
@@ -96,7 +96,7 @@
         <p:spPr>
           <a:xfrm>
             <a:off x="457200" y="1600200"/>
-            <a:ext cx="8229240" cy="4525560"/>
+            <a:ext cx="8228880" cy="4525200"/>
           </a:xfrm>
           <a:prstGeom prst="rect">
             <a:avLst/>
@@ -130,7 +130,7 @@
             <a:spLocks noGrp="1"/>
           </p:cNvSpPr>
           <p:nvPr>
-            <p:ph type="ftr" idx="2"/>
+            <p:ph type="ftr" idx="1"/>
           </p:nvPr>
         </p:nvSpPr>
         <p:spPr/>
@@ -150,14 +150,14 @@
             <a:spLocks noGrp="1"/>
           </p:cNvSpPr>
           <p:nvPr>
-            <p:ph type="sldNum" idx="3"/>
+            <p:ph type="sldNum" idx="2"/>
           </p:nvPr>
         </p:nvSpPr>
         <p:spPr/>
         <p:txBody>
           <a:bodyPr/>
           <a:p>
-            <a:fld id="{086B2B8F-99C4-4FB6-BA89-47038A4D96AE}" type="slidenum">
+            <a:fld id="{43EA4748-3D49-4E43-AF1D-2CF22F2E9413}" type="slidenum">
               <a:t>&lt;#&gt;</a:t>
             </a:fld>
           </a:p>
@@ -170,7 +170,7 @@
             <a:spLocks noGrp="1"/>
           </p:cNvSpPr>
           <p:nvPr>
-            <p:ph type="dt" idx="1"/>
+            <p:ph type="dt" idx="3"/>
           </p:nvPr>
         </p:nvSpPr>
         <p:spPr/>
@@ -213,7 +213,7 @@
             <a:spLocks noGrp="1"/>
           </p:cNvSpPr>
           <p:nvPr>
-            <p:ph type="ftr" idx="29"/>
+            <p:ph type="ftr" idx="28"/>
           </p:nvPr>
         </p:nvSpPr>
         <p:spPr/>
@@ -233,14 +233,14 @@
             <a:spLocks noGrp="1"/>
           </p:cNvSpPr>
           <p:nvPr>
-            <p:ph type="sldNum" idx="30"/>
+            <p:ph type="sldNum" idx="29"/>
           </p:nvPr>
         </p:nvSpPr>
         <p:spPr/>
         <p:txBody>
           <a:bodyPr/>
           <a:p>
-            <a:fld id="{6E43F1F6-36F9-4BC7-8CB9-30D9F5455AC9}" type="slidenum">
+            <a:fld id="{270F0D66-BA3A-411B-BE3E-8B3249192BD6}" type="slidenum">
               <a:t>&lt;#&gt;</a:t>
             </a:fld>
           </a:p>
@@ -253,7 +253,7 @@
             <a:spLocks noGrp="1"/>
           </p:cNvSpPr>
           <p:nvPr>
-            <p:ph type="dt" idx="28"/>
+            <p:ph type="dt" idx="30"/>
           </p:nvPr>
         </p:nvSpPr>
         <p:spPr/>
@@ -296,7 +296,7 @@
             <a:spLocks noGrp="1"/>
           </p:cNvSpPr>
           <p:nvPr>
-            <p:ph type="ftr" idx="32"/>
+            <p:ph type="ftr" idx="31"/>
           </p:nvPr>
         </p:nvSpPr>
         <p:spPr/>
@@ -316,14 +316,14 @@
             <a:spLocks noGrp="1"/>
           </p:cNvSpPr>
           <p:nvPr>
-            <p:ph type="sldNum" idx="33"/>
+            <p:ph type="sldNum" idx="32"/>
           </p:nvPr>
         </p:nvSpPr>
         <p:spPr/>
         <p:txBody>
           <a:bodyPr/>
           <a:p>
-            <a:fld id="{0CE58F06-C548-483E-B5A7-6D6C74CA3EC2}" type="slidenum">
+            <a:fld id="{91914D76-EAA6-4DC8-B0A0-A950C71B0230}" type="slidenum">
               <a:t>&lt;#&gt;</a:t>
             </a:fld>
           </a:p>
@@ -336,7 +336,7 @@
             <a:spLocks noGrp="1"/>
           </p:cNvSpPr>
           <p:nvPr>
-            <p:ph type="dt" idx="31"/>
+            <p:ph type="dt" idx="33"/>
           </p:nvPr>
         </p:nvSpPr>
         <p:spPr/>
@@ -379,7 +379,7 @@
             <a:spLocks noGrp="1"/>
           </p:cNvSpPr>
           <p:nvPr>
-            <p:ph type="ftr" idx="5"/>
+            <p:ph type="ftr" idx="4"/>
           </p:nvPr>
         </p:nvSpPr>
         <p:spPr/>
@@ -399,14 +399,14 @@
             <a:spLocks noGrp="1"/>
           </p:cNvSpPr>
           <p:nvPr>
-            <p:ph type="sldNum" idx="6"/>
+            <p:ph type="sldNum" idx="5"/>
           </p:nvPr>
         </p:nvSpPr>
         <p:spPr/>
         <p:txBody>
           <a:bodyPr/>
           <a:p>
-            <a:fld id="{FB8360EF-F146-4284-A84C-40A9A46F4D8E}" type="slidenum">
+            <a:fld id="{1EBB5334-DA86-46DD-9A21-2523EFF3FDFE}" type="slidenum">
               <a:t>&lt;#&gt;</a:t>
             </a:fld>
           </a:p>
@@ -419,7 +419,7 @@
             <a:spLocks noGrp="1"/>
           </p:cNvSpPr>
           <p:nvPr>
-            <p:ph type="dt" idx="4"/>
+            <p:ph type="dt" idx="6"/>
           </p:nvPr>
         </p:nvSpPr>
         <p:spPr/>
@@ -462,7 +462,7 @@
             <a:spLocks noGrp="1"/>
           </p:cNvSpPr>
           <p:nvPr>
-            <p:ph type="ftr" idx="8"/>
+            <p:ph type="ftr" idx="7"/>
           </p:nvPr>
         </p:nvSpPr>
         <p:spPr/>
@@ -482,14 +482,14 @@
             <a:spLocks noGrp="1"/>
           </p:cNvSpPr>
           <p:nvPr>
-            <p:ph type="sldNum" idx="9"/>
+            <p:ph type="sldNum" idx="8"/>
           </p:nvPr>
         </p:nvSpPr>
         <p:spPr/>
         <p:txBody>
           <a:bodyPr/>
           <a:p>
-            <a:fld id="{3DC7613F-13AD-466C-B810-088832D24B66}" type="slidenum">
+            <a:fld id="{0F827112-CD18-4A61-9649-A41E90EB6600}" type="slidenum">
               <a:t>&lt;#&gt;</a:t>
             </a:fld>
           </a:p>
@@ -502,7 +502,7 @@
             <a:spLocks noGrp="1"/>
           </p:cNvSpPr>
           <p:nvPr>
-            <p:ph type="dt" idx="7"/>
+            <p:ph type="dt" idx="9"/>
           </p:nvPr>
         </p:nvSpPr>
         <p:spPr/>
@@ -540,7 +540,7 @@
       </p:grpSpPr>
       <p:sp>
         <p:nvSpPr>
-          <p:cNvPr id="22" name="PlaceHolder 1"/>
+          <p:cNvPr id="18" name="PlaceHolder 1"/>
           <p:cNvSpPr>
             <a:spLocks noGrp="1"/>
           </p:cNvSpPr>
@@ -551,7 +551,7 @@
         <p:spPr>
           <a:xfrm>
             <a:off x="457200" y="274680"/>
-            <a:ext cx="8229240" cy="1142640"/>
+            <a:ext cx="8228880" cy="1142280"/>
           </a:xfrm>
           <a:prstGeom prst="rect">
             <a:avLst/>
@@ -566,21 +566,21 @@
             <a:noAutofit/>
           </a:bodyPr>
           <a:p>
-            <a:pPr indent="0">
+            <a:pPr indent="0" algn="ctr">
               <a:buNone/>
             </a:pPr>
-            <a:endParaRPr b="0" lang="pl-PL" sz="1800" spc="-1" strike="noStrike">
-              <a:solidFill>
-                <a:schemeClr val="dk1"/>
-              </a:solidFill>
-              <a:latin typeface="Calibri"/>
-            </a:endParaRPr>
-          </a:p>
-        </p:txBody>
-      </p:sp>
-      <p:sp>
-        <p:nvSpPr>
-          <p:cNvPr id="23" name="PlaceHolder 2"/>
+            <a:endParaRPr b="0" lang="en-US" sz="4400" spc="-1" strike="noStrike">
+              <a:solidFill>
+                <a:srgbClr val="000000"/>
+              </a:solidFill>
+              <a:latin typeface="Arial"/>
+            </a:endParaRPr>
+          </a:p>
+        </p:txBody>
+      </p:sp>
+      <p:sp>
+        <p:nvSpPr>
+          <p:cNvPr id="19" name="PlaceHolder 2"/>
           <p:cNvSpPr>
             <a:spLocks noGrp="1"/>
           </p:cNvSpPr>
@@ -591,7 +591,7 @@
         <p:spPr>
           <a:xfrm>
             <a:off x="457200" y="1600200"/>
-            <a:ext cx="8229240" cy="4525560"/>
+            <a:ext cx="8228880" cy="4525200"/>
           </a:xfrm>
           <a:prstGeom prst="rect">
             <a:avLst/>
@@ -612,11 +612,11 @@
               </a:spcBef>
               <a:buNone/>
             </a:pPr>
-            <a:endParaRPr b="0" lang="pl-PL" sz="3200" spc="-1" strike="noStrike">
-              <a:solidFill>
-                <a:schemeClr val="dk1"/>
-              </a:solidFill>
-              <a:latin typeface="Calibri"/>
+            <a:endParaRPr b="0" lang="en-US" sz="3200" spc="-1" strike="noStrike">
+              <a:solidFill>
+                <a:srgbClr val="000000"/>
+              </a:solidFill>
+              <a:latin typeface="Arial"/>
             </a:endParaRPr>
           </a:p>
         </p:txBody>
@@ -628,7 +628,7 @@
             <a:spLocks noGrp="1"/>
           </p:cNvSpPr>
           <p:nvPr>
-            <p:ph type="ftr" idx="11"/>
+            <p:ph type="ftr" idx="10"/>
           </p:nvPr>
         </p:nvSpPr>
         <p:spPr/>
@@ -648,14 +648,14 @@
             <a:spLocks noGrp="1"/>
           </p:cNvSpPr>
           <p:nvPr>
-            <p:ph type="sldNum" idx="12"/>
+            <p:ph type="sldNum" idx="11"/>
           </p:nvPr>
         </p:nvSpPr>
         <p:spPr/>
         <p:txBody>
           <a:bodyPr/>
           <a:p>
-            <a:fld id="{746B0C02-9A4F-4AA6-9854-C039D51AA3E8}" type="slidenum">
+            <a:fld id="{D4E90E2A-0431-436B-8D28-91E0903B4A60}" type="slidenum">
               <a:t>&lt;#&gt;</a:t>
             </a:fld>
           </a:p>
@@ -668,7 +668,7 @@
             <a:spLocks noGrp="1"/>
           </p:cNvSpPr>
           <p:nvPr>
-            <p:ph type="dt" idx="10"/>
+            <p:ph type="dt" idx="12"/>
           </p:nvPr>
         </p:nvSpPr>
         <p:spPr/>
@@ -711,7 +711,7 @@
             <a:spLocks noGrp="1"/>
           </p:cNvSpPr>
           <p:nvPr>
-            <p:ph type="ftr" idx="14"/>
+            <p:ph type="ftr" idx="13"/>
           </p:nvPr>
         </p:nvSpPr>
         <p:spPr/>
@@ -731,14 +731,14 @@
             <a:spLocks noGrp="1"/>
           </p:cNvSpPr>
           <p:nvPr>
-            <p:ph type="sldNum" idx="15"/>
+            <p:ph type="sldNum" idx="14"/>
           </p:nvPr>
         </p:nvSpPr>
         <p:spPr/>
         <p:txBody>
           <a:bodyPr/>
           <a:p>
-            <a:fld id="{581A34B9-06E2-4923-9CE2-BDFAB369F619}" type="slidenum">
+            <a:fld id="{3DD6FAAD-D527-4A84-942E-DA1DCEE42402}" type="slidenum">
               <a:t>&lt;#&gt;</a:t>
             </a:fld>
           </a:p>
@@ -751,7 +751,7 @@
             <a:spLocks noGrp="1"/>
           </p:cNvSpPr>
           <p:nvPr>
-            <p:ph type="dt" idx="13"/>
+            <p:ph type="dt" idx="15"/>
           </p:nvPr>
         </p:nvSpPr>
         <p:spPr/>
@@ -789,7 +789,7 @@
       </p:grpSpPr>
       <p:sp>
         <p:nvSpPr>
-          <p:cNvPr id="35" name="PlaceHolder 1"/>
+          <p:cNvPr id="29" name="PlaceHolder 1"/>
           <p:cNvSpPr>
             <a:spLocks noGrp="1"/>
           </p:cNvSpPr>
@@ -800,7 +800,7 @@
         <p:spPr>
           <a:xfrm>
             <a:off x="457200" y="274680"/>
-            <a:ext cx="8229240" cy="1142640"/>
+            <a:ext cx="8228880" cy="1142280"/>
           </a:xfrm>
           <a:prstGeom prst="rect">
             <a:avLst/>
@@ -815,21 +815,21 @@
             <a:noAutofit/>
           </a:bodyPr>
           <a:p>
-            <a:pPr indent="0">
+            <a:pPr indent="0" algn="ctr">
               <a:buNone/>
             </a:pPr>
-            <a:endParaRPr b="0" lang="pl-PL" sz="1800" spc="-1" strike="noStrike">
-              <a:solidFill>
-                <a:schemeClr val="dk1"/>
-              </a:solidFill>
-              <a:latin typeface="Calibri"/>
-            </a:endParaRPr>
-          </a:p>
-        </p:txBody>
-      </p:sp>
-      <p:sp>
-        <p:nvSpPr>
-          <p:cNvPr id="36" name="PlaceHolder 2"/>
+            <a:endParaRPr b="0" lang="en-US" sz="4400" spc="-1" strike="noStrike">
+              <a:solidFill>
+                <a:srgbClr val="000000"/>
+              </a:solidFill>
+              <a:latin typeface="Arial"/>
+            </a:endParaRPr>
+          </a:p>
+        </p:txBody>
+      </p:sp>
+      <p:sp>
+        <p:nvSpPr>
+          <p:cNvPr id="30" name="PlaceHolder 2"/>
           <p:cNvSpPr>
             <a:spLocks noGrp="1"/>
           </p:cNvSpPr>
@@ -840,7 +840,7 @@
         <p:spPr>
           <a:xfrm>
             <a:off x="457200" y="1600200"/>
-            <a:ext cx="4015800" cy="4525560"/>
+            <a:ext cx="4015440" cy="4525200"/>
           </a:xfrm>
           <a:prstGeom prst="rect">
             <a:avLst/>
@@ -861,18 +861,18 @@
               </a:spcBef>
               <a:buNone/>
             </a:pPr>
-            <a:endParaRPr b="0" lang="pl-PL" sz="3200" spc="-1" strike="noStrike">
-              <a:solidFill>
-                <a:schemeClr val="dk1"/>
-              </a:solidFill>
-              <a:latin typeface="Calibri"/>
-            </a:endParaRPr>
-          </a:p>
-        </p:txBody>
-      </p:sp>
-      <p:sp>
-        <p:nvSpPr>
-          <p:cNvPr id="37" name="PlaceHolder 3"/>
+            <a:endParaRPr b="0" lang="en-US" sz="3200" spc="-1" strike="noStrike">
+              <a:solidFill>
+                <a:srgbClr val="000000"/>
+              </a:solidFill>
+              <a:latin typeface="Arial"/>
+            </a:endParaRPr>
+          </a:p>
+        </p:txBody>
+      </p:sp>
+      <p:sp>
+        <p:nvSpPr>
+          <p:cNvPr id="31" name="PlaceHolder 3"/>
           <p:cNvSpPr>
             <a:spLocks noGrp="1"/>
           </p:cNvSpPr>
@@ -882,8 +882,8 @@
         </p:nvSpPr>
         <p:spPr>
           <a:xfrm>
-            <a:off x="4674240" y="1600200"/>
-            <a:ext cx="4015800" cy="4525560"/>
+            <a:off x="4673880" y="1600200"/>
+            <a:ext cx="4015440" cy="4525200"/>
           </a:xfrm>
           <a:prstGeom prst="rect">
             <a:avLst/>
@@ -904,11 +904,11 @@
               </a:spcBef>
               <a:buNone/>
             </a:pPr>
-            <a:endParaRPr b="0" lang="pl-PL" sz="3200" spc="-1" strike="noStrike">
-              <a:solidFill>
-                <a:schemeClr val="dk1"/>
-              </a:solidFill>
-              <a:latin typeface="Calibri"/>
+            <a:endParaRPr b="0" lang="en-US" sz="3200" spc="-1" strike="noStrike">
+              <a:solidFill>
+                <a:srgbClr val="000000"/>
+              </a:solidFill>
+              <a:latin typeface="Arial"/>
             </a:endParaRPr>
           </a:p>
         </p:txBody>
@@ -920,7 +920,7 @@
             <a:spLocks noGrp="1"/>
           </p:cNvSpPr>
           <p:nvPr>
-            <p:ph type="ftr" idx="17"/>
+            <p:ph type="ftr" idx="16"/>
           </p:nvPr>
         </p:nvSpPr>
         <p:spPr/>
@@ -940,14 +940,14 @@
             <a:spLocks noGrp="1"/>
           </p:cNvSpPr>
           <p:nvPr>
-            <p:ph type="sldNum" idx="18"/>
+            <p:ph type="sldNum" idx="17"/>
           </p:nvPr>
         </p:nvSpPr>
         <p:spPr/>
         <p:txBody>
           <a:bodyPr/>
           <a:p>
-            <a:fld id="{54E34B73-DFE5-4DD5-9CF8-AE4C7EE9DE63}" type="slidenum">
+            <a:fld id="{BAAE2E36-13CC-4BAB-B033-42FFD75572AB}" type="slidenum">
               <a:t>&lt;#&gt;</a:t>
             </a:fld>
           </a:p>
@@ -960,7 +960,7 @@
             <a:spLocks noGrp="1"/>
           </p:cNvSpPr>
           <p:nvPr>
-            <p:ph type="dt" idx="16"/>
+            <p:ph type="dt" idx="18"/>
           </p:nvPr>
         </p:nvSpPr>
         <p:spPr/>
@@ -1003,7 +1003,7 @@
             <a:spLocks noGrp="1"/>
           </p:cNvSpPr>
           <p:nvPr>
-            <p:ph type="ftr" idx="20"/>
+            <p:ph type="ftr" idx="19"/>
           </p:nvPr>
         </p:nvSpPr>
         <p:spPr/>
@@ -1023,14 +1023,14 @@
             <a:spLocks noGrp="1"/>
           </p:cNvSpPr>
           <p:nvPr>
-            <p:ph type="sldNum" idx="21"/>
+            <p:ph type="sldNum" idx="20"/>
           </p:nvPr>
         </p:nvSpPr>
         <p:spPr/>
         <p:txBody>
           <a:bodyPr/>
           <a:p>
-            <a:fld id="{D9480EB0-6C31-4492-A87F-F4288FF908C4}" type="slidenum">
+            <a:fld id="{FC69F077-63EC-4EA1-BCC8-3725586D7996}" type="slidenum">
               <a:t>&lt;#&gt;</a:t>
             </a:fld>
           </a:p>
@@ -1043,7 +1043,7 @@
             <a:spLocks noGrp="1"/>
           </p:cNvSpPr>
           <p:nvPr>
-            <p:ph type="dt" idx="19"/>
+            <p:ph type="dt" idx="21"/>
           </p:nvPr>
         </p:nvSpPr>
         <p:spPr/>
@@ -1081,7 +1081,7 @@
       </p:grpSpPr>
       <p:sp>
         <p:nvSpPr>
-          <p:cNvPr id="50" name="PlaceHolder 1"/>
+          <p:cNvPr id="39" name="PlaceHolder 1"/>
           <p:cNvSpPr>
             <a:spLocks noGrp="1"/>
           </p:cNvSpPr>
@@ -1092,7 +1092,7 @@
         <p:spPr>
           <a:xfrm>
             <a:off x="457200" y="274680"/>
-            <a:ext cx="8229240" cy="1142640"/>
+            <a:ext cx="8228880" cy="1142280"/>
           </a:xfrm>
           <a:prstGeom prst="rect">
             <a:avLst/>
@@ -1107,14 +1107,14 @@
             <a:noAutofit/>
           </a:bodyPr>
           <a:p>
-            <a:pPr indent="0">
+            <a:pPr indent="0" algn="ctr">
               <a:buNone/>
             </a:pPr>
-            <a:endParaRPr b="0" lang="pl-PL" sz="1800" spc="-1" strike="noStrike">
-              <a:solidFill>
-                <a:schemeClr val="dk1"/>
-              </a:solidFill>
-              <a:latin typeface="Calibri"/>
+            <a:endParaRPr b="0" lang="en-US" sz="4400" spc="-1" strike="noStrike">
+              <a:solidFill>
+                <a:srgbClr val="000000"/>
+              </a:solidFill>
+              <a:latin typeface="Arial"/>
             </a:endParaRPr>
           </a:p>
         </p:txBody>
@@ -1126,7 +1126,7 @@
             <a:spLocks noGrp="1"/>
           </p:cNvSpPr>
           <p:nvPr>
-            <p:ph type="ftr" idx="23"/>
+            <p:ph type="ftr" idx="22"/>
           </p:nvPr>
         </p:nvSpPr>
         <p:spPr/>
@@ -1146,14 +1146,14 @@
             <a:spLocks noGrp="1"/>
           </p:cNvSpPr>
           <p:nvPr>
-            <p:ph type="sldNum" idx="24"/>
+            <p:ph type="sldNum" idx="23"/>
           </p:nvPr>
         </p:nvSpPr>
         <p:spPr/>
         <p:txBody>
           <a:bodyPr/>
           <a:p>
-            <a:fld id="{41095FA1-9DC5-4B5E-B3D4-951FCEF30BD1}" type="slidenum">
+            <a:fld id="{53441F01-51F9-42BD-B685-593CE283C8CE}" type="slidenum">
               <a:t>&lt;#&gt;</a:t>
             </a:fld>
           </a:p>
@@ -1166,7 +1166,7 @@
             <a:spLocks noGrp="1"/>
           </p:cNvSpPr>
           <p:nvPr>
-            <p:ph type="dt" idx="22"/>
+            <p:ph type="dt" idx="24"/>
           </p:nvPr>
         </p:nvSpPr>
         <p:spPr/>
@@ -1209,7 +1209,7 @@
             <a:spLocks noGrp="1"/>
           </p:cNvSpPr>
           <p:nvPr>
-            <p:ph type="ftr" idx="26"/>
+            <p:ph type="ftr" idx="25"/>
           </p:nvPr>
         </p:nvSpPr>
         <p:spPr/>
@@ -1229,14 +1229,14 @@
             <a:spLocks noGrp="1"/>
           </p:cNvSpPr>
           <p:nvPr>
-            <p:ph type="sldNum" idx="27"/>
+            <p:ph type="sldNum" idx="26"/>
           </p:nvPr>
         </p:nvSpPr>
         <p:spPr/>
         <p:txBody>
           <a:bodyPr/>
           <a:p>
-            <a:fld id="{2853093C-1AAB-4760-AC05-33BE0B698388}" type="slidenum">
+            <a:fld id="{77D2A816-5FAC-45FB-9E79-B2BA56C46E8E}" type="slidenum">
               <a:t>&lt;#&gt;</a:t>
             </a:fld>
           </a:p>
@@ -1249,7 +1249,7 @@
             <a:spLocks noGrp="1"/>
           </p:cNvSpPr>
           <p:nvPr>
-            <p:ph type="dt" idx="25"/>
+            <p:ph type="dt" idx="27"/>
           </p:nvPr>
         </p:nvSpPr>
         <p:spPr/>
@@ -1304,8 +1304,8 @@
         </p:nvSpPr>
         <p:spPr>
           <a:xfrm>
-            <a:off x="685800" y="2130480"/>
-            <a:ext cx="7772040" cy="1469520"/>
+            <a:off x="457200" y="274680"/>
+            <a:ext cx="8228880" cy="1142280"/>
           </a:xfrm>
           <a:prstGeom prst="rect">
             <a:avLst/>
@@ -1316,30 +1316,27 @@
           </a:ln>
         </p:spPr>
         <p:txBody>
-          <a:bodyPr lIns="91440" rIns="91440" tIns="45720" bIns="45720" anchor="ctr">
+          <a:bodyPr lIns="0" rIns="0" tIns="0" bIns="0" anchor="ctr">
             <a:noAutofit/>
           </a:bodyPr>
           <a:p>
-            <a:pPr indent="0" algn="ctr" defTabSz="914400">
-              <a:lnSpc>
-                <a:spcPct val="100000"/>
-              </a:lnSpc>
+            <a:pPr indent="0">
               <a:buNone/>
             </a:pPr>
             <a:r>
-              <a:rPr b="0" lang="pl-PL" sz="4400" spc="-1" strike="noStrike">
-                <a:solidFill>
-                  <a:schemeClr val="dk1"/>
-                </a:solidFill>
-                <a:latin typeface="Calibri"/>
-              </a:rPr>
-              <a:t>Kliknij, aby edytować styl</a:t>
-            </a:r>
-            <a:endParaRPr b="0" lang="pl-PL" sz="4400" spc="-1" strike="noStrike">
-              <a:solidFill>
-                <a:schemeClr val="dk1"/>
-              </a:solidFill>
-              <a:latin typeface="Calibri"/>
+              <a:rPr b="0" lang="en-US" sz="1800" spc="-1" strike="noStrike">
+                <a:solidFill>
+                  <a:srgbClr val="000000"/>
+                </a:solidFill>
+                <a:latin typeface="Arial"/>
+              </a:rPr>
+              <a:t>Click to edit the title text format</a:t>
+            </a:r>
+            <a:endParaRPr b="0" lang="en-US" sz="1800" spc="-1" strike="noStrike">
+              <a:solidFill>
+                <a:srgbClr val="000000"/>
+              </a:solidFill>
+              <a:latin typeface="Arial"/>
             </a:endParaRPr>
           </a:p>
         </p:txBody>
@@ -1351,13 +1348,13 @@
             <a:spLocks noGrp="1"/>
           </p:cNvSpPr>
           <p:nvPr>
-            <p:ph type="dt" idx="1"/>
+            <p:ph type="ftr" idx="1"/>
           </p:nvPr>
         </p:nvSpPr>
         <p:spPr>
           <a:xfrm>
-            <a:off x="457200" y="6356520"/>
-            <a:ext cx="2133360" cy="364680"/>
+            <a:off x="3124080" y="6356520"/>
+            <a:ext cx="2894760" cy="364320"/>
           </a:xfrm>
           <a:prstGeom prst="rect">
             <a:avLst/>
@@ -1372,40 +1369,42 @@
             <a:noAutofit/>
           </a:bodyPr>
           <a:lstStyle>
-            <a:lvl1pPr indent="0" defTabSz="914400">
+            <a:lvl1pPr indent="0" algn="ctr">
               <a:lnSpc>
                 <a:spcPct val="100000"/>
               </a:lnSpc>
               <a:buNone/>
-              <a:defRPr b="0" lang="pl-PL" sz="1200" spc="-1" strike="noStrike">
-                <a:solidFill>
-                  <a:schemeClr val="dk1">
-                    <a:tint val="75000"/>
-                  </a:schemeClr>
-                </a:solidFill>
-                <a:latin typeface="Calibri"/>
+              <a:tabLst>
+                <a:tab algn="l" pos="0"/>
+              </a:tabLst>
+              <a:defRPr b="0" lang="en-US" sz="1400" spc="-1" strike="noStrike">
+                <a:solidFill>
+                  <a:srgbClr val="000000"/>
+                </a:solidFill>
+                <a:latin typeface="Times New Roman"/>
               </a:defRPr>
             </a:lvl1pPr>
           </a:lstStyle>
           <a:p>
-            <a:pPr indent="0" defTabSz="914400">
+            <a:pPr indent="0" algn="ctr">
               <a:lnSpc>
                 <a:spcPct val="100000"/>
               </a:lnSpc>
               <a:buNone/>
-            </a:pPr>
-            <a:r>
-              <a:rPr b="0" lang="pl-PL" sz="1200" spc="-1" strike="noStrike">
-                <a:solidFill>
-                  <a:schemeClr val="dk1">
-                    <a:tint val="75000"/>
-                  </a:schemeClr>
-                </a:solidFill>
-                <a:latin typeface="Calibri"/>
+              <a:tabLst>
+                <a:tab algn="l" pos="0"/>
+              </a:tabLst>
+            </a:pPr>
+            <a:r>
+              <a:rPr b="0" lang="en-US" sz="1400" spc="-1" strike="noStrike">
+                <a:solidFill>
+                  <a:srgbClr val="000000"/>
+                </a:solidFill>
+                <a:latin typeface="Times New Roman"/>
               </a:rPr>
               <a:t> </a:t>
             </a:r>
-            <a:endParaRPr b="0" lang="en-US" sz="1200" spc="-1" strike="noStrike">
+            <a:endParaRPr b="0" lang="en-US" sz="1400" spc="-1" strike="noStrike">
               <a:solidFill>
                 <a:srgbClr val="000000"/>
               </a:solidFill>
@@ -1421,13 +1420,13 @@
             <a:spLocks noGrp="1"/>
           </p:cNvSpPr>
           <p:nvPr>
-            <p:ph type="ftr" idx="2"/>
+            <p:ph type="sldNum" idx="2"/>
           </p:nvPr>
         </p:nvSpPr>
         <p:spPr>
           <a:xfrm>
-            <a:off x="3124080" y="6356520"/>
-            <a:ext cx="2895120" cy="364680"/>
+            <a:off x="6553080" y="6356520"/>
+            <a:ext cx="2133000" cy="364320"/>
           </a:xfrm>
           <a:prstGeom prst="rect">
             <a:avLst/>
@@ -1442,30 +1441,46 @@
             <a:noAutofit/>
           </a:bodyPr>
           <a:lstStyle>
-            <a:lvl1pPr indent="0" algn="ctr">
+            <a:lvl1pPr indent="0" algn="r" defTabSz="914400">
+              <a:lnSpc>
+                <a:spcPct val="100000"/>
+              </a:lnSpc>
               <a:buNone/>
-              <a:defRPr b="0" lang="en-US" sz="1400" spc="-1" strike="noStrike">
-                <a:solidFill>
-                  <a:srgbClr val="000000"/>
-                </a:solidFill>
-                <a:latin typeface="Times New Roman"/>
+              <a:tabLst>
+                <a:tab algn="l" pos="0"/>
+              </a:tabLst>
+              <a:defRPr b="0" lang="pl-PL" sz="1200" spc="-1" strike="noStrike">
+                <a:solidFill>
+                  <a:schemeClr val="dk1">
+                    <a:tint val="75000"/>
+                  </a:schemeClr>
+                </a:solidFill>
+                <a:latin typeface="Calibri"/>
               </a:defRPr>
             </a:lvl1pPr>
           </a:lstStyle>
           <a:p>
-            <a:pPr indent="0" algn="ctr">
+            <a:pPr indent="0" algn="r" defTabSz="914400">
+              <a:lnSpc>
+                <a:spcPct val="100000"/>
+              </a:lnSpc>
               <a:buNone/>
-            </a:pPr>
-            <a:r>
-              <a:rPr b="0" lang="en-US" sz="1400" spc="-1" strike="noStrike">
-                <a:solidFill>
-                  <a:srgbClr val="000000"/>
-                </a:solidFill>
-                <a:latin typeface="Times New Roman"/>
-              </a:rPr>
-              <a:t> </a:t>
-            </a:r>
-            <a:endParaRPr b="0" lang="en-US" sz="1400" spc="-1" strike="noStrike">
+              <a:tabLst>
+                <a:tab algn="l" pos="0"/>
+              </a:tabLst>
+            </a:pPr>
+            <a:fld id="{CB22C7BA-20D2-4F42-B20D-39CA2A38D4F8}" type="slidenum">
+              <a:rPr b="0" lang="pl-PL" sz="1200" spc="-1" strike="noStrike">
+                <a:solidFill>
+                  <a:schemeClr val="dk1">
+                    <a:tint val="75000"/>
+                  </a:schemeClr>
+                </a:solidFill>
+                <a:latin typeface="Calibri"/>
+              </a:rPr>
+              <a:t>4</a:t>
+            </a:fld>
+            <a:endParaRPr b="0" lang="en-US" sz="1200" spc="-1" strike="noStrike">
               <a:solidFill>
                 <a:srgbClr val="000000"/>
               </a:solidFill>
@@ -1481,13 +1496,13 @@
             <a:spLocks noGrp="1"/>
           </p:cNvSpPr>
           <p:nvPr>
-            <p:ph type="sldNum" idx="3"/>
+            <p:ph type="dt" idx="3"/>
           </p:nvPr>
         </p:nvSpPr>
         <p:spPr>
           <a:xfrm>
-            <a:off x="6553080" y="6356520"/>
-            <a:ext cx="2133360" cy="364680"/>
+            <a:off x="457200" y="6356520"/>
+            <a:ext cx="2133000" cy="364320"/>
           </a:xfrm>
           <a:prstGeom prst="rect">
             <a:avLst/>
@@ -1502,40 +1517,30 @@
             <a:noAutofit/>
           </a:bodyPr>
           <a:lstStyle>
-            <a:lvl1pPr indent="0" algn="r" defTabSz="914400">
-              <a:lnSpc>
-                <a:spcPct val="100000"/>
-              </a:lnSpc>
+            <a:lvl1pPr indent="0">
               <a:buNone/>
-              <a:defRPr b="0" lang="pl-PL" sz="1200" spc="-1" strike="noStrike">
-                <a:solidFill>
-                  <a:schemeClr val="dk1">
-                    <a:tint val="75000"/>
-                  </a:schemeClr>
-                </a:solidFill>
-                <a:latin typeface="Calibri"/>
+              <a:defRPr b="0" lang="en-US" sz="1400" spc="-1" strike="noStrike">
+                <a:solidFill>
+                  <a:srgbClr val="000000"/>
+                </a:solidFill>
+                <a:latin typeface="Times New Roman"/>
               </a:defRPr>
             </a:lvl1pPr>
           </a:lstStyle>
           <a:p>
-            <a:pPr indent="0" algn="r" defTabSz="914400">
-              <a:lnSpc>
-                <a:spcPct val="100000"/>
-              </a:lnSpc>
+            <a:pPr indent="0">
               <a:buNone/>
             </a:pPr>
-            <a:fld id="{AA225E97-30BF-4BA5-8F86-F45FD78B61DF}" type="slidenum">
-              <a:rPr b="0" lang="pl-PL" sz="1200" spc="-1" strike="noStrike">
-                <a:solidFill>
-                  <a:schemeClr val="dk1">
-                    <a:tint val="75000"/>
-                  </a:schemeClr>
-                </a:solidFill>
-                <a:latin typeface="Calibri"/>
-              </a:rPr>
-              <a:t>4</a:t>
-            </a:fld>
-            <a:endParaRPr b="0" lang="en-US" sz="1200" spc="-1" strike="noStrike">
+            <a:r>
+              <a:rPr b="0" lang="en-US" sz="1400" spc="-1" strike="noStrike">
+                <a:solidFill>
+                  <a:srgbClr val="000000"/>
+                </a:solidFill>
+                <a:latin typeface="Times New Roman"/>
+              </a:rPr>
+              <a:t> </a:t>
+            </a:r>
+            <a:endParaRPr b="0" lang="en-US" sz="1400" spc="-1" strike="noStrike">
               <a:solidFill>
                 <a:srgbClr val="000000"/>
               </a:solidFill>
@@ -1584,19 +1589,19 @@
               <a:buChar char=""/>
             </a:pPr>
             <a:r>
-              <a:rPr b="0" lang="pl-PL" sz="3200" spc="-1" strike="noStrike">
-                <a:solidFill>
-                  <a:schemeClr val="dk1"/>
-                </a:solidFill>
-                <a:latin typeface="Calibri"/>
+              <a:rPr b="0" lang="en-US" sz="3200" spc="-1" strike="noStrike">
+                <a:solidFill>
+                  <a:srgbClr val="000000"/>
+                </a:solidFill>
+                <a:latin typeface="Arial"/>
               </a:rPr>
               <a:t>Click to edit the outline text format</a:t>
             </a:r>
-            <a:endParaRPr b="0" lang="pl-PL" sz="3200" spc="-1" strike="noStrike">
-              <a:solidFill>
-                <a:schemeClr val="dk1"/>
-              </a:solidFill>
-              <a:latin typeface="Calibri"/>
+            <a:endParaRPr b="0" lang="en-US" sz="3200" spc="-1" strike="noStrike">
+              <a:solidFill>
+                <a:srgbClr val="000000"/>
+              </a:solidFill>
+              <a:latin typeface="Arial"/>
             </a:endParaRPr>
           </a:p>
           <a:p>
@@ -1612,19 +1617,19 @@
               <a:buChar char=""/>
             </a:pPr>
             <a:r>
-              <a:rPr b="0" lang="pl-PL" sz="2400" spc="-1" strike="noStrike">
-                <a:solidFill>
-                  <a:schemeClr val="dk1"/>
-                </a:solidFill>
-                <a:latin typeface="Calibri"/>
+              <a:rPr b="0" lang="en-US" sz="2800" spc="-1" strike="noStrike">
+                <a:solidFill>
+                  <a:srgbClr val="000000"/>
+                </a:solidFill>
+                <a:latin typeface="Arial"/>
               </a:rPr>
               <a:t>Second Outline Level</a:t>
             </a:r>
-            <a:endParaRPr b="0" lang="pl-PL" sz="2400" spc="-1" strike="noStrike">
-              <a:solidFill>
-                <a:schemeClr val="dk1"/>
-              </a:solidFill>
-              <a:latin typeface="Calibri"/>
+            <a:endParaRPr b="0" lang="en-US" sz="2800" spc="-1" strike="noStrike">
+              <a:solidFill>
+                <a:srgbClr val="000000"/>
+              </a:solidFill>
+              <a:latin typeface="Arial"/>
             </a:endParaRPr>
           </a:p>
           <a:p>
@@ -1640,19 +1645,19 @@
               <a:buChar char=""/>
             </a:pPr>
             <a:r>
-              <a:rPr b="0" lang="pl-PL" sz="2000" spc="-1" strike="noStrike">
-                <a:solidFill>
-                  <a:schemeClr val="dk1"/>
-                </a:solidFill>
-                <a:latin typeface="Calibri"/>
+              <a:rPr b="0" lang="en-US" sz="2400" spc="-1" strike="noStrike">
+                <a:solidFill>
+                  <a:srgbClr val="000000"/>
+                </a:solidFill>
+                <a:latin typeface="Arial"/>
               </a:rPr>
               <a:t>Third Outline Level</a:t>
             </a:r>
-            <a:endParaRPr b="0" lang="pl-PL" sz="2000" spc="-1" strike="noStrike">
-              <a:solidFill>
-                <a:schemeClr val="dk1"/>
-              </a:solidFill>
-              <a:latin typeface="Calibri"/>
+            <a:endParaRPr b="0" lang="en-US" sz="2400" spc="-1" strike="noStrike">
+              <a:solidFill>
+                <a:srgbClr val="000000"/>
+              </a:solidFill>
+              <a:latin typeface="Arial"/>
             </a:endParaRPr>
           </a:p>
           <a:p>
@@ -1668,19 +1673,19 @@
               <a:buChar char=""/>
             </a:pPr>
             <a:r>
-              <a:rPr b="0" lang="pl-PL" sz="2000" spc="-1" strike="noStrike">
-                <a:solidFill>
-                  <a:schemeClr val="dk1"/>
-                </a:solidFill>
-                <a:latin typeface="Calibri"/>
+              <a:rPr b="0" lang="en-US" sz="2000" spc="-1" strike="noStrike">
+                <a:solidFill>
+                  <a:srgbClr val="000000"/>
+                </a:solidFill>
+                <a:latin typeface="Arial"/>
               </a:rPr>
               <a:t>Fourth Outline Level</a:t>
             </a:r>
-            <a:endParaRPr b="0" lang="pl-PL" sz="2000" spc="-1" strike="noStrike">
-              <a:solidFill>
-                <a:schemeClr val="dk1"/>
-              </a:solidFill>
-              <a:latin typeface="Calibri"/>
+            <a:endParaRPr b="0" lang="en-US" sz="2000" spc="-1" strike="noStrike">
+              <a:solidFill>
+                <a:srgbClr val="000000"/>
+              </a:solidFill>
+              <a:latin typeface="Arial"/>
             </a:endParaRPr>
           </a:p>
           <a:p>
@@ -1696,19 +1701,19 @@
               <a:buChar char=""/>
             </a:pPr>
             <a:r>
-              <a:rPr b="0" lang="pl-PL" sz="2000" spc="-1" strike="noStrike">
-                <a:solidFill>
-                  <a:schemeClr val="dk1"/>
-                </a:solidFill>
-                <a:latin typeface="Calibri"/>
+              <a:rPr b="0" lang="en-US" sz="2000" spc="-1" strike="noStrike">
+                <a:solidFill>
+                  <a:srgbClr val="000000"/>
+                </a:solidFill>
+                <a:latin typeface="Arial"/>
               </a:rPr>
               <a:t>Fifth Outline Level</a:t>
             </a:r>
-            <a:endParaRPr b="0" lang="pl-PL" sz="2000" spc="-1" strike="noStrike">
-              <a:solidFill>
-                <a:schemeClr val="dk1"/>
-              </a:solidFill>
-              <a:latin typeface="Calibri"/>
+            <a:endParaRPr b="0" lang="en-US" sz="2000" spc="-1" strike="noStrike">
+              <a:solidFill>
+                <a:srgbClr val="000000"/>
+              </a:solidFill>
+              <a:latin typeface="Arial"/>
             </a:endParaRPr>
           </a:p>
           <a:p>
@@ -1724,19 +1729,19 @@
               <a:buChar char=""/>
             </a:pPr>
             <a:r>
-              <a:rPr b="0" lang="pl-PL" sz="2000" spc="-1" strike="noStrike">
-                <a:solidFill>
-                  <a:schemeClr val="dk1"/>
-                </a:solidFill>
-                <a:latin typeface="Calibri"/>
+              <a:rPr b="0" lang="en-US" sz="2000" spc="-1" strike="noStrike">
+                <a:solidFill>
+                  <a:srgbClr val="000000"/>
+                </a:solidFill>
+                <a:latin typeface="Arial"/>
               </a:rPr>
               <a:t>Sixth Outline Level</a:t>
             </a:r>
-            <a:endParaRPr b="0" lang="pl-PL" sz="2000" spc="-1" strike="noStrike">
-              <a:solidFill>
-                <a:schemeClr val="dk1"/>
-              </a:solidFill>
-              <a:latin typeface="Calibri"/>
+            <a:endParaRPr b="0" lang="en-US" sz="2000" spc="-1" strike="noStrike">
+              <a:solidFill>
+                <a:srgbClr val="000000"/>
+              </a:solidFill>
+              <a:latin typeface="Arial"/>
             </a:endParaRPr>
           </a:p>
           <a:p>
@@ -1752,19 +1757,19 @@
               <a:buChar char=""/>
             </a:pPr>
             <a:r>
-              <a:rPr b="0" lang="pl-PL" sz="2000" spc="-1" strike="noStrike">
-                <a:solidFill>
-                  <a:schemeClr val="dk1"/>
-                </a:solidFill>
-                <a:latin typeface="Calibri"/>
+              <a:rPr b="0" lang="en-US" sz="2000" spc="-1" strike="noStrike">
+                <a:solidFill>
+                  <a:srgbClr val="000000"/>
+                </a:solidFill>
+                <a:latin typeface="Arial"/>
               </a:rPr>
               <a:t>Seventh Outline Level</a:t>
             </a:r>
-            <a:endParaRPr b="0" lang="pl-PL" sz="2000" spc="-1" strike="noStrike">
-              <a:solidFill>
-                <a:schemeClr val="dk1"/>
-              </a:solidFill>
-              <a:latin typeface="Calibri"/>
+            <a:endParaRPr b="0" lang="en-US" sz="2000" spc="-1" strike="noStrike">
+              <a:solidFill>
+                <a:srgbClr val="000000"/>
+              </a:solidFill>
+              <a:latin typeface="Arial"/>
             </a:endParaRPr>
           </a:p>
         </p:txBody>
@@ -1804,18 +1809,18 @@
       </p:grpSpPr>
       <p:sp>
         <p:nvSpPr>
-          <p:cNvPr id="54" name="PlaceHolder 1"/>
+          <p:cNvPr id="43" name="PlaceHolder 1"/>
           <p:cNvSpPr>
             <a:spLocks noGrp="1"/>
           </p:cNvSpPr>
           <p:nvPr>
-            <p:ph type="title"/>
+            <p:ph type="ftr" idx="28"/>
           </p:nvPr>
         </p:nvSpPr>
         <p:spPr>
           <a:xfrm>
-            <a:off x="457200" y="272880"/>
-            <a:ext cx="3007800" cy="1161720"/>
+            <a:off x="3124080" y="6356520"/>
+            <a:ext cx="2894760" cy="364320"/>
           </a:xfrm>
           <a:prstGeom prst="rect">
             <a:avLst/>
@@ -1826,48 +1831,68 @@
           </a:ln>
         </p:spPr>
         <p:txBody>
-          <a:bodyPr lIns="91440" rIns="91440" tIns="45720" bIns="45720" anchor="b">
+          <a:bodyPr lIns="91440" rIns="91440" tIns="45720" bIns="45720" anchor="ctr">
             <a:noAutofit/>
           </a:bodyPr>
-          <a:p>
-            <a:pPr indent="0" defTabSz="914400">
+          <a:lstStyle>
+            <a:lvl1pPr indent="0" algn="ctr">
               <a:lnSpc>
                 <a:spcPct val="100000"/>
               </a:lnSpc>
               <a:buNone/>
-            </a:pPr>
-            <a:r>
-              <a:rPr b="1" lang="pl-PL" sz="2000" spc="-1" strike="noStrike">
-                <a:solidFill>
-                  <a:schemeClr val="dk1"/>
-                </a:solidFill>
-                <a:latin typeface="Calibri"/>
-              </a:rPr>
-              <a:t>Kliknij, aby edytować styl</a:t>
-            </a:r>
-            <a:endParaRPr b="0" lang="pl-PL" sz="2000" spc="-1" strike="noStrike">
-              <a:solidFill>
-                <a:schemeClr val="dk1"/>
-              </a:solidFill>
-              <a:latin typeface="Calibri"/>
-            </a:endParaRPr>
-          </a:p>
-        </p:txBody>
-      </p:sp>
-      <p:sp>
-        <p:nvSpPr>
-          <p:cNvPr id="55" name="PlaceHolder 2"/>
+              <a:tabLst>
+                <a:tab algn="l" pos="0"/>
+              </a:tabLst>
+              <a:defRPr b="0" lang="en-US" sz="1400" spc="-1" strike="noStrike">
+                <a:solidFill>
+                  <a:srgbClr val="000000"/>
+                </a:solidFill>
+                <a:latin typeface="Times New Roman"/>
+              </a:defRPr>
+            </a:lvl1pPr>
+          </a:lstStyle>
+          <a:p>
+            <a:pPr indent="0" algn="ctr">
+              <a:lnSpc>
+                <a:spcPct val="100000"/>
+              </a:lnSpc>
+              <a:buNone/>
+              <a:tabLst>
+                <a:tab algn="l" pos="0"/>
+              </a:tabLst>
+            </a:pPr>
+            <a:r>
+              <a:rPr b="0" lang="en-US" sz="1400" spc="-1" strike="noStrike">
+                <a:solidFill>
+                  <a:srgbClr val="000000"/>
+                </a:solidFill>
+                <a:latin typeface="Times New Roman"/>
+              </a:rPr>
+              <a:t>&lt;footer&gt;</a:t>
+            </a:r>
+            <a:endParaRPr b="0" lang="en-US" sz="1400" spc="-1" strike="noStrike">
+              <a:solidFill>
+                <a:srgbClr val="000000"/>
+              </a:solidFill>
+              <a:latin typeface="Times New Roman"/>
+            </a:endParaRPr>
+          </a:p>
+        </p:txBody>
+      </p:sp>
+      <p:sp>
+        <p:nvSpPr>
+          <p:cNvPr id="44" name="PlaceHolder 2"/>
           <p:cNvSpPr>
             <a:spLocks noGrp="1"/>
           </p:cNvSpPr>
           <p:nvPr>
-            <p:ph type="body"/>
+            <p:ph type="sldNum" idx="29"/>
           </p:nvPr>
         </p:nvSpPr>
         <p:spPr>
           <a:xfrm>
-            <a:off x="3575160" y="272880"/>
-            <a:ext cx="5111280" cy="5852880"/>
+            <a:off x="6553080" y="6356520"/>
+            <a:ext cx="2133000" cy="364320"/>
           </a:xfrm>
           <a:prstGeom prst="rect">
             <a:avLst/>
@@ -1878,175 +1903,72 @@
           </a:ln>
         </p:spPr>
         <p:txBody>
-          <a:bodyPr lIns="91440" rIns="91440" tIns="45720" bIns="45720" anchor="t">
+          <a:bodyPr lIns="91440" rIns="91440" tIns="45720" bIns="45720" anchor="ctr">
             <a:noAutofit/>
           </a:bodyPr>
-          <a:p>
-            <a:pPr marL="343080" indent="-343080" defTabSz="914400">
-              <a:lnSpc>
-                <a:spcPct val="100000"/>
-              </a:lnSpc>
-              <a:spcBef>
-                <a:spcPts val="641"/>
-              </a:spcBef>
-              <a:buClr>
-                <a:srgbClr val="000000"/>
-              </a:buClr>
-              <a:buFont typeface="Arial"/>
-              <a:buChar char="•"/>
-            </a:pPr>
-            <a:r>
-              <a:rPr b="0" lang="pl-PL" sz="3200" spc="-1" strike="noStrike">
-                <a:solidFill>
-                  <a:schemeClr val="dk1"/>
+          <a:lstStyle>
+            <a:lvl1pPr indent="0" algn="r" defTabSz="914400">
+              <a:lnSpc>
+                <a:spcPct val="100000"/>
+              </a:lnSpc>
+              <a:buNone/>
+              <a:tabLst>
+                <a:tab algn="l" pos="0"/>
+              </a:tabLst>
+              <a:defRPr b="0" lang="pl-PL" sz="1200" spc="-1" strike="noStrike">
+                <a:solidFill>
+                  <a:schemeClr val="dk1">
+                    <a:tint val="75000"/>
+                  </a:schemeClr>
                 </a:solidFill>
                 <a:latin typeface="Calibri"/>
-              </a:rPr>
-              <a:t>Kliknij, aby edytować style wzorca tekstu</a:t>
-            </a:r>
-            <a:endParaRPr b="0" lang="pl-PL" sz="3200" spc="-1" strike="noStrike">
-              <a:solidFill>
-                <a:schemeClr val="dk1"/>
-              </a:solidFill>
-              <a:latin typeface="Calibri"/>
-            </a:endParaRPr>
-          </a:p>
-          <a:p>
-            <a:pPr lvl="1" marL="743040" indent="-285840" defTabSz="914400">
-              <a:lnSpc>
-                <a:spcPct val="100000"/>
-              </a:lnSpc>
-              <a:spcBef>
-                <a:spcPts val="561"/>
-              </a:spcBef>
-              <a:buClr>
-                <a:srgbClr val="000000"/>
-              </a:buClr>
-              <a:buFont typeface="Arial"/>
-              <a:buChar char="–"/>
-            </a:pPr>
-            <a:r>
-              <a:rPr b="0" lang="pl-PL" sz="2800" spc="-1" strike="noStrike">
-                <a:solidFill>
-                  <a:schemeClr val="dk1"/>
+              </a:defRPr>
+            </a:lvl1pPr>
+          </a:lstStyle>
+          <a:p>
+            <a:pPr indent="0" algn="r" defTabSz="914400">
+              <a:lnSpc>
+                <a:spcPct val="100000"/>
+              </a:lnSpc>
+              <a:buNone/>
+              <a:tabLst>
+                <a:tab algn="l" pos="0"/>
+              </a:tabLst>
+            </a:pPr>
+            <a:fld id="{9B5EF341-4200-4F2A-B959-0EA46F5AA62C}" type="slidenum">
+              <a:rPr b="0" lang="pl-PL" sz="1200" spc="-1" strike="noStrike">
+                <a:solidFill>
+                  <a:schemeClr val="dk1">
+                    <a:tint val="75000"/>
+                  </a:schemeClr>
                 </a:solidFill>
                 <a:latin typeface="Calibri"/>
               </a:rPr>
-              <a:t>Drugi poziom</a:t>
-            </a:r>
-            <a:endParaRPr b="0" lang="pl-PL" sz="2800" spc="-1" strike="noStrike">
-              <a:solidFill>
-                <a:schemeClr val="dk1"/>
-              </a:solidFill>
-              <a:latin typeface="Calibri"/>
-            </a:endParaRPr>
-          </a:p>
-          <a:p>
-            <a:pPr lvl="2" marL="1143000" indent="-228600" defTabSz="914400">
-              <a:lnSpc>
-                <a:spcPct val="100000"/>
-              </a:lnSpc>
-              <a:spcBef>
-                <a:spcPts val="479"/>
-              </a:spcBef>
-              <a:buClr>
-                <a:srgbClr val="000000"/>
-              </a:buClr>
-              <a:buFont typeface="Arial"/>
-              <a:buChar char="•"/>
-            </a:pPr>
-            <a:r>
-              <a:rPr b="0" lang="pl-PL" sz="2400" spc="-1" strike="noStrike">
-                <a:solidFill>
-                  <a:schemeClr val="dk1"/>
-                </a:solidFill>
-                <a:latin typeface="Calibri"/>
-              </a:rPr>
-              <a:t>Trzeci poziom</a:t>
-            </a:r>
-            <a:endParaRPr b="0" lang="pl-PL" sz="2400" spc="-1" strike="noStrike">
-              <a:solidFill>
-                <a:schemeClr val="dk1"/>
-              </a:solidFill>
-              <a:latin typeface="Calibri"/>
-            </a:endParaRPr>
-          </a:p>
-          <a:p>
-            <a:pPr lvl="3" marL="1600200" indent="-228600" defTabSz="914400">
-              <a:lnSpc>
-                <a:spcPct val="100000"/>
-              </a:lnSpc>
-              <a:spcBef>
-                <a:spcPts val="400"/>
-              </a:spcBef>
-              <a:buClr>
-                <a:srgbClr val="000000"/>
-              </a:buClr>
-              <a:buFont typeface="Arial"/>
-              <a:buChar char="–"/>
-            </a:pPr>
-            <a:r>
-              <a:rPr b="0" lang="pl-PL" sz="2000" spc="-1" strike="noStrike">
-                <a:solidFill>
-                  <a:schemeClr val="dk1"/>
-                </a:solidFill>
-                <a:latin typeface="Calibri"/>
-              </a:rPr>
-              <a:t>Czwarty poziom</a:t>
-            </a:r>
-            <a:endParaRPr b="0" lang="pl-PL" sz="2000" spc="-1" strike="noStrike">
-              <a:solidFill>
-                <a:schemeClr val="dk1"/>
-              </a:solidFill>
-              <a:latin typeface="Calibri"/>
-            </a:endParaRPr>
-          </a:p>
-          <a:p>
-            <a:pPr lvl="4" marL="2057400" indent="-228600" defTabSz="914400">
-              <a:lnSpc>
-                <a:spcPct val="100000"/>
-              </a:lnSpc>
-              <a:spcBef>
-                <a:spcPts val="400"/>
-              </a:spcBef>
-              <a:buClr>
-                <a:srgbClr val="000000"/>
-              </a:buClr>
-              <a:buFont typeface="Arial"/>
-              <a:buChar char="»"/>
-            </a:pPr>
-            <a:r>
-              <a:rPr b="0" lang="pl-PL" sz="2000" spc="-1" strike="noStrike">
-                <a:solidFill>
-                  <a:schemeClr val="dk1"/>
-                </a:solidFill>
-                <a:latin typeface="Calibri"/>
-              </a:rPr>
-              <a:t>Piąty poziom</a:t>
-            </a:r>
-            <a:endParaRPr b="0" lang="pl-PL" sz="2000" spc="-1" strike="noStrike">
-              <a:solidFill>
-                <a:schemeClr val="dk1"/>
-              </a:solidFill>
-              <a:latin typeface="Calibri"/>
-            </a:endParaRPr>
-          </a:p>
-        </p:txBody>
-      </p:sp>
-      <p:sp>
-        <p:nvSpPr>
-          <p:cNvPr id="56" name="PlaceHolder 3"/>
+              <a:t>&lt;number&gt;</a:t>
+            </a:fld>
+            <a:endParaRPr b="0" lang="en-US" sz="1200" spc="-1" strike="noStrike">
+              <a:solidFill>
+                <a:srgbClr val="000000"/>
+              </a:solidFill>
+              <a:latin typeface="Times New Roman"/>
+            </a:endParaRPr>
+          </a:p>
+        </p:txBody>
+      </p:sp>
+      <p:sp>
+        <p:nvSpPr>
+          <p:cNvPr id="45" name="PlaceHolder 3"/>
           <p:cNvSpPr>
             <a:spLocks noGrp="1"/>
           </p:cNvSpPr>
           <p:nvPr>
-            <p:ph type="body"/>
+            <p:ph type="dt" idx="30"/>
           </p:nvPr>
         </p:nvSpPr>
         <p:spPr>
           <a:xfrm>
-            <a:off x="457200" y="1434960"/>
-            <a:ext cx="3007800" cy="4690800"/>
+            <a:off x="457200" y="6356520"/>
+            <a:ext cx="2133000" cy="364320"/>
           </a:xfrm>
           <a:prstGeom prst="rect">
             <a:avLst/>
@@ -2057,139 +1979,11 @@
           </a:ln>
         </p:spPr>
         <p:txBody>
-          <a:bodyPr lIns="91440" rIns="91440" tIns="45720" bIns="45720" anchor="t">
-            <a:noAutofit/>
-          </a:bodyPr>
-          <a:p>
-            <a:pPr indent="0" defTabSz="914400">
-              <a:lnSpc>
-                <a:spcPct val="100000"/>
-              </a:lnSpc>
-              <a:spcBef>
-                <a:spcPts val="281"/>
-              </a:spcBef>
-              <a:buNone/>
-              <a:tabLst>
-                <a:tab algn="l" pos="0"/>
-              </a:tabLst>
-            </a:pPr>
-            <a:r>
-              <a:rPr b="0" lang="pl-PL" sz="1400" spc="-1" strike="noStrike">
-                <a:solidFill>
-                  <a:schemeClr val="dk1"/>
-                </a:solidFill>
-                <a:latin typeface="Calibri"/>
-              </a:rPr>
-              <a:t>Kliknij, aby edytować style wzorca tekstu</a:t>
-            </a:r>
-            <a:endParaRPr b="0" lang="pl-PL" sz="1400" spc="-1" strike="noStrike">
-              <a:solidFill>
-                <a:schemeClr val="dk1"/>
-              </a:solidFill>
-              <a:latin typeface="Calibri"/>
-            </a:endParaRPr>
-          </a:p>
-        </p:txBody>
-      </p:sp>
-      <p:sp>
-        <p:nvSpPr>
-          <p:cNvPr id="57" name="PlaceHolder 4"/>
-          <p:cNvSpPr>
-            <a:spLocks noGrp="1"/>
-          </p:cNvSpPr>
-          <p:nvPr>
-            <p:ph type="dt" idx="28"/>
-          </p:nvPr>
-        </p:nvSpPr>
-        <p:spPr>
-          <a:xfrm>
-            <a:off x="457200" y="6356520"/>
-            <a:ext cx="2133360" cy="364680"/>
-          </a:xfrm>
-          <a:prstGeom prst="rect">
-            <a:avLst/>
-          </a:prstGeom>
-          <a:noFill/>
-          <a:ln w="0">
-            <a:noFill/>
-          </a:ln>
-        </p:spPr>
-        <p:txBody>
           <a:bodyPr lIns="91440" rIns="91440" tIns="45720" bIns="45720" anchor="ctr">
             <a:noAutofit/>
           </a:bodyPr>
           <a:lstStyle>
-            <a:lvl1pPr indent="0" defTabSz="914400">
-              <a:lnSpc>
-                <a:spcPct val="100000"/>
-              </a:lnSpc>
-              <a:buNone/>
-              <a:defRPr b="0" lang="pl-PL" sz="1200" spc="-1" strike="noStrike">
-                <a:solidFill>
-                  <a:schemeClr val="dk1">
-                    <a:tint val="75000"/>
-                  </a:schemeClr>
-                </a:solidFill>
-                <a:latin typeface="Calibri"/>
-              </a:defRPr>
-            </a:lvl1pPr>
-          </a:lstStyle>
-          <a:p>
-            <a:pPr indent="0" defTabSz="914400">
-              <a:lnSpc>
-                <a:spcPct val="100000"/>
-              </a:lnSpc>
-              <a:buNone/>
-            </a:pPr>
-            <a:r>
-              <a:rPr b="0" lang="pl-PL" sz="1200" spc="-1" strike="noStrike">
-                <a:solidFill>
-                  <a:schemeClr val="dk1">
-                    <a:tint val="75000"/>
-                  </a:schemeClr>
-                </a:solidFill>
-                <a:latin typeface="Calibri"/>
-              </a:rPr>
-              <a:t>&lt;date/time&gt;</a:t>
-            </a:r>
-            <a:endParaRPr b="0" lang="en-US" sz="1200" spc="-1" strike="noStrike">
-              <a:solidFill>
-                <a:srgbClr val="000000"/>
-              </a:solidFill>
-              <a:latin typeface="Times New Roman"/>
-            </a:endParaRPr>
-          </a:p>
-        </p:txBody>
-      </p:sp>
-      <p:sp>
-        <p:nvSpPr>
-          <p:cNvPr id="58" name="PlaceHolder 5"/>
-          <p:cNvSpPr>
-            <a:spLocks noGrp="1"/>
-          </p:cNvSpPr>
-          <p:nvPr>
-            <p:ph type="ftr" idx="29"/>
-          </p:nvPr>
-        </p:nvSpPr>
-        <p:spPr>
-          <a:xfrm>
-            <a:off x="3124080" y="6356520"/>
-            <a:ext cx="2895120" cy="364680"/>
-          </a:xfrm>
-          <a:prstGeom prst="rect">
-            <a:avLst/>
-          </a:prstGeom>
-          <a:noFill/>
-          <a:ln w="0">
-            <a:noFill/>
-          </a:ln>
-        </p:spPr>
-        <p:txBody>
-          <a:bodyPr lIns="91440" rIns="91440" tIns="45720" bIns="45720" anchor="ctr">
-            <a:noAutofit/>
-          </a:bodyPr>
-          <a:lstStyle>
-            <a:lvl1pPr indent="0" algn="ctr">
+            <a:lvl1pPr indent="0">
               <a:buNone/>
               <a:defRPr b="0" lang="en-US" sz="1400" spc="-1" strike="noStrike">
                 <a:solidFill>
@@ -2200,7 +1994,7 @@
             </a:lvl1pPr>
           </a:lstStyle>
           <a:p>
-            <a:pPr indent="0" algn="ctr">
+            <a:pPr indent="0">
               <a:buNone/>
             </a:pPr>
             <a:r>
@@ -2210,79 +2004,9 @@
                 </a:solidFill>
                 <a:latin typeface="Times New Roman"/>
               </a:rPr>
-              <a:t>&lt;footer&gt;</a:t>
+              <a:t>&lt;date/time&gt;</a:t>
             </a:r>
             <a:endParaRPr b="0" lang="en-US" sz="1400" spc="-1" strike="noStrike">
-              <a:solidFill>
-                <a:srgbClr val="000000"/>
-              </a:solidFill>
-              <a:latin typeface="Times New Roman"/>
-            </a:endParaRPr>
-          </a:p>
-        </p:txBody>
-      </p:sp>
-      <p:sp>
-        <p:nvSpPr>
-          <p:cNvPr id="59" name="PlaceHolder 6"/>
-          <p:cNvSpPr>
-            <a:spLocks noGrp="1"/>
-          </p:cNvSpPr>
-          <p:nvPr>
-            <p:ph type="sldNum" idx="30"/>
-          </p:nvPr>
-        </p:nvSpPr>
-        <p:spPr>
-          <a:xfrm>
-            <a:off x="6553080" y="6356520"/>
-            <a:ext cx="2133360" cy="364680"/>
-          </a:xfrm>
-          <a:prstGeom prst="rect">
-            <a:avLst/>
-          </a:prstGeom>
-          <a:noFill/>
-          <a:ln w="0">
-            <a:noFill/>
-          </a:ln>
-        </p:spPr>
-        <p:txBody>
-          <a:bodyPr lIns="91440" rIns="91440" tIns="45720" bIns="45720" anchor="ctr">
-            <a:noAutofit/>
-          </a:bodyPr>
-          <a:lstStyle>
-            <a:lvl1pPr indent="0" algn="r" defTabSz="914400">
-              <a:lnSpc>
-                <a:spcPct val="100000"/>
-              </a:lnSpc>
-              <a:buNone/>
-              <a:defRPr b="0" lang="pl-PL" sz="1200" spc="-1" strike="noStrike">
-                <a:solidFill>
-                  <a:schemeClr val="dk1">
-                    <a:tint val="75000"/>
-                  </a:schemeClr>
-                </a:solidFill>
-                <a:latin typeface="Calibri"/>
-              </a:defRPr>
-            </a:lvl1pPr>
-          </a:lstStyle>
-          <a:p>
-            <a:pPr indent="0" algn="r" defTabSz="914400">
-              <a:lnSpc>
-                <a:spcPct val="100000"/>
-              </a:lnSpc>
-              <a:buNone/>
-            </a:pPr>
-            <a:fld id="{8556F4F1-CD2B-40BA-9896-A141C1185F1A}" type="slidenum">
-              <a:rPr b="0" lang="pl-PL" sz="1200" spc="-1" strike="noStrike">
-                <a:solidFill>
-                  <a:schemeClr val="dk1">
-                    <a:tint val="75000"/>
-                  </a:schemeClr>
-                </a:solidFill>
-                <a:latin typeface="Calibri"/>
-              </a:rPr>
-              <a:t>&lt;number&gt;</a:t>
-            </a:fld>
-            <a:endParaRPr b="0" lang="en-US" sz="1200" spc="-1" strike="noStrike">
               <a:solidFill>
                 <a:srgbClr val="000000"/>
               </a:solidFill>
@@ -2326,18 +2050,18 @@
       </p:grpSpPr>
       <p:sp>
         <p:nvSpPr>
-          <p:cNvPr id="60" name="PlaceHolder 1"/>
+          <p:cNvPr id="46" name="PlaceHolder 1"/>
           <p:cNvSpPr>
             <a:spLocks noGrp="1"/>
           </p:cNvSpPr>
           <p:nvPr>
-            <p:ph type="title"/>
+            <p:ph type="ftr" idx="31"/>
           </p:nvPr>
         </p:nvSpPr>
         <p:spPr>
           <a:xfrm>
-            <a:off x="1792440" y="4800600"/>
-            <a:ext cx="5486040" cy="566280"/>
+            <a:off x="3124080" y="6356520"/>
+            <a:ext cx="2894760" cy="364320"/>
           </a:xfrm>
           <a:prstGeom prst="rect">
             <a:avLst/>
@@ -2348,48 +2072,68 @@
           </a:ln>
         </p:spPr>
         <p:txBody>
-          <a:bodyPr lIns="91440" rIns="91440" tIns="45720" bIns="45720" anchor="b">
+          <a:bodyPr lIns="91440" rIns="91440" tIns="45720" bIns="45720" anchor="ctr">
             <a:noAutofit/>
           </a:bodyPr>
-          <a:p>
-            <a:pPr indent="0" defTabSz="914400">
+          <a:lstStyle>
+            <a:lvl1pPr indent="0" algn="ctr">
               <a:lnSpc>
                 <a:spcPct val="100000"/>
               </a:lnSpc>
               <a:buNone/>
-            </a:pPr>
-            <a:r>
-              <a:rPr b="1" lang="pl-PL" sz="2000" spc="-1" strike="noStrike">
-                <a:solidFill>
-                  <a:schemeClr val="dk1"/>
-                </a:solidFill>
-                <a:latin typeface="Calibri"/>
-              </a:rPr>
-              <a:t>Kliknij, aby edytować styl</a:t>
-            </a:r>
-            <a:endParaRPr b="0" lang="pl-PL" sz="2000" spc="-1" strike="noStrike">
-              <a:solidFill>
-                <a:schemeClr val="dk1"/>
-              </a:solidFill>
-              <a:latin typeface="Calibri"/>
-            </a:endParaRPr>
-          </a:p>
-        </p:txBody>
-      </p:sp>
-      <p:sp>
-        <p:nvSpPr>
-          <p:cNvPr id="61" name="PlaceHolder 2"/>
+              <a:tabLst>
+                <a:tab algn="l" pos="0"/>
+              </a:tabLst>
+              <a:defRPr b="0" lang="en-US" sz="1400" spc="-1" strike="noStrike">
+                <a:solidFill>
+                  <a:srgbClr val="000000"/>
+                </a:solidFill>
+                <a:latin typeface="Times New Roman"/>
+              </a:defRPr>
+            </a:lvl1pPr>
+          </a:lstStyle>
+          <a:p>
+            <a:pPr indent="0" algn="ctr">
+              <a:lnSpc>
+                <a:spcPct val="100000"/>
+              </a:lnSpc>
+              <a:buNone/>
+              <a:tabLst>
+                <a:tab algn="l" pos="0"/>
+              </a:tabLst>
+            </a:pPr>
+            <a:r>
+              <a:rPr b="0" lang="en-US" sz="1400" spc="-1" strike="noStrike">
+                <a:solidFill>
+                  <a:srgbClr val="000000"/>
+                </a:solidFill>
+                <a:latin typeface="Times New Roman"/>
+              </a:rPr>
+              <a:t>&lt;footer&gt;</a:t>
+            </a:r>
+            <a:endParaRPr b="0" lang="en-US" sz="1400" spc="-1" strike="noStrike">
+              <a:solidFill>
+                <a:srgbClr val="000000"/>
+              </a:solidFill>
+              <a:latin typeface="Times New Roman"/>
+            </a:endParaRPr>
+          </a:p>
+        </p:txBody>
+      </p:sp>
+      <p:sp>
+        <p:nvSpPr>
+          <p:cNvPr id="47" name="PlaceHolder 2"/>
           <p:cNvSpPr>
             <a:spLocks noGrp="1"/>
           </p:cNvSpPr>
           <p:nvPr>
-            <p:ph type="body"/>
+            <p:ph type="sldNum" idx="32"/>
           </p:nvPr>
         </p:nvSpPr>
         <p:spPr>
           <a:xfrm>
-            <a:off x="1792440" y="612720"/>
-            <a:ext cx="5486040" cy="4114440"/>
+            <a:off x="6553080" y="6356520"/>
+            <a:ext cx="2133000" cy="364320"/>
           </a:xfrm>
           <a:prstGeom prst="rect">
             <a:avLst/>
@@ -2400,221 +2144,72 @@
           </a:ln>
         </p:spPr>
         <p:txBody>
-          <a:bodyPr lIns="90000" rIns="90000" tIns="45000" bIns="45000" anchor="t">
+          <a:bodyPr lIns="91440" rIns="91440" tIns="45720" bIns="45720" anchor="ctr">
             <a:noAutofit/>
           </a:bodyPr>
-          <a:p>
-            <a:pPr marL="432000" indent="-324000">
-              <a:spcBef>
-                <a:spcPts val="1417"/>
-              </a:spcBef>
-              <a:buClr>
-                <a:srgbClr val="000000"/>
-              </a:buClr>
-              <a:buSzPct val="45000"/>
-              <a:buFont typeface="Wingdings" charset="2"/>
-              <a:buChar char=""/>
-            </a:pPr>
-            <a:r>
-              <a:rPr b="0" lang="pl-PL" sz="3200" spc="-1" strike="noStrike">
-                <a:solidFill>
-                  <a:schemeClr val="dk1"/>
+          <a:lstStyle>
+            <a:lvl1pPr indent="0" algn="r" defTabSz="914400">
+              <a:lnSpc>
+                <a:spcPct val="100000"/>
+              </a:lnSpc>
+              <a:buNone/>
+              <a:tabLst>
+                <a:tab algn="l" pos="0"/>
+              </a:tabLst>
+              <a:defRPr b="0" lang="pl-PL" sz="1200" spc="-1" strike="noStrike">
+                <a:solidFill>
+                  <a:schemeClr val="dk1">
+                    <a:tint val="75000"/>
+                  </a:schemeClr>
                 </a:solidFill>
                 <a:latin typeface="Calibri"/>
-              </a:rPr>
-              <a:t>Click to edit the outline text format</a:t>
-            </a:r>
-            <a:endParaRPr b="0" lang="pl-PL" sz="3200" spc="-1" strike="noStrike">
-              <a:solidFill>
-                <a:schemeClr val="dk1"/>
-              </a:solidFill>
-              <a:latin typeface="Calibri"/>
-            </a:endParaRPr>
-          </a:p>
-          <a:p>
-            <a:pPr lvl="1" marL="864000" indent="-324000">
-              <a:spcBef>
-                <a:spcPts val="1134"/>
-              </a:spcBef>
-              <a:buClr>
-                <a:srgbClr val="000000"/>
-              </a:buClr>
-              <a:buSzPct val="75000"/>
-              <a:buFont typeface="Symbol" charset="2"/>
-              <a:buChar char=""/>
-            </a:pPr>
-            <a:r>
-              <a:rPr b="0" lang="pl-PL" sz="3200" spc="-1" strike="noStrike">
-                <a:solidFill>
-                  <a:schemeClr val="dk1"/>
+              </a:defRPr>
+            </a:lvl1pPr>
+          </a:lstStyle>
+          <a:p>
+            <a:pPr indent="0" algn="r" defTabSz="914400">
+              <a:lnSpc>
+                <a:spcPct val="100000"/>
+              </a:lnSpc>
+              <a:buNone/>
+              <a:tabLst>
+                <a:tab algn="l" pos="0"/>
+              </a:tabLst>
+            </a:pPr>
+            <a:fld id="{98A4EF4E-256A-4328-8AE7-C974D1930BA5}" type="slidenum">
+              <a:rPr b="0" lang="pl-PL" sz="1200" spc="-1" strike="noStrike">
+                <a:solidFill>
+                  <a:schemeClr val="dk1">
+                    <a:tint val="75000"/>
+                  </a:schemeClr>
                 </a:solidFill>
                 <a:latin typeface="Calibri"/>
               </a:rPr>
-              <a:t>Second Outline Level</a:t>
-            </a:r>
-            <a:endParaRPr b="0" lang="pl-PL" sz="3200" spc="-1" strike="noStrike">
-              <a:solidFill>
-                <a:schemeClr val="dk1"/>
-              </a:solidFill>
-              <a:latin typeface="Calibri"/>
-            </a:endParaRPr>
-          </a:p>
-          <a:p>
-            <a:pPr lvl="2" marL="1296000" indent="-288000">
-              <a:spcBef>
-                <a:spcPts val="850"/>
-              </a:spcBef>
-              <a:buClr>
-                <a:srgbClr val="000000"/>
-              </a:buClr>
-              <a:buSzPct val="45000"/>
-              <a:buFont typeface="Wingdings" charset="2"/>
-              <a:buChar char=""/>
-            </a:pPr>
-            <a:r>
-              <a:rPr b="0" lang="pl-PL" sz="3200" spc="-1" strike="noStrike">
-                <a:solidFill>
-                  <a:schemeClr val="dk1"/>
-                </a:solidFill>
-                <a:latin typeface="Calibri"/>
-              </a:rPr>
-              <a:t>Third Outline Level</a:t>
-            </a:r>
-            <a:endParaRPr b="0" lang="pl-PL" sz="3200" spc="-1" strike="noStrike">
-              <a:solidFill>
-                <a:schemeClr val="dk1"/>
-              </a:solidFill>
-              <a:latin typeface="Calibri"/>
-            </a:endParaRPr>
-          </a:p>
-          <a:p>
-            <a:pPr lvl="3" marL="1728000" indent="-216000">
-              <a:spcBef>
-                <a:spcPts val="567"/>
-              </a:spcBef>
-              <a:buClr>
-                <a:srgbClr val="000000"/>
-              </a:buClr>
-              <a:buSzPct val="75000"/>
-              <a:buFont typeface="Symbol" charset="2"/>
-              <a:buChar char=""/>
-            </a:pPr>
-            <a:r>
-              <a:rPr b="0" lang="pl-PL" sz="3200" spc="-1" strike="noStrike">
-                <a:solidFill>
-                  <a:schemeClr val="dk1"/>
-                </a:solidFill>
-                <a:latin typeface="Calibri"/>
-              </a:rPr>
-              <a:t>Fourth Outline Level</a:t>
-            </a:r>
-            <a:endParaRPr b="0" lang="pl-PL" sz="3200" spc="-1" strike="noStrike">
-              <a:solidFill>
-                <a:schemeClr val="dk1"/>
-              </a:solidFill>
-              <a:latin typeface="Calibri"/>
-            </a:endParaRPr>
-          </a:p>
-          <a:p>
-            <a:pPr lvl="4" marL="2160000" indent="-216000">
-              <a:spcBef>
-                <a:spcPts val="283"/>
-              </a:spcBef>
-              <a:buClr>
-                <a:srgbClr val="000000"/>
-              </a:buClr>
-              <a:buSzPct val="45000"/>
-              <a:buFont typeface="Wingdings" charset="2"/>
-              <a:buChar char=""/>
-            </a:pPr>
-            <a:r>
-              <a:rPr b="0" lang="pl-PL" sz="3200" spc="-1" strike="noStrike">
-                <a:solidFill>
-                  <a:schemeClr val="dk1"/>
-                </a:solidFill>
-                <a:latin typeface="Calibri"/>
-              </a:rPr>
-              <a:t>Fifth Outline Level</a:t>
-            </a:r>
-            <a:endParaRPr b="0" lang="pl-PL" sz="3200" spc="-1" strike="noStrike">
-              <a:solidFill>
-                <a:schemeClr val="dk1"/>
-              </a:solidFill>
-              <a:latin typeface="Calibri"/>
-            </a:endParaRPr>
-          </a:p>
-          <a:p>
-            <a:pPr lvl="5" marL="2592000" indent="-216000">
-              <a:spcBef>
-                <a:spcPts val="283"/>
-              </a:spcBef>
-              <a:buClr>
-                <a:srgbClr val="000000"/>
-              </a:buClr>
-              <a:buSzPct val="45000"/>
-              <a:buFont typeface="Wingdings" charset="2"/>
-              <a:buChar char=""/>
-            </a:pPr>
-            <a:r>
-              <a:rPr b="0" lang="pl-PL" sz="3200" spc="-1" strike="noStrike">
-                <a:solidFill>
-                  <a:schemeClr val="dk1"/>
-                </a:solidFill>
-                <a:latin typeface="Calibri"/>
-              </a:rPr>
-              <a:t>Sixth Outline Level</a:t>
-            </a:r>
-            <a:endParaRPr b="0" lang="pl-PL" sz="3200" spc="-1" strike="noStrike">
-              <a:solidFill>
-                <a:schemeClr val="dk1"/>
-              </a:solidFill>
-              <a:latin typeface="Calibri"/>
-            </a:endParaRPr>
-          </a:p>
-          <a:p>
-            <a:pPr lvl="6" marL="3024000" indent="-216000">
-              <a:spcBef>
-                <a:spcPts val="283"/>
-              </a:spcBef>
-              <a:buClr>
-                <a:srgbClr val="000000"/>
-              </a:buClr>
-              <a:buSzPct val="45000"/>
-              <a:buFont typeface="Wingdings" charset="2"/>
-              <a:buChar char=""/>
-            </a:pPr>
-            <a:r>
-              <a:rPr b="0" lang="pl-PL" sz="3200" spc="-1" strike="noStrike">
-                <a:solidFill>
-                  <a:schemeClr val="dk1"/>
-                </a:solidFill>
-                <a:latin typeface="Calibri"/>
-              </a:rPr>
-              <a:t>Seventh Outline Level</a:t>
-            </a:r>
-            <a:endParaRPr b="0" lang="pl-PL" sz="3200" spc="-1" strike="noStrike">
-              <a:solidFill>
-                <a:schemeClr val="dk1"/>
-              </a:solidFill>
-              <a:latin typeface="Calibri"/>
-            </a:endParaRPr>
-          </a:p>
-        </p:txBody>
-      </p:sp>
-      <p:sp>
-        <p:nvSpPr>
-          <p:cNvPr id="62" name="PlaceHolder 3"/>
+              <a:t>&lt;number&gt;</a:t>
+            </a:fld>
+            <a:endParaRPr b="0" lang="en-US" sz="1200" spc="-1" strike="noStrike">
+              <a:solidFill>
+                <a:srgbClr val="000000"/>
+              </a:solidFill>
+              <a:latin typeface="Times New Roman"/>
+            </a:endParaRPr>
+          </a:p>
+        </p:txBody>
+      </p:sp>
+      <p:sp>
+        <p:nvSpPr>
+          <p:cNvPr id="48" name="PlaceHolder 3"/>
           <p:cNvSpPr>
             <a:spLocks noGrp="1"/>
           </p:cNvSpPr>
           <p:nvPr>
-            <p:ph type="body"/>
+            <p:ph type="dt" idx="33"/>
           </p:nvPr>
         </p:nvSpPr>
         <p:spPr>
           <a:xfrm>
-            <a:off x="1792440" y="5367240"/>
-            <a:ext cx="5486040" cy="804600"/>
+            <a:off x="457200" y="6356520"/>
+            <a:ext cx="2133000" cy="364320"/>
           </a:xfrm>
           <a:prstGeom prst="rect">
             <a:avLst/>
@@ -2625,139 +2220,11 @@
           </a:ln>
         </p:spPr>
         <p:txBody>
-          <a:bodyPr lIns="91440" rIns="91440" tIns="45720" bIns="45720" anchor="t">
-            <a:noAutofit/>
-          </a:bodyPr>
-          <a:p>
-            <a:pPr indent="0" defTabSz="914400">
-              <a:lnSpc>
-                <a:spcPct val="100000"/>
-              </a:lnSpc>
-              <a:spcBef>
-                <a:spcPts val="281"/>
-              </a:spcBef>
-              <a:buNone/>
-              <a:tabLst>
-                <a:tab algn="l" pos="0"/>
-              </a:tabLst>
-            </a:pPr>
-            <a:r>
-              <a:rPr b="0" lang="pl-PL" sz="1400" spc="-1" strike="noStrike">
-                <a:solidFill>
-                  <a:schemeClr val="dk1"/>
-                </a:solidFill>
-                <a:latin typeface="Calibri"/>
-              </a:rPr>
-              <a:t>Kliknij, aby edytować style wzorca tekstu</a:t>
-            </a:r>
-            <a:endParaRPr b="0" lang="pl-PL" sz="1400" spc="-1" strike="noStrike">
-              <a:solidFill>
-                <a:schemeClr val="dk1"/>
-              </a:solidFill>
-              <a:latin typeface="Calibri"/>
-            </a:endParaRPr>
-          </a:p>
-        </p:txBody>
-      </p:sp>
-      <p:sp>
-        <p:nvSpPr>
-          <p:cNvPr id="63" name="PlaceHolder 4"/>
-          <p:cNvSpPr>
-            <a:spLocks noGrp="1"/>
-          </p:cNvSpPr>
-          <p:nvPr>
-            <p:ph type="dt" idx="31"/>
-          </p:nvPr>
-        </p:nvSpPr>
-        <p:spPr>
-          <a:xfrm>
-            <a:off x="457200" y="6356520"/>
-            <a:ext cx="2133360" cy="364680"/>
-          </a:xfrm>
-          <a:prstGeom prst="rect">
-            <a:avLst/>
-          </a:prstGeom>
-          <a:noFill/>
-          <a:ln w="0">
-            <a:noFill/>
-          </a:ln>
-        </p:spPr>
-        <p:txBody>
           <a:bodyPr lIns="91440" rIns="91440" tIns="45720" bIns="45720" anchor="ctr">
             <a:noAutofit/>
           </a:bodyPr>
           <a:lstStyle>
-            <a:lvl1pPr indent="0" defTabSz="914400">
-              <a:lnSpc>
-                <a:spcPct val="100000"/>
-              </a:lnSpc>
-              <a:buNone/>
-              <a:defRPr b="0" lang="pl-PL" sz="1200" spc="-1" strike="noStrike">
-                <a:solidFill>
-                  <a:schemeClr val="dk1">
-                    <a:tint val="75000"/>
-                  </a:schemeClr>
-                </a:solidFill>
-                <a:latin typeface="Calibri"/>
-              </a:defRPr>
-            </a:lvl1pPr>
-          </a:lstStyle>
-          <a:p>
-            <a:pPr indent="0" defTabSz="914400">
-              <a:lnSpc>
-                <a:spcPct val="100000"/>
-              </a:lnSpc>
-              <a:buNone/>
-            </a:pPr>
-            <a:r>
-              <a:rPr b="0" lang="pl-PL" sz="1200" spc="-1" strike="noStrike">
-                <a:solidFill>
-                  <a:schemeClr val="dk1">
-                    <a:tint val="75000"/>
-                  </a:schemeClr>
-                </a:solidFill>
-                <a:latin typeface="Calibri"/>
-              </a:rPr>
-              <a:t>&lt;date/time&gt;</a:t>
-            </a:r>
-            <a:endParaRPr b="0" lang="en-US" sz="1200" spc="-1" strike="noStrike">
-              <a:solidFill>
-                <a:srgbClr val="000000"/>
-              </a:solidFill>
-              <a:latin typeface="Times New Roman"/>
-            </a:endParaRPr>
-          </a:p>
-        </p:txBody>
-      </p:sp>
-      <p:sp>
-        <p:nvSpPr>
-          <p:cNvPr id="64" name="PlaceHolder 5"/>
-          <p:cNvSpPr>
-            <a:spLocks noGrp="1"/>
-          </p:cNvSpPr>
-          <p:nvPr>
-            <p:ph type="ftr" idx="32"/>
-          </p:nvPr>
-        </p:nvSpPr>
-        <p:spPr>
-          <a:xfrm>
-            <a:off x="3124080" y="6356520"/>
-            <a:ext cx="2895120" cy="364680"/>
-          </a:xfrm>
-          <a:prstGeom prst="rect">
-            <a:avLst/>
-          </a:prstGeom>
-          <a:noFill/>
-          <a:ln w="0">
-            <a:noFill/>
-          </a:ln>
-        </p:spPr>
-        <p:txBody>
-          <a:bodyPr lIns="91440" rIns="91440" tIns="45720" bIns="45720" anchor="ctr">
-            <a:noAutofit/>
-          </a:bodyPr>
-          <a:lstStyle>
-            <a:lvl1pPr indent="0" algn="ctr">
+            <a:lvl1pPr indent="0">
               <a:buNone/>
               <a:defRPr b="0" lang="en-US" sz="1400" spc="-1" strike="noStrike">
                 <a:solidFill>
@@ -2768,7 +2235,7 @@
             </a:lvl1pPr>
           </a:lstStyle>
           <a:p>
-            <a:pPr indent="0" algn="ctr">
+            <a:pPr indent="0">
               <a:buNone/>
             </a:pPr>
             <a:r>
@@ -2778,79 +2245,9 @@
                 </a:solidFill>
                 <a:latin typeface="Times New Roman"/>
               </a:rPr>
-              <a:t>&lt;footer&gt;</a:t>
+              <a:t>&lt;date/time&gt;</a:t>
             </a:r>
             <a:endParaRPr b="0" lang="en-US" sz="1400" spc="-1" strike="noStrike">
-              <a:solidFill>
-                <a:srgbClr val="000000"/>
-              </a:solidFill>
-              <a:latin typeface="Times New Roman"/>
-            </a:endParaRPr>
-          </a:p>
-        </p:txBody>
-      </p:sp>
-      <p:sp>
-        <p:nvSpPr>
-          <p:cNvPr id="65" name="PlaceHolder 6"/>
-          <p:cNvSpPr>
-            <a:spLocks noGrp="1"/>
-          </p:cNvSpPr>
-          <p:nvPr>
-            <p:ph type="sldNum" idx="33"/>
-          </p:nvPr>
-        </p:nvSpPr>
-        <p:spPr>
-          <a:xfrm>
-            <a:off x="6553080" y="6356520"/>
-            <a:ext cx="2133360" cy="364680"/>
-          </a:xfrm>
-          <a:prstGeom prst="rect">
-            <a:avLst/>
-          </a:prstGeom>
-          <a:noFill/>
-          <a:ln w="0">
-            <a:noFill/>
-          </a:ln>
-        </p:spPr>
-        <p:txBody>
-          <a:bodyPr lIns="91440" rIns="91440" tIns="45720" bIns="45720" anchor="ctr">
-            <a:noAutofit/>
-          </a:bodyPr>
-          <a:lstStyle>
-            <a:lvl1pPr indent="0" algn="r" defTabSz="914400">
-              <a:lnSpc>
-                <a:spcPct val="100000"/>
-              </a:lnSpc>
-              <a:buNone/>
-              <a:defRPr b="0" lang="pl-PL" sz="1200" spc="-1" strike="noStrike">
-                <a:solidFill>
-                  <a:schemeClr val="dk1">
-                    <a:tint val="75000"/>
-                  </a:schemeClr>
-                </a:solidFill>
-                <a:latin typeface="Calibri"/>
-              </a:defRPr>
-            </a:lvl1pPr>
-          </a:lstStyle>
-          <a:p>
-            <a:pPr indent="0" algn="r" defTabSz="914400">
-              <a:lnSpc>
-                <a:spcPct val="100000"/>
-              </a:lnSpc>
-              <a:buNone/>
-            </a:pPr>
-            <a:fld id="{067458F6-E75B-4C1E-9281-333736968575}" type="slidenum">
-              <a:rPr b="0" lang="pl-PL" sz="1200" spc="-1" strike="noStrike">
-                <a:solidFill>
-                  <a:schemeClr val="dk1">
-                    <a:tint val="75000"/>
-                  </a:schemeClr>
-                </a:solidFill>
-                <a:latin typeface="Calibri"/>
-              </a:rPr>
-              <a:t>&lt;number&gt;</a:t>
-            </a:fld>
-            <a:endParaRPr b="0" lang="en-US" sz="1200" spc="-1" strike="noStrike">
               <a:solidFill>
                 <a:srgbClr val="000000"/>
               </a:solidFill>
@@ -2899,13 +2296,13 @@
             <a:spLocks noGrp="1"/>
           </p:cNvSpPr>
           <p:nvPr>
-            <p:ph type="title"/>
+            <p:ph type="ftr" idx="4"/>
           </p:nvPr>
         </p:nvSpPr>
         <p:spPr>
           <a:xfrm>
-            <a:off x="457200" y="274680"/>
-            <a:ext cx="8229240" cy="1142640"/>
+            <a:off x="3124080" y="6356520"/>
+            <a:ext cx="2894760" cy="364320"/>
           </a:xfrm>
           <a:prstGeom prst="rect">
             <a:avLst/>
@@ -2919,27 +2316,47 @@
           <a:bodyPr lIns="91440" rIns="91440" tIns="45720" bIns="45720" anchor="ctr">
             <a:noAutofit/>
           </a:bodyPr>
-          <a:p>
-            <a:pPr indent="0" algn="ctr" defTabSz="914400">
+          <a:lstStyle>
+            <a:lvl1pPr indent="0" algn="ctr">
               <a:lnSpc>
                 <a:spcPct val="100000"/>
               </a:lnSpc>
               <a:buNone/>
-            </a:pPr>
-            <a:r>
-              <a:rPr b="0" lang="pl-PL" sz="4400" spc="-1" strike="noStrike">
-                <a:solidFill>
-                  <a:schemeClr val="dk1"/>
-                </a:solidFill>
-                <a:latin typeface="Calibri"/>
-              </a:rPr>
-              <a:t>Kliknij, aby edytować styl</a:t>
-            </a:r>
-            <a:endParaRPr b="0" lang="pl-PL" sz="4400" spc="-1" strike="noStrike">
-              <a:solidFill>
-                <a:schemeClr val="dk1"/>
-              </a:solidFill>
-              <a:latin typeface="Calibri"/>
+              <a:tabLst>
+                <a:tab algn="l" pos="0"/>
+              </a:tabLst>
+              <a:defRPr b="0" lang="en-US" sz="1400" spc="-1" strike="noStrike">
+                <a:solidFill>
+                  <a:srgbClr val="000000"/>
+                </a:solidFill>
+                <a:latin typeface="Times New Roman"/>
+              </a:defRPr>
+            </a:lvl1pPr>
+          </a:lstStyle>
+          <a:p>
+            <a:pPr indent="0" algn="ctr">
+              <a:lnSpc>
+                <a:spcPct val="100000"/>
+              </a:lnSpc>
+              <a:buNone/>
+              <a:tabLst>
+                <a:tab algn="l" pos="0"/>
+              </a:tabLst>
+            </a:pPr>
+            <a:r>
+              <a:rPr b="0" lang="en-US" sz="1400" spc="-1" strike="noStrike">
+                <a:solidFill>
+                  <a:srgbClr val="000000"/>
+                </a:solidFill>
+                <a:latin typeface="Times New Roman"/>
+              </a:rPr>
+              <a:t>&lt;footer&gt;</a:t>
+            </a:r>
+            <a:endParaRPr b="0" lang="en-US" sz="1400" spc="-1" strike="noStrike">
+              <a:solidFill>
+                <a:srgbClr val="000000"/>
+              </a:solidFill>
+              <a:latin typeface="Times New Roman"/>
             </a:endParaRPr>
           </a:p>
         </p:txBody>
@@ -2951,13 +2368,13 @@
             <a:spLocks noGrp="1"/>
           </p:cNvSpPr>
           <p:nvPr>
-            <p:ph type="body"/>
+            <p:ph type="sldNum" idx="5"/>
           </p:nvPr>
         </p:nvSpPr>
         <p:spPr>
           <a:xfrm>
-            <a:off x="457200" y="1600200"/>
-            <a:ext cx="8229240" cy="4525560"/>
+            <a:off x="6553080" y="6356520"/>
+            <a:ext cx="2133000" cy="364320"/>
           </a:xfrm>
           <a:prstGeom prst="rect">
             <a:avLst/>
@@ -2968,157 +2385,54 @@
           </a:ln>
         </p:spPr>
         <p:txBody>
-          <a:bodyPr lIns="91440" rIns="91440" tIns="45720" bIns="45720" anchor="t" vert="eaVert">
+          <a:bodyPr lIns="91440" rIns="91440" tIns="45720" bIns="45720" anchor="ctr">
             <a:noAutofit/>
           </a:bodyPr>
-          <a:p>
-            <a:pPr marL="343080" indent="-343080" defTabSz="914400">
-              <a:lnSpc>
-                <a:spcPct val="100000"/>
-              </a:lnSpc>
-              <a:spcBef>
-                <a:spcPts val="641"/>
-              </a:spcBef>
-              <a:buClr>
-                <a:srgbClr val="000000"/>
-              </a:buClr>
-              <a:buFont typeface="Arial"/>
-              <a:buChar char="•"/>
-            </a:pPr>
-            <a:r>
-              <a:rPr b="0" lang="pl-PL" sz="3200" spc="-1" strike="noStrike">
-                <a:solidFill>
-                  <a:schemeClr val="dk1"/>
+          <a:lstStyle>
+            <a:lvl1pPr indent="0" algn="r" defTabSz="914400">
+              <a:lnSpc>
+                <a:spcPct val="100000"/>
+              </a:lnSpc>
+              <a:buNone/>
+              <a:tabLst>
+                <a:tab algn="l" pos="0"/>
+              </a:tabLst>
+              <a:defRPr b="0" lang="pl-PL" sz="1200" spc="-1" strike="noStrike">
+                <a:solidFill>
+                  <a:schemeClr val="dk1">
+                    <a:tint val="75000"/>
+                  </a:schemeClr>
                 </a:solidFill>
                 <a:latin typeface="Calibri"/>
-              </a:rPr>
-              <a:t>Kliknij, aby edytować style wzorca tekstu</a:t>
-            </a:r>
-            <a:endParaRPr b="0" lang="pl-PL" sz="3200" spc="-1" strike="noStrike">
-              <a:solidFill>
-                <a:schemeClr val="dk1"/>
-              </a:solidFill>
-              <a:latin typeface="Calibri"/>
-            </a:endParaRPr>
-          </a:p>
-          <a:p>
-            <a:pPr lvl="1" marL="743040" indent="-285840" defTabSz="914400">
-              <a:lnSpc>
-                <a:spcPct val="100000"/>
-              </a:lnSpc>
-              <a:spcBef>
-                <a:spcPts val="561"/>
-              </a:spcBef>
-              <a:buClr>
-                <a:srgbClr val="000000"/>
-              </a:buClr>
-              <a:buFont typeface="Arial"/>
-              <a:buChar char="–"/>
-            </a:pPr>
-            <a:r>
-              <a:rPr b="0" lang="pl-PL" sz="2800" spc="-1" strike="noStrike">
-                <a:solidFill>
-                  <a:schemeClr val="dk1"/>
+              </a:defRPr>
+            </a:lvl1pPr>
+          </a:lstStyle>
+          <a:p>
+            <a:pPr indent="0" algn="r" defTabSz="914400">
+              <a:lnSpc>
+                <a:spcPct val="100000"/>
+              </a:lnSpc>
+              <a:buNone/>
+              <a:tabLst>
+                <a:tab algn="l" pos="0"/>
+              </a:tabLst>
+            </a:pPr>
+            <a:fld id="{446BA254-C76F-474D-A2F5-E107285EED25}" type="slidenum">
+              <a:rPr b="0" lang="pl-PL" sz="1200" spc="-1" strike="noStrike">
+                <a:solidFill>
+                  <a:schemeClr val="dk1">
+                    <a:tint val="75000"/>
+                  </a:schemeClr>
                 </a:solidFill>
                 <a:latin typeface="Calibri"/>
               </a:rPr>
-              <a:t>Drugi poziom</a:t>
-            </a:r>
-            <a:endParaRPr b="0" lang="pl-PL" sz="2800" spc="-1" strike="noStrike">
-              <a:solidFill>
-                <a:schemeClr val="dk1"/>
-              </a:solidFill>
-              <a:latin typeface="Calibri"/>
-            </a:endParaRPr>
-          </a:p>
-          <a:p>
-            <a:pPr lvl="2" marL="1143000" indent="-228600" defTabSz="914400">
-              <a:lnSpc>
-                <a:spcPct val="100000"/>
-              </a:lnSpc>
-              <a:spcBef>
-                <a:spcPts val="479"/>
-              </a:spcBef>
-              <a:buClr>
-                <a:srgbClr val="000000"/>
-              </a:buClr>
-              <a:buFont typeface="Arial"/>
-              <a:buChar char="•"/>
-            </a:pPr>
-            <a:r>
-              <a:rPr b="0" lang="pl-PL" sz="2400" spc="-1" strike="noStrike">
-                <a:solidFill>
-                  <a:schemeClr val="dk1"/>
-                </a:solidFill>
-                <a:latin typeface="Calibri"/>
-              </a:rPr>
-              <a:t>Trzeci poziom</a:t>
-            </a:r>
-            <a:endParaRPr b="0" lang="pl-PL" sz="2400" spc="-1" strike="noStrike">
-              <a:solidFill>
-                <a:schemeClr val="dk1"/>
-              </a:solidFill>
-              <a:latin typeface="Calibri"/>
-            </a:endParaRPr>
-          </a:p>
-          <a:p>
-            <a:pPr lvl="3" marL="1600200" indent="-228600" defTabSz="914400">
-              <a:lnSpc>
-                <a:spcPct val="100000"/>
-              </a:lnSpc>
-              <a:spcBef>
-                <a:spcPts val="400"/>
-              </a:spcBef>
-              <a:buClr>
-                <a:srgbClr val="000000"/>
-              </a:buClr>
-              <a:buFont typeface="Arial"/>
-              <a:buChar char="–"/>
-            </a:pPr>
-            <a:r>
-              <a:rPr b="0" lang="pl-PL" sz="2000" spc="-1" strike="noStrike">
-                <a:solidFill>
-                  <a:schemeClr val="dk1"/>
-                </a:solidFill>
-                <a:latin typeface="Calibri"/>
-              </a:rPr>
-              <a:t>Czwarty poziom</a:t>
-            </a:r>
-            <a:endParaRPr b="0" lang="pl-PL" sz="2000" spc="-1" strike="noStrike">
-              <a:solidFill>
-                <a:schemeClr val="dk1"/>
-              </a:solidFill>
-              <a:latin typeface="Calibri"/>
-            </a:endParaRPr>
-          </a:p>
-          <a:p>
-            <a:pPr lvl="4" marL="2057400" indent="-228600" defTabSz="914400">
-              <a:lnSpc>
-                <a:spcPct val="100000"/>
-              </a:lnSpc>
-              <a:spcBef>
-                <a:spcPts val="400"/>
-              </a:spcBef>
-              <a:buClr>
-                <a:srgbClr val="000000"/>
-              </a:buClr>
-              <a:buFont typeface="Arial"/>
-              <a:buChar char="»"/>
-            </a:pPr>
-            <a:r>
-              <a:rPr b="0" lang="pl-PL" sz="2000" spc="-1" strike="noStrike">
-                <a:solidFill>
-                  <a:schemeClr val="dk1"/>
-                </a:solidFill>
-                <a:latin typeface="Calibri"/>
-              </a:rPr>
-              <a:t>Piąty poziom</a:t>
-            </a:r>
-            <a:endParaRPr b="0" lang="pl-PL" sz="2000" spc="-1" strike="noStrike">
-              <a:solidFill>
-                <a:schemeClr val="dk1"/>
-              </a:solidFill>
-              <a:latin typeface="Calibri"/>
+              <a:t>&lt;number&gt;</a:t>
+            </a:fld>
+            <a:endParaRPr b="0" lang="en-US" sz="1200" spc="-1" strike="noStrike">
+              <a:solidFill>
+                <a:srgbClr val="000000"/>
+              </a:solidFill>
+              <a:latin typeface="Times New Roman"/>
             </a:endParaRPr>
           </a:p>
         </p:txBody>
@@ -3130,13 +2444,13 @@
             <a:spLocks noGrp="1"/>
           </p:cNvSpPr>
           <p:nvPr>
-            <p:ph type="dt" idx="4"/>
+            <p:ph type="dt" idx="6"/>
           </p:nvPr>
         </p:nvSpPr>
         <p:spPr>
           <a:xfrm>
             <a:off x="457200" y="6356520"/>
-            <a:ext cx="2133360" cy="364680"/>
+            <a:ext cx="2133000" cy="364320"/>
           </a:xfrm>
           <a:prstGeom prst="rect">
             <a:avLst/>
@@ -3151,77 +2465,7 @@
             <a:noAutofit/>
           </a:bodyPr>
           <a:lstStyle>
-            <a:lvl1pPr indent="0" defTabSz="914400">
-              <a:lnSpc>
-                <a:spcPct val="100000"/>
-              </a:lnSpc>
-              <a:buNone/>
-              <a:defRPr b="0" lang="pl-PL" sz="1200" spc="-1" strike="noStrike">
-                <a:solidFill>
-                  <a:schemeClr val="dk1">
-                    <a:tint val="75000"/>
-                  </a:schemeClr>
-                </a:solidFill>
-                <a:latin typeface="Calibri"/>
-              </a:defRPr>
-            </a:lvl1pPr>
-          </a:lstStyle>
-          <a:p>
-            <a:pPr indent="0" defTabSz="914400">
-              <a:lnSpc>
-                <a:spcPct val="100000"/>
-              </a:lnSpc>
-              <a:buNone/>
-            </a:pPr>
-            <a:r>
-              <a:rPr b="0" lang="pl-PL" sz="1200" spc="-1" strike="noStrike">
-                <a:solidFill>
-                  <a:schemeClr val="dk1">
-                    <a:tint val="75000"/>
-                  </a:schemeClr>
-                </a:solidFill>
-                <a:latin typeface="Calibri"/>
-              </a:rPr>
-              <a:t>&lt;date/time&gt;</a:t>
-            </a:r>
-            <a:endParaRPr b="0" lang="en-US" sz="1200" spc="-1" strike="noStrike">
-              <a:solidFill>
-                <a:srgbClr val="000000"/>
-              </a:solidFill>
-              <a:latin typeface="Times New Roman"/>
-            </a:endParaRPr>
-          </a:p>
-        </p:txBody>
-      </p:sp>
-      <p:sp>
-        <p:nvSpPr>
-          <p:cNvPr id="10" name="PlaceHolder 4"/>
-          <p:cNvSpPr>
-            <a:spLocks noGrp="1"/>
-          </p:cNvSpPr>
-          <p:nvPr>
-            <p:ph type="ftr" idx="5"/>
-          </p:nvPr>
-        </p:nvSpPr>
-        <p:spPr>
-          <a:xfrm>
-            <a:off x="3124080" y="6356520"/>
-            <a:ext cx="2895120" cy="364680"/>
-          </a:xfrm>
-          <a:prstGeom prst="rect">
-            <a:avLst/>
-          </a:prstGeom>
-          <a:noFill/>
-          <a:ln w="0">
-            <a:noFill/>
-          </a:ln>
-        </p:spPr>
-        <p:txBody>
-          <a:bodyPr lIns="91440" rIns="91440" tIns="45720" bIns="45720" anchor="ctr">
-            <a:noAutofit/>
-          </a:bodyPr>
-          <a:lstStyle>
-            <a:lvl1pPr indent="0" algn="ctr">
+            <a:lvl1pPr indent="0">
               <a:buNone/>
               <a:defRPr b="0" lang="en-US" sz="1400" spc="-1" strike="noStrike">
                 <a:solidFill>
@@ -3232,7 +2476,7 @@
             </a:lvl1pPr>
           </a:lstStyle>
           <a:p>
-            <a:pPr indent="0" algn="ctr">
+            <a:pPr indent="0">
               <a:buNone/>
             </a:pPr>
             <a:r>
@@ -3242,79 +2486,9 @@
                 </a:solidFill>
                 <a:latin typeface="Times New Roman"/>
               </a:rPr>
-              <a:t>&lt;footer&gt;</a:t>
+              <a:t>&lt;date/time&gt;</a:t>
             </a:r>
             <a:endParaRPr b="0" lang="en-US" sz="1400" spc="-1" strike="noStrike">
-              <a:solidFill>
-                <a:srgbClr val="000000"/>
-              </a:solidFill>
-              <a:latin typeface="Times New Roman"/>
-            </a:endParaRPr>
-          </a:p>
-        </p:txBody>
-      </p:sp>
-      <p:sp>
-        <p:nvSpPr>
-          <p:cNvPr id="11" name="PlaceHolder 5"/>
-          <p:cNvSpPr>
-            <a:spLocks noGrp="1"/>
-          </p:cNvSpPr>
-          <p:nvPr>
-            <p:ph type="sldNum" idx="6"/>
-          </p:nvPr>
-        </p:nvSpPr>
-        <p:spPr>
-          <a:xfrm>
-            <a:off x="6553080" y="6356520"/>
-            <a:ext cx="2133360" cy="364680"/>
-          </a:xfrm>
-          <a:prstGeom prst="rect">
-            <a:avLst/>
-          </a:prstGeom>
-          <a:noFill/>
-          <a:ln w="0">
-            <a:noFill/>
-          </a:ln>
-        </p:spPr>
-        <p:txBody>
-          <a:bodyPr lIns="91440" rIns="91440" tIns="45720" bIns="45720" anchor="ctr">
-            <a:noAutofit/>
-          </a:bodyPr>
-          <a:lstStyle>
-            <a:lvl1pPr indent="0" algn="r" defTabSz="914400">
-              <a:lnSpc>
-                <a:spcPct val="100000"/>
-              </a:lnSpc>
-              <a:buNone/>
-              <a:defRPr b="0" lang="pl-PL" sz="1200" spc="-1" strike="noStrike">
-                <a:solidFill>
-                  <a:schemeClr val="dk1">
-                    <a:tint val="75000"/>
-                  </a:schemeClr>
-                </a:solidFill>
-                <a:latin typeface="Calibri"/>
-              </a:defRPr>
-            </a:lvl1pPr>
-          </a:lstStyle>
-          <a:p>
-            <a:pPr indent="0" algn="r" defTabSz="914400">
-              <a:lnSpc>
-                <a:spcPct val="100000"/>
-              </a:lnSpc>
-              <a:buNone/>
-            </a:pPr>
-            <a:fld id="{B321FF04-3E3E-49D3-A45B-8FDF3F0D4908}" type="slidenum">
-              <a:rPr b="0" lang="pl-PL" sz="1200" spc="-1" strike="noStrike">
-                <a:solidFill>
-                  <a:schemeClr val="dk1">
-                    <a:tint val="75000"/>
-                  </a:schemeClr>
-                </a:solidFill>
-                <a:latin typeface="Calibri"/>
-              </a:rPr>
-              <a:t>&lt;number&gt;</a:t>
-            </a:fld>
-            <a:endParaRPr b="0" lang="en-US" sz="1200" spc="-1" strike="noStrike">
               <a:solidFill>
                 <a:srgbClr val="000000"/>
               </a:solidFill>
@@ -3358,18 +2532,18 @@
       </p:grpSpPr>
       <p:sp>
         <p:nvSpPr>
-          <p:cNvPr id="12" name="PlaceHolder 1"/>
+          <p:cNvPr id="10" name="PlaceHolder 1"/>
           <p:cNvSpPr>
             <a:spLocks noGrp="1"/>
           </p:cNvSpPr>
           <p:nvPr>
-            <p:ph type="title"/>
+            <p:ph type="ftr" idx="7"/>
           </p:nvPr>
         </p:nvSpPr>
         <p:spPr>
           <a:xfrm>
-            <a:off x="6629400" y="274680"/>
-            <a:ext cx="2057040" cy="5851080"/>
+            <a:off x="3124080" y="6356520"/>
+            <a:ext cx="2894760" cy="364320"/>
           </a:xfrm>
           <a:prstGeom prst="rect">
             <a:avLst/>
@@ -3380,48 +2554,68 @@
           </a:ln>
         </p:spPr>
         <p:txBody>
-          <a:bodyPr lIns="91440" rIns="91440" tIns="45720" bIns="45720" anchor="ctr" vert="eaVert">
+          <a:bodyPr lIns="91440" rIns="91440" tIns="45720" bIns="45720" anchor="ctr">
             <a:noAutofit/>
           </a:bodyPr>
-          <a:p>
-            <a:pPr indent="0" algn="ctr" defTabSz="914400">
+          <a:lstStyle>
+            <a:lvl1pPr indent="0" algn="ctr">
               <a:lnSpc>
                 <a:spcPct val="100000"/>
               </a:lnSpc>
               <a:buNone/>
-            </a:pPr>
-            <a:r>
-              <a:rPr b="0" lang="pl-PL" sz="4400" spc="-1" strike="noStrike">
-                <a:solidFill>
-                  <a:schemeClr val="dk1"/>
-                </a:solidFill>
-                <a:latin typeface="Calibri"/>
-              </a:rPr>
-              <a:t>Kliknij, aby edytować styl</a:t>
-            </a:r>
-            <a:endParaRPr b="0" lang="pl-PL" sz="4400" spc="-1" strike="noStrike">
-              <a:solidFill>
-                <a:schemeClr val="dk1"/>
-              </a:solidFill>
-              <a:latin typeface="Calibri"/>
-            </a:endParaRPr>
-          </a:p>
-        </p:txBody>
-      </p:sp>
-      <p:sp>
-        <p:nvSpPr>
-          <p:cNvPr id="13" name="PlaceHolder 2"/>
+              <a:tabLst>
+                <a:tab algn="l" pos="0"/>
+              </a:tabLst>
+              <a:defRPr b="0" lang="en-US" sz="1400" spc="-1" strike="noStrike">
+                <a:solidFill>
+                  <a:srgbClr val="000000"/>
+                </a:solidFill>
+                <a:latin typeface="Times New Roman"/>
+              </a:defRPr>
+            </a:lvl1pPr>
+          </a:lstStyle>
+          <a:p>
+            <a:pPr indent="0" algn="ctr">
+              <a:lnSpc>
+                <a:spcPct val="100000"/>
+              </a:lnSpc>
+              <a:buNone/>
+              <a:tabLst>
+                <a:tab algn="l" pos="0"/>
+              </a:tabLst>
+            </a:pPr>
+            <a:r>
+              <a:rPr b="0" lang="en-US" sz="1400" spc="-1" strike="noStrike">
+                <a:solidFill>
+                  <a:srgbClr val="000000"/>
+                </a:solidFill>
+                <a:latin typeface="Times New Roman"/>
+              </a:rPr>
+              <a:t>&lt;footer&gt;</a:t>
+            </a:r>
+            <a:endParaRPr b="0" lang="en-US" sz="1400" spc="-1" strike="noStrike">
+              <a:solidFill>
+                <a:srgbClr val="000000"/>
+              </a:solidFill>
+              <a:latin typeface="Times New Roman"/>
+            </a:endParaRPr>
+          </a:p>
+        </p:txBody>
+      </p:sp>
+      <p:sp>
+        <p:nvSpPr>
+          <p:cNvPr id="11" name="PlaceHolder 2"/>
           <p:cNvSpPr>
             <a:spLocks noGrp="1"/>
           </p:cNvSpPr>
           <p:nvPr>
-            <p:ph type="body"/>
+            <p:ph type="sldNum" idx="8"/>
           </p:nvPr>
         </p:nvSpPr>
         <p:spPr>
           <a:xfrm>
-            <a:off x="457200" y="274680"/>
-            <a:ext cx="6019560" cy="5851080"/>
+            <a:off x="6553080" y="6356520"/>
+            <a:ext cx="2133000" cy="364320"/>
           </a:xfrm>
           <a:prstGeom prst="rect">
             <a:avLst/>
@@ -3432,175 +2626,72 @@
           </a:ln>
         </p:spPr>
         <p:txBody>
-          <a:bodyPr lIns="91440" rIns="91440" tIns="45720" bIns="45720" anchor="t" vert="eaVert">
+          <a:bodyPr lIns="91440" rIns="91440" tIns="45720" bIns="45720" anchor="ctr">
             <a:noAutofit/>
           </a:bodyPr>
-          <a:p>
-            <a:pPr marL="343080" indent="-343080" defTabSz="914400">
-              <a:lnSpc>
-                <a:spcPct val="100000"/>
-              </a:lnSpc>
-              <a:spcBef>
-                <a:spcPts val="641"/>
-              </a:spcBef>
-              <a:buClr>
-                <a:srgbClr val="000000"/>
-              </a:buClr>
-              <a:buFont typeface="Arial"/>
-              <a:buChar char="•"/>
-            </a:pPr>
-            <a:r>
-              <a:rPr b="0" lang="pl-PL" sz="3200" spc="-1" strike="noStrike">
-                <a:solidFill>
-                  <a:schemeClr val="dk1"/>
+          <a:lstStyle>
+            <a:lvl1pPr indent="0" algn="r" defTabSz="914400">
+              <a:lnSpc>
+                <a:spcPct val="100000"/>
+              </a:lnSpc>
+              <a:buNone/>
+              <a:tabLst>
+                <a:tab algn="l" pos="0"/>
+              </a:tabLst>
+              <a:defRPr b="0" lang="pl-PL" sz="1200" spc="-1" strike="noStrike">
+                <a:solidFill>
+                  <a:schemeClr val="dk1">
+                    <a:tint val="75000"/>
+                  </a:schemeClr>
                 </a:solidFill>
                 <a:latin typeface="Calibri"/>
-              </a:rPr>
-              <a:t>Kliknij, aby edytować style wzorca tekstu</a:t>
-            </a:r>
-            <a:endParaRPr b="0" lang="pl-PL" sz="3200" spc="-1" strike="noStrike">
-              <a:solidFill>
-                <a:schemeClr val="dk1"/>
-              </a:solidFill>
-              <a:latin typeface="Calibri"/>
-            </a:endParaRPr>
-          </a:p>
-          <a:p>
-            <a:pPr lvl="1" marL="743040" indent="-285840" defTabSz="914400">
-              <a:lnSpc>
-                <a:spcPct val="100000"/>
-              </a:lnSpc>
-              <a:spcBef>
-                <a:spcPts val="561"/>
-              </a:spcBef>
-              <a:buClr>
-                <a:srgbClr val="000000"/>
-              </a:buClr>
-              <a:buFont typeface="Arial"/>
-              <a:buChar char="–"/>
-            </a:pPr>
-            <a:r>
-              <a:rPr b="0" lang="pl-PL" sz="2800" spc="-1" strike="noStrike">
-                <a:solidFill>
-                  <a:schemeClr val="dk1"/>
+              </a:defRPr>
+            </a:lvl1pPr>
+          </a:lstStyle>
+          <a:p>
+            <a:pPr indent="0" algn="r" defTabSz="914400">
+              <a:lnSpc>
+                <a:spcPct val="100000"/>
+              </a:lnSpc>
+              <a:buNone/>
+              <a:tabLst>
+                <a:tab algn="l" pos="0"/>
+              </a:tabLst>
+            </a:pPr>
+            <a:fld id="{1DAF2C40-C58A-4CFF-B4C2-B167BE295778}" type="slidenum">
+              <a:rPr b="0" lang="pl-PL" sz="1200" spc="-1" strike="noStrike">
+                <a:solidFill>
+                  <a:schemeClr val="dk1">
+                    <a:tint val="75000"/>
+                  </a:schemeClr>
                 </a:solidFill>
                 <a:latin typeface="Calibri"/>
               </a:rPr>
-              <a:t>Drugi poziom</a:t>
-            </a:r>
-            <a:endParaRPr b="0" lang="pl-PL" sz="2800" spc="-1" strike="noStrike">
-              <a:solidFill>
-                <a:schemeClr val="dk1"/>
-              </a:solidFill>
-              <a:latin typeface="Calibri"/>
-            </a:endParaRPr>
-          </a:p>
-          <a:p>
-            <a:pPr lvl="2" marL="1143000" indent="-228600" defTabSz="914400">
-              <a:lnSpc>
-                <a:spcPct val="100000"/>
-              </a:lnSpc>
-              <a:spcBef>
-                <a:spcPts val="479"/>
-              </a:spcBef>
-              <a:buClr>
-                <a:srgbClr val="000000"/>
-              </a:buClr>
-              <a:buFont typeface="Arial"/>
-              <a:buChar char="•"/>
-            </a:pPr>
-            <a:r>
-              <a:rPr b="0" lang="pl-PL" sz="2400" spc="-1" strike="noStrike">
-                <a:solidFill>
-                  <a:schemeClr val="dk1"/>
-                </a:solidFill>
-                <a:latin typeface="Calibri"/>
-              </a:rPr>
-              <a:t>Trzeci poziom</a:t>
-            </a:r>
-            <a:endParaRPr b="0" lang="pl-PL" sz="2400" spc="-1" strike="noStrike">
-              <a:solidFill>
-                <a:schemeClr val="dk1"/>
-              </a:solidFill>
-              <a:latin typeface="Calibri"/>
-            </a:endParaRPr>
-          </a:p>
-          <a:p>
-            <a:pPr lvl="3" marL="1600200" indent="-228600" defTabSz="914400">
-              <a:lnSpc>
-                <a:spcPct val="100000"/>
-              </a:lnSpc>
-              <a:spcBef>
-                <a:spcPts val="400"/>
-              </a:spcBef>
-              <a:buClr>
-                <a:srgbClr val="000000"/>
-              </a:buClr>
-              <a:buFont typeface="Arial"/>
-              <a:buChar char="–"/>
-            </a:pPr>
-            <a:r>
-              <a:rPr b="0" lang="pl-PL" sz="2000" spc="-1" strike="noStrike">
-                <a:solidFill>
-                  <a:schemeClr val="dk1"/>
-                </a:solidFill>
-                <a:latin typeface="Calibri"/>
-              </a:rPr>
-              <a:t>Czwarty poziom</a:t>
-            </a:r>
-            <a:endParaRPr b="0" lang="pl-PL" sz="2000" spc="-1" strike="noStrike">
-              <a:solidFill>
-                <a:schemeClr val="dk1"/>
-              </a:solidFill>
-              <a:latin typeface="Calibri"/>
-            </a:endParaRPr>
-          </a:p>
-          <a:p>
-            <a:pPr lvl="4" marL="2057400" indent="-228600" defTabSz="914400">
-              <a:lnSpc>
-                <a:spcPct val="100000"/>
-              </a:lnSpc>
-              <a:spcBef>
-                <a:spcPts val="400"/>
-              </a:spcBef>
-              <a:buClr>
-                <a:srgbClr val="000000"/>
-              </a:buClr>
-              <a:buFont typeface="Arial"/>
-              <a:buChar char="»"/>
-            </a:pPr>
-            <a:r>
-              <a:rPr b="0" lang="pl-PL" sz="2000" spc="-1" strike="noStrike">
-                <a:solidFill>
-                  <a:schemeClr val="dk1"/>
-                </a:solidFill>
-                <a:latin typeface="Calibri"/>
-              </a:rPr>
-              <a:t>Piąty poziom</a:t>
-            </a:r>
-            <a:endParaRPr b="0" lang="pl-PL" sz="2000" spc="-1" strike="noStrike">
-              <a:solidFill>
-                <a:schemeClr val="dk1"/>
-              </a:solidFill>
-              <a:latin typeface="Calibri"/>
-            </a:endParaRPr>
-          </a:p>
-        </p:txBody>
-      </p:sp>
-      <p:sp>
-        <p:nvSpPr>
-          <p:cNvPr id="14" name="PlaceHolder 3"/>
+              <a:t>&lt;number&gt;</a:t>
+            </a:fld>
+            <a:endParaRPr b="0" lang="en-US" sz="1200" spc="-1" strike="noStrike">
+              <a:solidFill>
+                <a:srgbClr val="000000"/>
+              </a:solidFill>
+              <a:latin typeface="Times New Roman"/>
+            </a:endParaRPr>
+          </a:p>
+        </p:txBody>
+      </p:sp>
+      <p:sp>
+        <p:nvSpPr>
+          <p:cNvPr id="12" name="PlaceHolder 3"/>
           <p:cNvSpPr>
             <a:spLocks noGrp="1"/>
           </p:cNvSpPr>
           <p:nvPr>
-            <p:ph type="dt" idx="7"/>
+            <p:ph type="dt" idx="9"/>
           </p:nvPr>
         </p:nvSpPr>
         <p:spPr>
           <a:xfrm>
             <a:off x="457200" y="6356520"/>
-            <a:ext cx="2133360" cy="364680"/>
+            <a:ext cx="2133000" cy="364320"/>
           </a:xfrm>
           <a:prstGeom prst="rect">
             <a:avLst/>
@@ -3615,77 +2706,7 @@
             <a:noAutofit/>
           </a:bodyPr>
           <a:lstStyle>
-            <a:lvl1pPr indent="0" defTabSz="914400">
-              <a:lnSpc>
-                <a:spcPct val="100000"/>
-              </a:lnSpc>
-              <a:buNone/>
-              <a:defRPr b="0" lang="pl-PL" sz="1200" spc="-1" strike="noStrike">
-                <a:solidFill>
-                  <a:schemeClr val="dk1">
-                    <a:tint val="75000"/>
-                  </a:schemeClr>
-                </a:solidFill>
-                <a:latin typeface="Calibri"/>
-              </a:defRPr>
-            </a:lvl1pPr>
-          </a:lstStyle>
-          <a:p>
-            <a:pPr indent="0" defTabSz="914400">
-              <a:lnSpc>
-                <a:spcPct val="100000"/>
-              </a:lnSpc>
-              <a:buNone/>
-            </a:pPr>
-            <a:r>
-              <a:rPr b="0" lang="pl-PL" sz="1200" spc="-1" strike="noStrike">
-                <a:solidFill>
-                  <a:schemeClr val="dk1">
-                    <a:tint val="75000"/>
-                  </a:schemeClr>
-                </a:solidFill>
-                <a:latin typeface="Calibri"/>
-              </a:rPr>
-              <a:t>&lt;date/time&gt;</a:t>
-            </a:r>
-            <a:endParaRPr b="0" lang="en-US" sz="1200" spc="-1" strike="noStrike">
-              <a:solidFill>
-                <a:srgbClr val="000000"/>
-              </a:solidFill>
-              <a:latin typeface="Times New Roman"/>
-            </a:endParaRPr>
-          </a:p>
-        </p:txBody>
-      </p:sp>
-      <p:sp>
-        <p:nvSpPr>
-          <p:cNvPr id="15" name="PlaceHolder 4"/>
-          <p:cNvSpPr>
-            <a:spLocks noGrp="1"/>
-          </p:cNvSpPr>
-          <p:nvPr>
-            <p:ph type="ftr" idx="8"/>
-          </p:nvPr>
-        </p:nvSpPr>
-        <p:spPr>
-          <a:xfrm>
-            <a:off x="3124080" y="6356520"/>
-            <a:ext cx="2895120" cy="364680"/>
-          </a:xfrm>
-          <a:prstGeom prst="rect">
-            <a:avLst/>
-          </a:prstGeom>
-          <a:noFill/>
-          <a:ln w="0">
-            <a:noFill/>
-          </a:ln>
-        </p:spPr>
-        <p:txBody>
-          <a:bodyPr lIns="91440" rIns="91440" tIns="45720" bIns="45720" anchor="ctr">
-            <a:noAutofit/>
-          </a:bodyPr>
-          <a:lstStyle>
-            <a:lvl1pPr indent="0" algn="ctr">
+            <a:lvl1pPr indent="0">
               <a:buNone/>
               <a:defRPr b="0" lang="en-US" sz="1400" spc="-1" strike="noStrike">
                 <a:solidFill>
@@ -3696,7 +2717,7 @@
             </a:lvl1pPr>
           </a:lstStyle>
           <a:p>
-            <a:pPr indent="0" algn="ctr">
+            <a:pPr indent="0">
               <a:buNone/>
             </a:pPr>
             <a:r>
@@ -3706,79 +2727,9 @@
                 </a:solidFill>
                 <a:latin typeface="Times New Roman"/>
               </a:rPr>
-              <a:t>&lt;footer&gt;</a:t>
+              <a:t>&lt;date/time&gt;</a:t>
             </a:r>
             <a:endParaRPr b="0" lang="en-US" sz="1400" spc="-1" strike="noStrike">
-              <a:solidFill>
-                <a:srgbClr val="000000"/>
-              </a:solidFill>
-              <a:latin typeface="Times New Roman"/>
-            </a:endParaRPr>
-          </a:p>
-        </p:txBody>
-      </p:sp>
-      <p:sp>
-        <p:nvSpPr>
-          <p:cNvPr id="16" name="PlaceHolder 5"/>
-          <p:cNvSpPr>
-            <a:spLocks noGrp="1"/>
-          </p:cNvSpPr>
-          <p:nvPr>
-            <p:ph type="sldNum" idx="9"/>
-          </p:nvPr>
-        </p:nvSpPr>
-        <p:spPr>
-          <a:xfrm>
-            <a:off x="6553080" y="6356520"/>
-            <a:ext cx="2133360" cy="364680"/>
-          </a:xfrm>
-          <a:prstGeom prst="rect">
-            <a:avLst/>
-          </a:prstGeom>
-          <a:noFill/>
-          <a:ln w="0">
-            <a:noFill/>
-          </a:ln>
-        </p:spPr>
-        <p:txBody>
-          <a:bodyPr lIns="91440" rIns="91440" tIns="45720" bIns="45720" anchor="ctr">
-            <a:noAutofit/>
-          </a:bodyPr>
-          <a:lstStyle>
-            <a:lvl1pPr indent="0" algn="r" defTabSz="914400">
-              <a:lnSpc>
-                <a:spcPct val="100000"/>
-              </a:lnSpc>
-              <a:buNone/>
-              <a:defRPr b="0" lang="pl-PL" sz="1200" spc="-1" strike="noStrike">
-                <a:solidFill>
-                  <a:schemeClr val="dk1">
-                    <a:tint val="75000"/>
-                  </a:schemeClr>
-                </a:solidFill>
-                <a:latin typeface="Calibri"/>
-              </a:defRPr>
-            </a:lvl1pPr>
-          </a:lstStyle>
-          <a:p>
-            <a:pPr indent="0" algn="r" defTabSz="914400">
-              <a:lnSpc>
-                <a:spcPct val="100000"/>
-              </a:lnSpc>
-              <a:buNone/>
-            </a:pPr>
-            <a:fld id="{17B0DD1B-7E30-4159-B8B4-69A3EB6BF287}" type="slidenum">
-              <a:rPr b="0" lang="pl-PL" sz="1200" spc="-1" strike="noStrike">
-                <a:solidFill>
-                  <a:schemeClr val="dk1">
-                    <a:tint val="75000"/>
-                  </a:schemeClr>
-                </a:solidFill>
-                <a:latin typeface="Calibri"/>
-              </a:rPr>
-              <a:t>&lt;number&gt;</a:t>
-            </a:fld>
-            <a:endParaRPr b="0" lang="en-US" sz="1200" spc="-1" strike="noStrike">
               <a:solidFill>
                 <a:srgbClr val="000000"/>
               </a:solidFill>
@@ -3822,7 +2773,7 @@
       </p:grpSpPr>
       <p:sp>
         <p:nvSpPr>
-          <p:cNvPr id="17" name="PlaceHolder 1"/>
+          <p:cNvPr id="13" name="PlaceHolder 1"/>
           <p:cNvSpPr>
             <a:spLocks noGrp="1"/>
           </p:cNvSpPr>
@@ -3833,7 +2784,7 @@
         <p:spPr>
           <a:xfrm>
             <a:off x="457200" y="274680"/>
-            <a:ext cx="8229240" cy="1142640"/>
+            <a:ext cx="8228880" cy="1142280"/>
           </a:xfrm>
           <a:prstGeom prst="rect">
             <a:avLst/>
@@ -3844,37 +2795,34 @@
           </a:ln>
         </p:spPr>
         <p:txBody>
-          <a:bodyPr lIns="91440" rIns="91440" tIns="45720" bIns="45720" anchor="ctr">
+          <a:bodyPr lIns="0" rIns="0" tIns="0" bIns="0" anchor="ctr">
             <a:noAutofit/>
           </a:bodyPr>
           <a:p>
-            <a:pPr indent="0" algn="ctr" defTabSz="914400">
-              <a:lnSpc>
-                <a:spcPct val="100000"/>
-              </a:lnSpc>
+            <a:pPr indent="0">
               <a:buNone/>
             </a:pPr>
             <a:r>
-              <a:rPr b="0" lang="pl-PL" sz="4400" spc="-1" strike="noStrike">
-                <a:solidFill>
-                  <a:schemeClr val="dk1"/>
-                </a:solidFill>
-                <a:latin typeface="Calibri"/>
-              </a:rPr>
-              <a:t>Kliknij, aby edytować styl</a:t>
-            </a:r>
-            <a:endParaRPr b="0" lang="pl-PL" sz="4400" spc="-1" strike="noStrike">
-              <a:solidFill>
-                <a:schemeClr val="dk1"/>
-              </a:solidFill>
-              <a:latin typeface="Calibri"/>
-            </a:endParaRPr>
-          </a:p>
-        </p:txBody>
-      </p:sp>
-      <p:sp>
-        <p:nvSpPr>
-          <p:cNvPr id="18" name="PlaceHolder 2"/>
+              <a:rPr b="0" lang="en-US" sz="1800" spc="-1" strike="noStrike">
+                <a:solidFill>
+                  <a:srgbClr val="000000"/>
+                </a:solidFill>
+                <a:latin typeface="Arial"/>
+              </a:rPr>
+              <a:t>Click to edit the title text format</a:t>
+            </a:r>
+            <a:endParaRPr b="0" lang="en-US" sz="1800" spc="-1" strike="noStrike">
+              <a:solidFill>
+                <a:srgbClr val="000000"/>
+              </a:solidFill>
+              <a:latin typeface="Arial"/>
+            </a:endParaRPr>
+          </a:p>
+        </p:txBody>
+      </p:sp>
+      <p:sp>
+        <p:nvSpPr>
+          <p:cNvPr id="14" name="PlaceHolder 2"/>
           <p:cNvSpPr>
             <a:spLocks noGrp="1"/>
           </p:cNvSpPr>
@@ -3885,7 +2833,7 @@
         <p:spPr>
           <a:xfrm>
             <a:off x="457200" y="1600200"/>
-            <a:ext cx="8229240" cy="4525560"/>
+            <a:ext cx="8228880" cy="4525200"/>
           </a:xfrm>
           <a:prstGeom prst="rect">
             <a:avLst/>
@@ -3896,175 +2844,221 @@
           </a:ln>
         </p:spPr>
         <p:txBody>
-          <a:bodyPr lIns="91440" rIns="91440" tIns="45720" bIns="45720" anchor="t">
-            <a:noAutofit/>
+          <a:bodyPr lIns="0" rIns="0" tIns="0" bIns="0" anchor="t">
+            <a:normAutofit/>
           </a:bodyPr>
           <a:p>
-            <a:pPr marL="343080" indent="-343080" defTabSz="914400">
-              <a:lnSpc>
-                <a:spcPct val="100000"/>
-              </a:lnSpc>
+            <a:pPr marL="432000" indent="-324000">
               <a:spcBef>
-                <a:spcPts val="641"/>
+                <a:spcPts val="1417"/>
               </a:spcBef>
               <a:buClr>
                 <a:srgbClr val="000000"/>
               </a:buClr>
-              <a:buFont typeface="Arial"/>
-              <a:buChar char="•"/>
-            </a:pPr>
-            <a:r>
-              <a:rPr b="0" lang="pl-PL" sz="3200" spc="-1" strike="noStrike">
-                <a:solidFill>
-                  <a:schemeClr val="dk1"/>
-                </a:solidFill>
-                <a:latin typeface="Calibri"/>
-              </a:rPr>
-              <a:t>Kliknij, aby edytować style wzorca tekstu</a:t>
-            </a:r>
-            <a:endParaRPr b="0" lang="pl-PL" sz="3200" spc="-1" strike="noStrike">
-              <a:solidFill>
-                <a:schemeClr val="dk1"/>
-              </a:solidFill>
-              <a:latin typeface="Calibri"/>
-            </a:endParaRPr>
-          </a:p>
-          <a:p>
-            <a:pPr lvl="1" marL="743040" indent="-285840" defTabSz="914400">
-              <a:lnSpc>
-                <a:spcPct val="100000"/>
-              </a:lnSpc>
+              <a:buSzPct val="45000"/>
+              <a:buFont typeface="Wingdings" charset="2"/>
+              <a:buChar char=""/>
+            </a:pPr>
+            <a:r>
+              <a:rPr b="0" lang="en-US" sz="1800" spc="-1" strike="noStrike">
+                <a:solidFill>
+                  <a:srgbClr val="000000"/>
+                </a:solidFill>
+                <a:latin typeface="Arial"/>
+              </a:rPr>
+              <a:t>Click to edit the outline text format</a:t>
+            </a:r>
+            <a:endParaRPr b="0" lang="en-US" sz="1800" spc="-1" strike="noStrike">
+              <a:solidFill>
+                <a:srgbClr val="000000"/>
+              </a:solidFill>
+              <a:latin typeface="Arial"/>
+            </a:endParaRPr>
+          </a:p>
+          <a:p>
+            <a:pPr lvl="1" marL="864000" indent="-324000">
               <a:spcBef>
-                <a:spcPts val="561"/>
+                <a:spcPts val="1134"/>
               </a:spcBef>
               <a:buClr>
                 <a:srgbClr val="000000"/>
               </a:buClr>
-              <a:buFont typeface="Arial"/>
-              <a:buChar char="–"/>
-            </a:pPr>
-            <a:r>
-              <a:rPr b="0" lang="pl-PL" sz="2800" spc="-1" strike="noStrike">
-                <a:solidFill>
-                  <a:schemeClr val="dk1"/>
-                </a:solidFill>
-                <a:latin typeface="Calibri"/>
-              </a:rPr>
-              <a:t>Drugi poziom</a:t>
-            </a:r>
-            <a:endParaRPr b="0" lang="pl-PL" sz="2800" spc="-1" strike="noStrike">
-              <a:solidFill>
-                <a:schemeClr val="dk1"/>
-              </a:solidFill>
-              <a:latin typeface="Calibri"/>
-            </a:endParaRPr>
-          </a:p>
-          <a:p>
-            <a:pPr lvl="2" marL="1143000" indent="-228600" defTabSz="914400">
-              <a:lnSpc>
-                <a:spcPct val="100000"/>
-              </a:lnSpc>
+              <a:buSzPct val="75000"/>
+              <a:buFont typeface="Symbol" charset="2"/>
+              <a:buChar char=""/>
+            </a:pPr>
+            <a:r>
+              <a:rPr b="0" lang="en-US" sz="1800" spc="-1" strike="noStrike">
+                <a:solidFill>
+                  <a:srgbClr val="000000"/>
+                </a:solidFill>
+                <a:latin typeface="Arial"/>
+              </a:rPr>
+              <a:t>Second Outline Level</a:t>
+            </a:r>
+            <a:endParaRPr b="0" lang="en-US" sz="1800" spc="-1" strike="noStrike">
+              <a:solidFill>
+                <a:srgbClr val="000000"/>
+              </a:solidFill>
+              <a:latin typeface="Arial"/>
+            </a:endParaRPr>
+          </a:p>
+          <a:p>
+            <a:pPr lvl="2" marL="1296000" indent="-288000">
               <a:spcBef>
-                <a:spcPts val="479"/>
+                <a:spcPts val="850"/>
               </a:spcBef>
               <a:buClr>
                 <a:srgbClr val="000000"/>
               </a:buClr>
-              <a:buFont typeface="Arial"/>
-              <a:buChar char="•"/>
-            </a:pPr>
-            <a:r>
-              <a:rPr b="0" lang="pl-PL" sz="2400" spc="-1" strike="noStrike">
-                <a:solidFill>
-                  <a:schemeClr val="dk1"/>
-                </a:solidFill>
-                <a:latin typeface="Calibri"/>
-              </a:rPr>
-              <a:t>Trzeci poziom</a:t>
-            </a:r>
-            <a:endParaRPr b="0" lang="pl-PL" sz="2400" spc="-1" strike="noStrike">
-              <a:solidFill>
-                <a:schemeClr val="dk1"/>
-              </a:solidFill>
-              <a:latin typeface="Calibri"/>
-            </a:endParaRPr>
-          </a:p>
-          <a:p>
-            <a:pPr lvl="3" marL="1600200" indent="-228600" defTabSz="914400">
-              <a:lnSpc>
-                <a:spcPct val="100000"/>
-              </a:lnSpc>
+              <a:buSzPct val="45000"/>
+              <a:buFont typeface="Wingdings" charset="2"/>
+              <a:buChar char=""/>
+            </a:pPr>
+            <a:r>
+              <a:rPr b="0" lang="en-US" sz="1800" spc="-1" strike="noStrike">
+                <a:solidFill>
+                  <a:srgbClr val="000000"/>
+                </a:solidFill>
+                <a:latin typeface="Arial"/>
+              </a:rPr>
+              <a:t>Third Outline Level</a:t>
+            </a:r>
+            <a:endParaRPr b="0" lang="en-US" sz="1800" spc="-1" strike="noStrike">
+              <a:solidFill>
+                <a:srgbClr val="000000"/>
+              </a:solidFill>
+              <a:latin typeface="Arial"/>
+            </a:endParaRPr>
+          </a:p>
+          <a:p>
+            <a:pPr lvl="3" marL="1728000" indent="-216000">
               <a:spcBef>
-                <a:spcPts val="400"/>
+                <a:spcPts val="567"/>
               </a:spcBef>
               <a:buClr>
                 <a:srgbClr val="000000"/>
               </a:buClr>
-              <a:buFont typeface="Arial"/>
-              <a:buChar char="–"/>
-            </a:pPr>
-            <a:r>
-              <a:rPr b="0" lang="pl-PL" sz="2000" spc="-1" strike="noStrike">
-                <a:solidFill>
-                  <a:schemeClr val="dk1"/>
-                </a:solidFill>
-                <a:latin typeface="Calibri"/>
-              </a:rPr>
-              <a:t>Czwarty poziom</a:t>
-            </a:r>
-            <a:endParaRPr b="0" lang="pl-PL" sz="2000" spc="-1" strike="noStrike">
-              <a:solidFill>
-                <a:schemeClr val="dk1"/>
-              </a:solidFill>
-              <a:latin typeface="Calibri"/>
-            </a:endParaRPr>
-          </a:p>
-          <a:p>
-            <a:pPr lvl="4" marL="2057400" indent="-228600" defTabSz="914400">
-              <a:lnSpc>
-                <a:spcPct val="100000"/>
-              </a:lnSpc>
+              <a:buSzPct val="75000"/>
+              <a:buFont typeface="Symbol" charset="2"/>
+              <a:buChar char=""/>
+            </a:pPr>
+            <a:r>
+              <a:rPr b="0" lang="en-US" sz="1800" spc="-1" strike="noStrike">
+                <a:solidFill>
+                  <a:srgbClr val="000000"/>
+                </a:solidFill>
+                <a:latin typeface="Arial"/>
+              </a:rPr>
+              <a:t>Fourth Outline Level</a:t>
+            </a:r>
+            <a:endParaRPr b="0" lang="en-US" sz="1800" spc="-1" strike="noStrike">
+              <a:solidFill>
+                <a:srgbClr val="000000"/>
+              </a:solidFill>
+              <a:latin typeface="Arial"/>
+            </a:endParaRPr>
+          </a:p>
+          <a:p>
+            <a:pPr lvl="4" marL="2160000" indent="-216000">
               <a:spcBef>
-                <a:spcPts val="400"/>
+                <a:spcPts val="283"/>
               </a:spcBef>
               <a:buClr>
                 <a:srgbClr val="000000"/>
               </a:buClr>
-              <a:buFont typeface="Arial"/>
-              <a:buChar char="»"/>
-            </a:pPr>
-            <a:r>
-              <a:rPr b="0" lang="pl-PL" sz="2000" spc="-1" strike="noStrike">
-                <a:solidFill>
-                  <a:schemeClr val="dk1"/>
-                </a:solidFill>
-                <a:latin typeface="Calibri"/>
-              </a:rPr>
-              <a:t>Piąty poziom</a:t>
-            </a:r>
-            <a:endParaRPr b="0" lang="pl-PL" sz="2000" spc="-1" strike="noStrike">
-              <a:solidFill>
-                <a:schemeClr val="dk1"/>
-              </a:solidFill>
-              <a:latin typeface="Calibri"/>
-            </a:endParaRPr>
-          </a:p>
-        </p:txBody>
-      </p:sp>
-      <p:sp>
-        <p:nvSpPr>
-          <p:cNvPr id="19" name="PlaceHolder 3"/>
+              <a:buSzPct val="45000"/>
+              <a:buFont typeface="Wingdings" charset="2"/>
+              <a:buChar char=""/>
+            </a:pPr>
+            <a:r>
+              <a:rPr b="0" lang="en-US" sz="1800" spc="-1" strike="noStrike">
+                <a:solidFill>
+                  <a:srgbClr val="000000"/>
+                </a:solidFill>
+                <a:latin typeface="Arial"/>
+              </a:rPr>
+              <a:t>Fifth Outline Level</a:t>
+            </a:r>
+            <a:endParaRPr b="0" lang="en-US" sz="1800" spc="-1" strike="noStrike">
+              <a:solidFill>
+                <a:srgbClr val="000000"/>
+              </a:solidFill>
+              <a:latin typeface="Arial"/>
+            </a:endParaRPr>
+          </a:p>
+          <a:p>
+            <a:pPr lvl="5" marL="2592000" indent="-216000">
+              <a:spcBef>
+                <a:spcPts val="283"/>
+              </a:spcBef>
+              <a:buClr>
+                <a:srgbClr val="000000"/>
+              </a:buClr>
+              <a:buSzPct val="45000"/>
+              <a:buFont typeface="Wingdings" charset="2"/>
+              <a:buChar char=""/>
+            </a:pPr>
+            <a:r>
+              <a:rPr b="0" lang="en-US" sz="1800" spc="-1" strike="noStrike">
+                <a:solidFill>
+                  <a:srgbClr val="000000"/>
+                </a:solidFill>
+                <a:latin typeface="Arial"/>
+              </a:rPr>
+              <a:t>Sixth Outline Level</a:t>
+            </a:r>
+            <a:endParaRPr b="0" lang="en-US" sz="1800" spc="-1" strike="noStrike">
+              <a:solidFill>
+                <a:srgbClr val="000000"/>
+              </a:solidFill>
+              <a:latin typeface="Arial"/>
+            </a:endParaRPr>
+          </a:p>
+          <a:p>
+            <a:pPr lvl="6" marL="3024000" indent="-216000">
+              <a:spcBef>
+                <a:spcPts val="283"/>
+              </a:spcBef>
+              <a:buClr>
+                <a:srgbClr val="000000"/>
+              </a:buClr>
+              <a:buSzPct val="45000"/>
+              <a:buFont typeface="Wingdings" charset="2"/>
+              <a:buChar char=""/>
+            </a:pPr>
+            <a:r>
+              <a:rPr b="0" lang="en-US" sz="1800" spc="-1" strike="noStrike">
+                <a:solidFill>
+                  <a:srgbClr val="000000"/>
+                </a:solidFill>
+                <a:latin typeface="Arial"/>
+              </a:rPr>
+              <a:t>Seventh Outline Level</a:t>
+            </a:r>
+            <a:endParaRPr b="0" lang="en-US" sz="1800" spc="-1" strike="noStrike">
+              <a:solidFill>
+                <a:srgbClr val="000000"/>
+              </a:solidFill>
+              <a:latin typeface="Arial"/>
+            </a:endParaRPr>
+          </a:p>
+        </p:txBody>
+      </p:sp>
+      <p:sp>
+        <p:nvSpPr>
+          <p:cNvPr id="15" name="PlaceHolder 3"/>
           <p:cNvSpPr>
             <a:spLocks noGrp="1"/>
           </p:cNvSpPr>
           <p:nvPr>
-            <p:ph type="dt" idx="10"/>
+            <p:ph type="ftr" idx="10"/>
           </p:nvPr>
         </p:nvSpPr>
         <p:spPr>
           <a:xfrm>
-            <a:off x="457200" y="6356520"/>
-            <a:ext cx="2133360" cy="364680"/>
+            <a:off x="3124080" y="6356520"/>
+            <a:ext cx="2894760" cy="364320"/>
           </a:xfrm>
           <a:prstGeom prst="rect">
             <a:avLst/>
@@ -4079,40 +3073,42 @@
             <a:noAutofit/>
           </a:bodyPr>
           <a:lstStyle>
-            <a:lvl1pPr indent="0" defTabSz="914400">
+            <a:lvl1pPr indent="0" algn="ctr">
               <a:lnSpc>
                 <a:spcPct val="100000"/>
               </a:lnSpc>
               <a:buNone/>
-              <a:defRPr b="0" lang="pl-PL" sz="1200" spc="-1" strike="noStrike">
-                <a:solidFill>
-                  <a:schemeClr val="dk1">
-                    <a:tint val="75000"/>
-                  </a:schemeClr>
-                </a:solidFill>
-                <a:latin typeface="Calibri"/>
+              <a:tabLst>
+                <a:tab algn="l" pos="0"/>
+              </a:tabLst>
+              <a:defRPr b="0" lang="en-US" sz="1400" spc="-1" strike="noStrike">
+                <a:solidFill>
+                  <a:srgbClr val="000000"/>
+                </a:solidFill>
+                <a:latin typeface="Times New Roman"/>
               </a:defRPr>
             </a:lvl1pPr>
           </a:lstStyle>
           <a:p>
-            <a:pPr indent="0" defTabSz="914400">
+            <a:pPr indent="0" algn="ctr">
               <a:lnSpc>
                 <a:spcPct val="100000"/>
               </a:lnSpc>
               <a:buNone/>
-            </a:pPr>
-            <a:r>
-              <a:rPr b="0" lang="pl-PL" sz="1200" spc="-1" strike="noStrike">
-                <a:solidFill>
-                  <a:schemeClr val="dk1">
-                    <a:tint val="75000"/>
-                  </a:schemeClr>
-                </a:solidFill>
-                <a:latin typeface="Calibri"/>
-              </a:rPr>
-              <a:t>&lt;date/time&gt;</a:t>
-            </a:r>
-            <a:endParaRPr b="0" lang="en-US" sz="1200" spc="-1" strike="noStrike">
+              <a:tabLst>
+                <a:tab algn="l" pos="0"/>
+              </a:tabLst>
+            </a:pPr>
+            <a:r>
+              <a:rPr b="0" lang="en-US" sz="1400" spc="-1" strike="noStrike">
+                <a:solidFill>
+                  <a:srgbClr val="000000"/>
+                </a:solidFill>
+                <a:latin typeface="Times New Roman"/>
+              </a:rPr>
+              <a:t>&lt;footer&gt;</a:t>
+            </a:r>
+            <a:endParaRPr b="0" lang="en-US" sz="1400" spc="-1" strike="noStrike">
               <a:solidFill>
                 <a:srgbClr val="000000"/>
               </a:solidFill>
@@ -4123,18 +3119,18 @@
       </p:sp>
       <p:sp>
         <p:nvSpPr>
-          <p:cNvPr id="20" name="PlaceHolder 4"/>
+          <p:cNvPr id="16" name="PlaceHolder 4"/>
           <p:cNvSpPr>
             <a:spLocks noGrp="1"/>
           </p:cNvSpPr>
           <p:nvPr>
-            <p:ph type="ftr" idx="11"/>
+            <p:ph type="sldNum" idx="11"/>
           </p:nvPr>
         </p:nvSpPr>
         <p:spPr>
           <a:xfrm>
-            <a:off x="3124080" y="6356520"/>
-            <a:ext cx="2895120" cy="364680"/>
+            <a:off x="6553080" y="6356520"/>
+            <a:ext cx="2133000" cy="364320"/>
           </a:xfrm>
           <a:prstGeom prst="rect">
             <a:avLst/>
@@ -4149,30 +3145,46 @@
             <a:noAutofit/>
           </a:bodyPr>
           <a:lstStyle>
-            <a:lvl1pPr indent="0" algn="ctr">
+            <a:lvl1pPr indent="0" algn="r" defTabSz="914400">
+              <a:lnSpc>
+                <a:spcPct val="100000"/>
+              </a:lnSpc>
               <a:buNone/>
-              <a:defRPr b="0" lang="en-US" sz="1400" spc="-1" strike="noStrike">
-                <a:solidFill>
-                  <a:srgbClr val="000000"/>
-                </a:solidFill>
-                <a:latin typeface="Times New Roman"/>
+              <a:tabLst>
+                <a:tab algn="l" pos="0"/>
+              </a:tabLst>
+              <a:defRPr b="0" lang="pl-PL" sz="1200" spc="-1" strike="noStrike">
+                <a:solidFill>
+                  <a:schemeClr val="dk1">
+                    <a:tint val="75000"/>
+                  </a:schemeClr>
+                </a:solidFill>
+                <a:latin typeface="Calibri"/>
               </a:defRPr>
             </a:lvl1pPr>
           </a:lstStyle>
           <a:p>
-            <a:pPr indent="0" algn="ctr">
+            <a:pPr indent="0" algn="r" defTabSz="914400">
+              <a:lnSpc>
+                <a:spcPct val="100000"/>
+              </a:lnSpc>
               <a:buNone/>
-            </a:pPr>
-            <a:r>
-              <a:rPr b="0" lang="en-US" sz="1400" spc="-1" strike="noStrike">
-                <a:solidFill>
-                  <a:srgbClr val="000000"/>
-                </a:solidFill>
-                <a:latin typeface="Times New Roman"/>
-              </a:rPr>
-              <a:t>&lt;footer&gt;</a:t>
-            </a:r>
-            <a:endParaRPr b="0" lang="en-US" sz="1400" spc="-1" strike="noStrike">
+              <a:tabLst>
+                <a:tab algn="l" pos="0"/>
+              </a:tabLst>
+            </a:pPr>
+            <a:fld id="{9BC2F587-72BB-4DF6-A2A9-8F2AD753A774}" type="slidenum">
+              <a:rPr b="0" lang="pl-PL" sz="1200" spc="-1" strike="noStrike">
+                <a:solidFill>
+                  <a:schemeClr val="dk1">
+                    <a:tint val="75000"/>
+                  </a:schemeClr>
+                </a:solidFill>
+                <a:latin typeface="Calibri"/>
+              </a:rPr>
+              <a:t>&lt;number&gt;</a:t>
+            </a:fld>
+            <a:endParaRPr b="0" lang="en-US" sz="1200" spc="-1" strike="noStrike">
               <a:solidFill>
                 <a:srgbClr val="000000"/>
               </a:solidFill>
@@ -4183,18 +3195,18 @@
       </p:sp>
       <p:sp>
         <p:nvSpPr>
-          <p:cNvPr id="21" name="PlaceHolder 5"/>
+          <p:cNvPr id="17" name="PlaceHolder 5"/>
           <p:cNvSpPr>
             <a:spLocks noGrp="1"/>
           </p:cNvSpPr>
           <p:nvPr>
-            <p:ph type="sldNum" idx="12"/>
+            <p:ph type="dt" idx="12"/>
           </p:nvPr>
         </p:nvSpPr>
         <p:spPr>
           <a:xfrm>
-            <a:off x="6553080" y="6356520"/>
-            <a:ext cx="2133360" cy="364680"/>
+            <a:off x="457200" y="6356520"/>
+            <a:ext cx="2133000" cy="364320"/>
           </a:xfrm>
           <a:prstGeom prst="rect">
             <a:avLst/>
@@ -4209,40 +3221,30 @@
             <a:noAutofit/>
           </a:bodyPr>
           <a:lstStyle>
-            <a:lvl1pPr indent="0" algn="r" defTabSz="914400">
-              <a:lnSpc>
-                <a:spcPct val="100000"/>
-              </a:lnSpc>
+            <a:lvl1pPr indent="0">
               <a:buNone/>
-              <a:defRPr b="0" lang="pl-PL" sz="1200" spc="-1" strike="noStrike">
-                <a:solidFill>
-                  <a:schemeClr val="dk1">
-                    <a:tint val="75000"/>
-                  </a:schemeClr>
-                </a:solidFill>
-                <a:latin typeface="Calibri"/>
+              <a:defRPr b="0" lang="en-US" sz="1400" spc="-1" strike="noStrike">
+                <a:solidFill>
+                  <a:srgbClr val="000000"/>
+                </a:solidFill>
+                <a:latin typeface="Times New Roman"/>
               </a:defRPr>
             </a:lvl1pPr>
           </a:lstStyle>
           <a:p>
-            <a:pPr indent="0" algn="r" defTabSz="914400">
-              <a:lnSpc>
-                <a:spcPct val="100000"/>
-              </a:lnSpc>
+            <a:pPr indent="0">
               <a:buNone/>
             </a:pPr>
-            <a:fld id="{088FA266-9A00-4FE0-B895-DB8BC07F7D24}" type="slidenum">
-              <a:rPr b="0" lang="pl-PL" sz="1200" spc="-1" strike="noStrike">
-                <a:solidFill>
-                  <a:schemeClr val="dk1">
-                    <a:tint val="75000"/>
-                  </a:schemeClr>
-                </a:solidFill>
-                <a:latin typeface="Calibri"/>
-              </a:rPr>
-              <a:t>&lt;number&gt;</a:t>
-            </a:fld>
-            <a:endParaRPr b="0" lang="en-US" sz="1200" spc="-1" strike="noStrike">
+            <a:r>
+              <a:rPr b="0" lang="en-US" sz="1400" spc="-1" strike="noStrike">
+                <a:solidFill>
+                  <a:srgbClr val="000000"/>
+                </a:solidFill>
+                <a:latin typeface="Times New Roman"/>
+              </a:rPr>
+              <a:t>&lt;date/time&gt;</a:t>
+            </a:r>
+            <a:endParaRPr b="0" lang="en-US" sz="1400" spc="-1" strike="noStrike">
               <a:solidFill>
                 <a:srgbClr val="000000"/>
               </a:solidFill>
@@ -4286,18 +3288,18 @@
       </p:grpSpPr>
       <p:sp>
         <p:nvSpPr>
-          <p:cNvPr id="24" name="PlaceHolder 1"/>
+          <p:cNvPr id="20" name="PlaceHolder 1"/>
           <p:cNvSpPr>
             <a:spLocks noGrp="1"/>
           </p:cNvSpPr>
           <p:nvPr>
-            <p:ph type="title"/>
+            <p:ph type="ftr" idx="13"/>
           </p:nvPr>
         </p:nvSpPr>
         <p:spPr>
           <a:xfrm>
-            <a:off x="722160" y="4406760"/>
-            <a:ext cx="7772040" cy="1361880"/>
+            <a:off x="3124080" y="6356520"/>
+            <a:ext cx="2894760" cy="364320"/>
           </a:xfrm>
           <a:prstGeom prst="rect">
             <a:avLst/>
@@ -4308,48 +3310,68 @@
           </a:ln>
         </p:spPr>
         <p:txBody>
-          <a:bodyPr lIns="91440" rIns="91440" tIns="45720" bIns="45720" anchor="t">
+          <a:bodyPr lIns="91440" rIns="91440" tIns="45720" bIns="45720" anchor="ctr">
             <a:noAutofit/>
           </a:bodyPr>
-          <a:p>
-            <a:pPr indent="0" defTabSz="914400">
+          <a:lstStyle>
+            <a:lvl1pPr indent="0" algn="ctr">
               <a:lnSpc>
                 <a:spcPct val="100000"/>
               </a:lnSpc>
               <a:buNone/>
-            </a:pPr>
-            <a:r>
-              <a:rPr b="1" lang="pl-PL" sz="4000" spc="-1" strike="noStrike" cap="all">
-                <a:solidFill>
-                  <a:schemeClr val="dk1"/>
-                </a:solidFill>
-                <a:latin typeface="Calibri"/>
-              </a:rPr>
-              <a:t>Kliknij, aby edytować styl</a:t>
-            </a:r>
-            <a:endParaRPr b="0" lang="pl-PL" sz="4000" spc="-1" strike="noStrike">
-              <a:solidFill>
-                <a:schemeClr val="dk1"/>
-              </a:solidFill>
-              <a:latin typeface="Calibri"/>
-            </a:endParaRPr>
-          </a:p>
-        </p:txBody>
-      </p:sp>
-      <p:sp>
-        <p:nvSpPr>
-          <p:cNvPr id="25" name="PlaceHolder 2"/>
+              <a:tabLst>
+                <a:tab algn="l" pos="0"/>
+              </a:tabLst>
+              <a:defRPr b="0" lang="en-US" sz="1400" spc="-1" strike="noStrike">
+                <a:solidFill>
+                  <a:srgbClr val="000000"/>
+                </a:solidFill>
+                <a:latin typeface="Times New Roman"/>
+              </a:defRPr>
+            </a:lvl1pPr>
+          </a:lstStyle>
+          <a:p>
+            <a:pPr indent="0" algn="ctr">
+              <a:lnSpc>
+                <a:spcPct val="100000"/>
+              </a:lnSpc>
+              <a:buNone/>
+              <a:tabLst>
+                <a:tab algn="l" pos="0"/>
+              </a:tabLst>
+            </a:pPr>
+            <a:r>
+              <a:rPr b="0" lang="en-US" sz="1400" spc="-1" strike="noStrike">
+                <a:solidFill>
+                  <a:srgbClr val="000000"/>
+                </a:solidFill>
+                <a:latin typeface="Times New Roman"/>
+              </a:rPr>
+              <a:t>&lt;footer&gt;</a:t>
+            </a:r>
+            <a:endParaRPr b="0" lang="en-US" sz="1400" spc="-1" strike="noStrike">
+              <a:solidFill>
+                <a:srgbClr val="000000"/>
+              </a:solidFill>
+              <a:latin typeface="Times New Roman"/>
+            </a:endParaRPr>
+          </a:p>
+        </p:txBody>
+      </p:sp>
+      <p:sp>
+        <p:nvSpPr>
+          <p:cNvPr id="21" name="PlaceHolder 2"/>
           <p:cNvSpPr>
             <a:spLocks noGrp="1"/>
           </p:cNvSpPr>
           <p:nvPr>
-            <p:ph type="body"/>
+            <p:ph type="sldNum" idx="14"/>
           </p:nvPr>
         </p:nvSpPr>
         <p:spPr>
           <a:xfrm>
-            <a:off x="722160" y="2906640"/>
-            <a:ext cx="7772040" cy="1499760"/>
+            <a:off x="6553080" y="6356520"/>
+            <a:ext cx="2133000" cy="364320"/>
           </a:xfrm>
           <a:prstGeom prst="rect">
             <a:avLst/>
@@ -4360,56 +3382,72 @@
           </a:ln>
         </p:spPr>
         <p:txBody>
-          <a:bodyPr lIns="91440" rIns="91440" tIns="45720" bIns="45720" anchor="b">
+          <a:bodyPr lIns="91440" rIns="91440" tIns="45720" bIns="45720" anchor="ctr">
             <a:noAutofit/>
           </a:bodyPr>
-          <a:p>
-            <a:pPr indent="0" defTabSz="914400">
-              <a:lnSpc>
-                <a:spcPct val="100000"/>
-              </a:lnSpc>
-              <a:spcBef>
-                <a:spcPts val="400"/>
-              </a:spcBef>
+          <a:lstStyle>
+            <a:lvl1pPr indent="0" algn="r" defTabSz="914400">
+              <a:lnSpc>
+                <a:spcPct val="100000"/>
+              </a:lnSpc>
               <a:buNone/>
               <a:tabLst>
                 <a:tab algn="l" pos="0"/>
               </a:tabLst>
-            </a:pPr>
-            <a:r>
-              <a:rPr b="0" lang="pl-PL" sz="2000" spc="-1" strike="noStrike">
+              <a:defRPr b="0" lang="pl-PL" sz="1200" spc="-1" strike="noStrike">
                 <a:solidFill>
                   <a:schemeClr val="dk1">
                     <a:tint val="75000"/>
                   </a:schemeClr>
                 </a:solidFill>
                 <a:latin typeface="Calibri"/>
-              </a:rPr>
-              <a:t>Kliknij, aby edytować style wzorca tekstu</a:t>
-            </a:r>
-            <a:endParaRPr b="0" lang="pl-PL" sz="2000" spc="-1" strike="noStrike">
-              <a:solidFill>
-                <a:schemeClr val="dk1"/>
-              </a:solidFill>
-              <a:latin typeface="Calibri"/>
-            </a:endParaRPr>
-          </a:p>
-        </p:txBody>
-      </p:sp>
-      <p:sp>
-        <p:nvSpPr>
-          <p:cNvPr id="26" name="PlaceHolder 3"/>
+              </a:defRPr>
+            </a:lvl1pPr>
+          </a:lstStyle>
+          <a:p>
+            <a:pPr indent="0" algn="r" defTabSz="914400">
+              <a:lnSpc>
+                <a:spcPct val="100000"/>
+              </a:lnSpc>
+              <a:buNone/>
+              <a:tabLst>
+                <a:tab algn="l" pos="0"/>
+              </a:tabLst>
+            </a:pPr>
+            <a:fld id="{C2E7E0F8-7A52-46E8-B836-B28BBD593847}" type="slidenum">
+              <a:rPr b="0" lang="pl-PL" sz="1200" spc="-1" strike="noStrike">
+                <a:solidFill>
+                  <a:schemeClr val="dk1">
+                    <a:tint val="75000"/>
+                  </a:schemeClr>
+                </a:solidFill>
+                <a:latin typeface="Calibri"/>
+              </a:rPr>
+              <a:t>&lt;number&gt;</a:t>
+            </a:fld>
+            <a:endParaRPr b="0" lang="en-US" sz="1200" spc="-1" strike="noStrike">
+              <a:solidFill>
+                <a:srgbClr val="000000"/>
+              </a:solidFill>
+              <a:latin typeface="Times New Roman"/>
+            </a:endParaRPr>
+          </a:p>
+        </p:txBody>
+      </p:sp>
+      <p:sp>
+        <p:nvSpPr>
+          <p:cNvPr id="22" name="PlaceHolder 3"/>
           <p:cNvSpPr>
             <a:spLocks noGrp="1"/>
           </p:cNvSpPr>
           <p:nvPr>
-            <p:ph type="dt" idx="13"/>
+            <p:ph type="dt" idx="15"/>
           </p:nvPr>
         </p:nvSpPr>
         <p:spPr>
           <a:xfrm>
             <a:off x="457200" y="6356520"/>
-            <a:ext cx="2133360" cy="364680"/>
+            <a:ext cx="2133000" cy="364320"/>
           </a:xfrm>
           <a:prstGeom prst="rect">
             <a:avLst/>
@@ -4424,77 +3462,7 @@
             <a:noAutofit/>
           </a:bodyPr>
           <a:lstStyle>
-            <a:lvl1pPr indent="0" defTabSz="914400">
-              <a:lnSpc>
-                <a:spcPct val="100000"/>
-              </a:lnSpc>
-              <a:buNone/>
-              <a:defRPr b="0" lang="pl-PL" sz="1200" spc="-1" strike="noStrike">
-                <a:solidFill>
-                  <a:schemeClr val="dk1">
-                    <a:tint val="75000"/>
-                  </a:schemeClr>
-                </a:solidFill>
-                <a:latin typeface="Calibri"/>
-              </a:defRPr>
-            </a:lvl1pPr>
-          </a:lstStyle>
-          <a:p>
-            <a:pPr indent="0" defTabSz="914400">
-              <a:lnSpc>
-                <a:spcPct val="100000"/>
-              </a:lnSpc>
-              <a:buNone/>
-            </a:pPr>
-            <a:r>
-              <a:rPr b="0" lang="pl-PL" sz="1200" spc="-1" strike="noStrike">
-                <a:solidFill>
-                  <a:schemeClr val="dk1">
-                    <a:tint val="75000"/>
-                  </a:schemeClr>
-                </a:solidFill>
-                <a:latin typeface="Calibri"/>
-              </a:rPr>
-              <a:t>&lt;date/time&gt;</a:t>
-            </a:r>
-            <a:endParaRPr b="0" lang="en-US" sz="1200" spc="-1" strike="noStrike">
-              <a:solidFill>
-                <a:srgbClr val="000000"/>
-              </a:solidFill>
-              <a:latin typeface="Times New Roman"/>
-            </a:endParaRPr>
-          </a:p>
-        </p:txBody>
-      </p:sp>
-      <p:sp>
-        <p:nvSpPr>
-          <p:cNvPr id="27" name="PlaceHolder 4"/>
-          <p:cNvSpPr>
-            <a:spLocks noGrp="1"/>
-          </p:cNvSpPr>
-          <p:nvPr>
-            <p:ph type="ftr" idx="14"/>
-          </p:nvPr>
-        </p:nvSpPr>
-        <p:spPr>
-          <a:xfrm>
-            <a:off x="3124080" y="6356520"/>
-            <a:ext cx="2895120" cy="364680"/>
-          </a:xfrm>
-          <a:prstGeom prst="rect">
-            <a:avLst/>
-          </a:prstGeom>
-          <a:noFill/>
-          <a:ln w="0">
-            <a:noFill/>
-          </a:ln>
-        </p:spPr>
-        <p:txBody>
-          <a:bodyPr lIns="91440" rIns="91440" tIns="45720" bIns="45720" anchor="ctr">
-            <a:noAutofit/>
-          </a:bodyPr>
-          <a:lstStyle>
-            <a:lvl1pPr indent="0" algn="ctr">
+            <a:lvl1pPr indent="0">
               <a:buNone/>
               <a:defRPr b="0" lang="en-US" sz="1400" spc="-1" strike="noStrike">
                 <a:solidFill>
@@ -4505,7 +3473,7 @@
             </a:lvl1pPr>
           </a:lstStyle>
           <a:p>
-            <a:pPr indent="0" algn="ctr">
+            <a:pPr indent="0">
               <a:buNone/>
             </a:pPr>
             <a:r>
@@ -4515,79 +3483,9 @@
                 </a:solidFill>
                 <a:latin typeface="Times New Roman"/>
               </a:rPr>
-              <a:t>&lt;footer&gt;</a:t>
+              <a:t>&lt;date/time&gt;</a:t>
             </a:r>
             <a:endParaRPr b="0" lang="en-US" sz="1400" spc="-1" strike="noStrike">
-              <a:solidFill>
-                <a:srgbClr val="000000"/>
-              </a:solidFill>
-              <a:latin typeface="Times New Roman"/>
-            </a:endParaRPr>
-          </a:p>
-        </p:txBody>
-      </p:sp>
-      <p:sp>
-        <p:nvSpPr>
-          <p:cNvPr id="28" name="PlaceHolder 5"/>
-          <p:cNvSpPr>
-            <a:spLocks noGrp="1"/>
-          </p:cNvSpPr>
-          <p:nvPr>
-            <p:ph type="sldNum" idx="15"/>
-          </p:nvPr>
-        </p:nvSpPr>
-        <p:spPr>
-          <a:xfrm>
-            <a:off x="6553080" y="6356520"/>
-            <a:ext cx="2133360" cy="364680"/>
-          </a:xfrm>
-          <a:prstGeom prst="rect">
-            <a:avLst/>
-          </a:prstGeom>
-          <a:noFill/>
-          <a:ln w="0">
-            <a:noFill/>
-          </a:ln>
-        </p:spPr>
-        <p:txBody>
-          <a:bodyPr lIns="91440" rIns="91440" tIns="45720" bIns="45720" anchor="ctr">
-            <a:noAutofit/>
-          </a:bodyPr>
-          <a:lstStyle>
-            <a:lvl1pPr indent="0" algn="r" defTabSz="914400">
-              <a:lnSpc>
-                <a:spcPct val="100000"/>
-              </a:lnSpc>
-              <a:buNone/>
-              <a:defRPr b="0" lang="pl-PL" sz="1200" spc="-1" strike="noStrike">
-                <a:solidFill>
-                  <a:schemeClr val="dk1">
-                    <a:tint val="75000"/>
-                  </a:schemeClr>
-                </a:solidFill>
-                <a:latin typeface="Calibri"/>
-              </a:defRPr>
-            </a:lvl1pPr>
-          </a:lstStyle>
-          <a:p>
-            <a:pPr indent="0" algn="r" defTabSz="914400">
-              <a:lnSpc>
-                <a:spcPct val="100000"/>
-              </a:lnSpc>
-              <a:buNone/>
-            </a:pPr>
-            <a:fld id="{BCBD2677-4943-4C62-AD13-4AE38936DB83}" type="slidenum">
-              <a:rPr b="0" lang="pl-PL" sz="1200" spc="-1" strike="noStrike">
-                <a:solidFill>
-                  <a:schemeClr val="dk1">
-                    <a:tint val="75000"/>
-                  </a:schemeClr>
-                </a:solidFill>
-                <a:latin typeface="Calibri"/>
-              </a:rPr>
-              <a:t>&lt;number&gt;</a:t>
-            </a:fld>
-            <a:endParaRPr b="0" lang="en-US" sz="1200" spc="-1" strike="noStrike">
               <a:solidFill>
                 <a:srgbClr val="000000"/>
               </a:solidFill>
@@ -4631,7 +3529,7 @@
       </p:grpSpPr>
       <p:sp>
         <p:nvSpPr>
-          <p:cNvPr id="29" name="PlaceHolder 1"/>
+          <p:cNvPr id="23" name="PlaceHolder 1"/>
           <p:cNvSpPr>
             <a:spLocks noGrp="1"/>
           </p:cNvSpPr>
@@ -4642,7 +3540,7 @@
         <p:spPr>
           <a:xfrm>
             <a:off x="457200" y="274680"/>
-            <a:ext cx="8229240" cy="1142640"/>
+            <a:ext cx="8228880" cy="1142280"/>
           </a:xfrm>
           <a:prstGeom prst="rect">
             <a:avLst/>
@@ -4653,37 +3551,34 @@
           </a:ln>
         </p:spPr>
         <p:txBody>
-          <a:bodyPr lIns="91440" rIns="91440" tIns="45720" bIns="45720" anchor="ctr">
+          <a:bodyPr lIns="0" rIns="0" tIns="0" bIns="0" anchor="ctr">
             <a:noAutofit/>
           </a:bodyPr>
           <a:p>
-            <a:pPr indent="0" algn="ctr" defTabSz="914400">
-              <a:lnSpc>
-                <a:spcPct val="100000"/>
-              </a:lnSpc>
+            <a:pPr indent="0">
               <a:buNone/>
             </a:pPr>
             <a:r>
-              <a:rPr b="0" lang="pl-PL" sz="4400" spc="-1" strike="noStrike">
-                <a:solidFill>
-                  <a:schemeClr val="dk1"/>
-                </a:solidFill>
-                <a:latin typeface="Calibri"/>
-              </a:rPr>
-              <a:t>Kliknij, aby edytować styl</a:t>
-            </a:r>
-            <a:endParaRPr b="0" lang="pl-PL" sz="4400" spc="-1" strike="noStrike">
-              <a:solidFill>
-                <a:schemeClr val="dk1"/>
-              </a:solidFill>
-              <a:latin typeface="Calibri"/>
-            </a:endParaRPr>
-          </a:p>
-        </p:txBody>
-      </p:sp>
-      <p:sp>
-        <p:nvSpPr>
-          <p:cNvPr id="30" name="PlaceHolder 2"/>
+              <a:rPr b="0" lang="en-US" sz="1800" spc="-1" strike="noStrike">
+                <a:solidFill>
+                  <a:srgbClr val="000000"/>
+                </a:solidFill>
+                <a:latin typeface="Arial"/>
+              </a:rPr>
+              <a:t>Click to edit the title text format</a:t>
+            </a:r>
+            <a:endParaRPr b="0" lang="en-US" sz="1800" spc="-1" strike="noStrike">
+              <a:solidFill>
+                <a:srgbClr val="000000"/>
+              </a:solidFill>
+              <a:latin typeface="Arial"/>
+            </a:endParaRPr>
+          </a:p>
+        </p:txBody>
+      </p:sp>
+      <p:sp>
+        <p:nvSpPr>
+          <p:cNvPr id="24" name="PlaceHolder 2"/>
           <p:cNvSpPr>
             <a:spLocks noGrp="1"/>
           </p:cNvSpPr>
@@ -4694,7 +3589,7 @@
         <p:spPr>
           <a:xfrm>
             <a:off x="457200" y="1600200"/>
-            <a:ext cx="4038120" cy="4525560"/>
+            <a:ext cx="4015440" cy="4525200"/>
           </a:xfrm>
           <a:prstGeom prst="rect">
             <a:avLst/>
@@ -4705,164 +3600,210 @@
           </a:ln>
         </p:spPr>
         <p:txBody>
-          <a:bodyPr lIns="91440" rIns="91440" tIns="45720" bIns="45720" anchor="t">
-            <a:noAutofit/>
+          <a:bodyPr lIns="0" rIns="0" tIns="0" bIns="0" anchor="t">
+            <a:normAutofit/>
           </a:bodyPr>
           <a:p>
-            <a:pPr marL="343080" indent="-343080" defTabSz="914400">
-              <a:lnSpc>
-                <a:spcPct val="100000"/>
-              </a:lnSpc>
+            <a:pPr marL="432000" indent="-324000">
               <a:spcBef>
-                <a:spcPts val="561"/>
+                <a:spcPts val="1417"/>
               </a:spcBef>
               <a:buClr>
                 <a:srgbClr val="000000"/>
               </a:buClr>
-              <a:buFont typeface="Arial"/>
-              <a:buChar char="•"/>
-            </a:pPr>
-            <a:r>
-              <a:rPr b="0" lang="pl-PL" sz="2800" spc="-1" strike="noStrike">
-                <a:solidFill>
-                  <a:schemeClr val="dk1"/>
-                </a:solidFill>
-                <a:latin typeface="Calibri"/>
-              </a:rPr>
-              <a:t>Kliknij, aby edytować style wzorca tekstu</a:t>
-            </a:r>
-            <a:endParaRPr b="0" lang="pl-PL" sz="2800" spc="-1" strike="noStrike">
-              <a:solidFill>
-                <a:schemeClr val="dk1"/>
-              </a:solidFill>
-              <a:latin typeface="Calibri"/>
-            </a:endParaRPr>
-          </a:p>
-          <a:p>
-            <a:pPr lvl="1" marL="743040" indent="-285840" defTabSz="914400">
-              <a:lnSpc>
-                <a:spcPct val="100000"/>
-              </a:lnSpc>
+              <a:buSzPct val="45000"/>
+              <a:buFont typeface="Wingdings" charset="2"/>
+              <a:buChar char=""/>
+            </a:pPr>
+            <a:r>
+              <a:rPr b="0" lang="en-US" sz="1800" spc="-1" strike="noStrike">
+                <a:solidFill>
+                  <a:srgbClr val="000000"/>
+                </a:solidFill>
+                <a:latin typeface="Arial"/>
+              </a:rPr>
+              <a:t>Click to edit the outline text format</a:t>
+            </a:r>
+            <a:endParaRPr b="0" lang="en-US" sz="1800" spc="-1" strike="noStrike">
+              <a:solidFill>
+                <a:srgbClr val="000000"/>
+              </a:solidFill>
+              <a:latin typeface="Arial"/>
+            </a:endParaRPr>
+          </a:p>
+          <a:p>
+            <a:pPr lvl="1" marL="864000" indent="-324000">
               <a:spcBef>
-                <a:spcPts val="479"/>
+                <a:spcPts val="1134"/>
               </a:spcBef>
               <a:buClr>
                 <a:srgbClr val="000000"/>
               </a:buClr>
-              <a:buFont typeface="Arial"/>
-              <a:buChar char="–"/>
-            </a:pPr>
-            <a:r>
-              <a:rPr b="0" lang="pl-PL" sz="2400" spc="-1" strike="noStrike">
-                <a:solidFill>
-                  <a:schemeClr val="dk1"/>
-                </a:solidFill>
-                <a:latin typeface="Calibri"/>
-              </a:rPr>
-              <a:t>Drugi poziom</a:t>
-            </a:r>
-            <a:endParaRPr b="0" lang="pl-PL" sz="2400" spc="-1" strike="noStrike">
-              <a:solidFill>
-                <a:schemeClr val="dk1"/>
-              </a:solidFill>
-              <a:latin typeface="Calibri"/>
-            </a:endParaRPr>
-          </a:p>
-          <a:p>
-            <a:pPr lvl="2" marL="1143000" indent="-228600" defTabSz="914400">
-              <a:lnSpc>
-                <a:spcPct val="100000"/>
-              </a:lnSpc>
+              <a:buSzPct val="75000"/>
+              <a:buFont typeface="Symbol" charset="2"/>
+              <a:buChar char=""/>
+            </a:pPr>
+            <a:r>
+              <a:rPr b="0" lang="en-US" sz="1800" spc="-1" strike="noStrike">
+                <a:solidFill>
+                  <a:srgbClr val="000000"/>
+                </a:solidFill>
+                <a:latin typeface="Arial"/>
+              </a:rPr>
+              <a:t>Second Outline Level</a:t>
+            </a:r>
+            <a:endParaRPr b="0" lang="en-US" sz="1800" spc="-1" strike="noStrike">
+              <a:solidFill>
+                <a:srgbClr val="000000"/>
+              </a:solidFill>
+              <a:latin typeface="Arial"/>
+            </a:endParaRPr>
+          </a:p>
+          <a:p>
+            <a:pPr lvl="2" marL="1296000" indent="-288000">
               <a:spcBef>
-                <a:spcPts val="400"/>
+                <a:spcPts val="850"/>
               </a:spcBef>
               <a:buClr>
                 <a:srgbClr val="000000"/>
               </a:buClr>
-              <a:buFont typeface="Arial"/>
-              <a:buChar char="•"/>
-            </a:pPr>
-            <a:r>
-              <a:rPr b="0" lang="pl-PL" sz="2000" spc="-1" strike="noStrike">
-                <a:solidFill>
-                  <a:schemeClr val="dk1"/>
-                </a:solidFill>
-                <a:latin typeface="Calibri"/>
-              </a:rPr>
-              <a:t>Trzeci poziom</a:t>
-            </a:r>
-            <a:endParaRPr b="0" lang="pl-PL" sz="2000" spc="-1" strike="noStrike">
-              <a:solidFill>
-                <a:schemeClr val="dk1"/>
-              </a:solidFill>
-              <a:latin typeface="Calibri"/>
-            </a:endParaRPr>
-          </a:p>
-          <a:p>
-            <a:pPr lvl="3" marL="1600200" indent="-228600" defTabSz="914400">
-              <a:lnSpc>
-                <a:spcPct val="100000"/>
-              </a:lnSpc>
+              <a:buSzPct val="45000"/>
+              <a:buFont typeface="Wingdings" charset="2"/>
+              <a:buChar char=""/>
+            </a:pPr>
+            <a:r>
+              <a:rPr b="0" lang="en-US" sz="1800" spc="-1" strike="noStrike">
+                <a:solidFill>
+                  <a:srgbClr val="000000"/>
+                </a:solidFill>
+                <a:latin typeface="Arial"/>
+              </a:rPr>
+              <a:t>Third Outline Level</a:t>
+            </a:r>
+            <a:endParaRPr b="0" lang="en-US" sz="1800" spc="-1" strike="noStrike">
+              <a:solidFill>
+                <a:srgbClr val="000000"/>
+              </a:solidFill>
+              <a:latin typeface="Arial"/>
+            </a:endParaRPr>
+          </a:p>
+          <a:p>
+            <a:pPr lvl="3" marL="1728000" indent="-216000">
               <a:spcBef>
-                <a:spcPts val="360"/>
+                <a:spcPts val="567"/>
               </a:spcBef>
               <a:buClr>
                 <a:srgbClr val="000000"/>
               </a:buClr>
-              <a:buFont typeface="Arial"/>
-              <a:buChar char="–"/>
-            </a:pPr>
-            <a:r>
-              <a:rPr b="0" lang="pl-PL" sz="1800" spc="-1" strike="noStrike">
-                <a:solidFill>
-                  <a:schemeClr val="dk1"/>
-                </a:solidFill>
-                <a:latin typeface="Calibri"/>
-              </a:rPr>
-              <a:t>Czwarty poziom</a:t>
-            </a:r>
-            <a:endParaRPr b="0" lang="pl-PL" sz="1800" spc="-1" strike="noStrike">
-              <a:solidFill>
-                <a:schemeClr val="dk1"/>
-              </a:solidFill>
-              <a:latin typeface="Calibri"/>
-            </a:endParaRPr>
-          </a:p>
-          <a:p>
-            <a:pPr lvl="4" marL="2057400" indent="-228600" defTabSz="914400">
-              <a:lnSpc>
-                <a:spcPct val="100000"/>
-              </a:lnSpc>
+              <a:buSzPct val="75000"/>
+              <a:buFont typeface="Symbol" charset="2"/>
+              <a:buChar char=""/>
+            </a:pPr>
+            <a:r>
+              <a:rPr b="0" lang="en-US" sz="1800" spc="-1" strike="noStrike">
+                <a:solidFill>
+                  <a:srgbClr val="000000"/>
+                </a:solidFill>
+                <a:latin typeface="Arial"/>
+              </a:rPr>
+              <a:t>Fourth Outline Level</a:t>
+            </a:r>
+            <a:endParaRPr b="0" lang="en-US" sz="1800" spc="-1" strike="noStrike">
+              <a:solidFill>
+                <a:srgbClr val="000000"/>
+              </a:solidFill>
+              <a:latin typeface="Arial"/>
+            </a:endParaRPr>
+          </a:p>
+          <a:p>
+            <a:pPr lvl="4" marL="2160000" indent="-216000">
               <a:spcBef>
-                <a:spcPts val="360"/>
+                <a:spcPts val="283"/>
               </a:spcBef>
               <a:buClr>
                 <a:srgbClr val="000000"/>
               </a:buClr>
-              <a:buFont typeface="Arial"/>
-              <a:buChar char="»"/>
-            </a:pPr>
-            <a:r>
-              <a:rPr b="0" lang="pl-PL" sz="1800" spc="-1" strike="noStrike">
-                <a:solidFill>
-                  <a:schemeClr val="dk1"/>
-                </a:solidFill>
-                <a:latin typeface="Calibri"/>
-              </a:rPr>
-              <a:t>Piąty poziom</a:t>
-            </a:r>
-            <a:endParaRPr b="0" lang="pl-PL" sz="1800" spc="-1" strike="noStrike">
-              <a:solidFill>
-                <a:schemeClr val="dk1"/>
-              </a:solidFill>
-              <a:latin typeface="Calibri"/>
-            </a:endParaRPr>
-          </a:p>
-        </p:txBody>
-      </p:sp>
-      <p:sp>
-        <p:nvSpPr>
-          <p:cNvPr id="31" name="PlaceHolder 3"/>
+              <a:buSzPct val="45000"/>
+              <a:buFont typeface="Wingdings" charset="2"/>
+              <a:buChar char=""/>
+            </a:pPr>
+            <a:r>
+              <a:rPr b="0" lang="en-US" sz="1800" spc="-1" strike="noStrike">
+                <a:solidFill>
+                  <a:srgbClr val="000000"/>
+                </a:solidFill>
+                <a:latin typeface="Arial"/>
+              </a:rPr>
+              <a:t>Fifth Outline Level</a:t>
+            </a:r>
+            <a:endParaRPr b="0" lang="en-US" sz="1800" spc="-1" strike="noStrike">
+              <a:solidFill>
+                <a:srgbClr val="000000"/>
+              </a:solidFill>
+              <a:latin typeface="Arial"/>
+            </a:endParaRPr>
+          </a:p>
+          <a:p>
+            <a:pPr lvl="5" marL="2592000" indent="-216000">
+              <a:spcBef>
+                <a:spcPts val="283"/>
+              </a:spcBef>
+              <a:buClr>
+                <a:srgbClr val="000000"/>
+              </a:buClr>
+              <a:buSzPct val="45000"/>
+              <a:buFont typeface="Wingdings" charset="2"/>
+              <a:buChar char=""/>
+            </a:pPr>
+            <a:r>
+              <a:rPr b="0" lang="en-US" sz="1800" spc="-1" strike="noStrike">
+                <a:solidFill>
+                  <a:srgbClr val="000000"/>
+                </a:solidFill>
+                <a:latin typeface="Arial"/>
+              </a:rPr>
+              <a:t>Sixth Outline Level</a:t>
+            </a:r>
+            <a:endParaRPr b="0" lang="en-US" sz="1800" spc="-1" strike="noStrike">
+              <a:solidFill>
+                <a:srgbClr val="000000"/>
+              </a:solidFill>
+              <a:latin typeface="Arial"/>
+            </a:endParaRPr>
+          </a:p>
+          <a:p>
+            <a:pPr lvl="6" marL="3024000" indent="-216000">
+              <a:spcBef>
+                <a:spcPts val="283"/>
+              </a:spcBef>
+              <a:buClr>
+                <a:srgbClr val="000000"/>
+              </a:buClr>
+              <a:buSzPct val="45000"/>
+              <a:buFont typeface="Wingdings" charset="2"/>
+              <a:buChar char=""/>
+            </a:pPr>
+            <a:r>
+              <a:rPr b="0" lang="en-US" sz="1800" spc="-1" strike="noStrike">
+                <a:solidFill>
+                  <a:srgbClr val="000000"/>
+                </a:solidFill>
+                <a:latin typeface="Arial"/>
+              </a:rPr>
+              <a:t>Seventh Outline Level</a:t>
+            </a:r>
+            <a:endParaRPr b="0" lang="en-US" sz="1800" spc="-1" strike="noStrike">
+              <a:solidFill>
+                <a:srgbClr val="000000"/>
+              </a:solidFill>
+              <a:latin typeface="Arial"/>
+            </a:endParaRPr>
+          </a:p>
+        </p:txBody>
+      </p:sp>
+      <p:sp>
+        <p:nvSpPr>
+          <p:cNvPr id="25" name="PlaceHolder 3"/>
           <p:cNvSpPr>
             <a:spLocks noGrp="1"/>
           </p:cNvSpPr>
@@ -4872,8 +3813,8 @@
         </p:nvSpPr>
         <p:spPr>
           <a:xfrm>
-            <a:off x="4648320" y="1600200"/>
-            <a:ext cx="4038120" cy="4525560"/>
+            <a:off x="4674240" y="1600200"/>
+            <a:ext cx="4015440" cy="4525200"/>
           </a:xfrm>
           <a:prstGeom prst="rect">
             <a:avLst/>
@@ -4884,175 +3825,221 @@
           </a:ln>
         </p:spPr>
         <p:txBody>
-          <a:bodyPr lIns="91440" rIns="91440" tIns="45720" bIns="45720" anchor="t">
-            <a:noAutofit/>
+          <a:bodyPr lIns="0" rIns="0" tIns="0" bIns="0" anchor="t">
+            <a:normAutofit/>
           </a:bodyPr>
           <a:p>
-            <a:pPr marL="343080" indent="-343080" defTabSz="914400">
-              <a:lnSpc>
-                <a:spcPct val="100000"/>
-              </a:lnSpc>
+            <a:pPr marL="432000" indent="-324000">
               <a:spcBef>
-                <a:spcPts val="561"/>
+                <a:spcPts val="1417"/>
               </a:spcBef>
               <a:buClr>
                 <a:srgbClr val="000000"/>
               </a:buClr>
-              <a:buFont typeface="Arial"/>
-              <a:buChar char="•"/>
-            </a:pPr>
-            <a:r>
-              <a:rPr b="0" lang="pl-PL" sz="2800" spc="-1" strike="noStrike">
-                <a:solidFill>
-                  <a:schemeClr val="dk1"/>
-                </a:solidFill>
-                <a:latin typeface="Calibri"/>
-              </a:rPr>
-              <a:t>Kliknij, aby edytować style wzorca tekstu</a:t>
-            </a:r>
-            <a:endParaRPr b="0" lang="pl-PL" sz="2800" spc="-1" strike="noStrike">
-              <a:solidFill>
-                <a:schemeClr val="dk1"/>
-              </a:solidFill>
-              <a:latin typeface="Calibri"/>
-            </a:endParaRPr>
-          </a:p>
-          <a:p>
-            <a:pPr lvl="1" marL="743040" indent="-285840" defTabSz="914400">
-              <a:lnSpc>
-                <a:spcPct val="100000"/>
-              </a:lnSpc>
+              <a:buSzPct val="45000"/>
+              <a:buFont typeface="Wingdings" charset="2"/>
+              <a:buChar char=""/>
+            </a:pPr>
+            <a:r>
+              <a:rPr b="0" lang="en-US" sz="1800" spc="-1" strike="noStrike">
+                <a:solidFill>
+                  <a:srgbClr val="000000"/>
+                </a:solidFill>
+                <a:latin typeface="Arial"/>
+              </a:rPr>
+              <a:t>Click to edit the outline text format</a:t>
+            </a:r>
+            <a:endParaRPr b="0" lang="en-US" sz="1800" spc="-1" strike="noStrike">
+              <a:solidFill>
+                <a:srgbClr val="000000"/>
+              </a:solidFill>
+              <a:latin typeface="Arial"/>
+            </a:endParaRPr>
+          </a:p>
+          <a:p>
+            <a:pPr lvl="1" marL="864000" indent="-324000">
               <a:spcBef>
-                <a:spcPts val="479"/>
+                <a:spcPts val="1134"/>
               </a:spcBef>
               <a:buClr>
                 <a:srgbClr val="000000"/>
               </a:buClr>
-              <a:buFont typeface="Arial"/>
-              <a:buChar char="–"/>
-            </a:pPr>
-            <a:r>
-              <a:rPr b="0" lang="pl-PL" sz="2400" spc="-1" strike="noStrike">
-                <a:solidFill>
-                  <a:schemeClr val="dk1"/>
-                </a:solidFill>
-                <a:latin typeface="Calibri"/>
-              </a:rPr>
-              <a:t>Drugi poziom</a:t>
-            </a:r>
-            <a:endParaRPr b="0" lang="pl-PL" sz="2400" spc="-1" strike="noStrike">
-              <a:solidFill>
-                <a:schemeClr val="dk1"/>
-              </a:solidFill>
-              <a:latin typeface="Calibri"/>
-            </a:endParaRPr>
-          </a:p>
-          <a:p>
-            <a:pPr lvl="2" marL="1143000" indent="-228600" defTabSz="914400">
-              <a:lnSpc>
-                <a:spcPct val="100000"/>
-              </a:lnSpc>
+              <a:buSzPct val="75000"/>
+              <a:buFont typeface="Symbol" charset="2"/>
+              <a:buChar char=""/>
+            </a:pPr>
+            <a:r>
+              <a:rPr b="0" lang="en-US" sz="1800" spc="-1" strike="noStrike">
+                <a:solidFill>
+                  <a:srgbClr val="000000"/>
+                </a:solidFill>
+                <a:latin typeface="Arial"/>
+              </a:rPr>
+              <a:t>Second Outline Level</a:t>
+            </a:r>
+            <a:endParaRPr b="0" lang="en-US" sz="1800" spc="-1" strike="noStrike">
+              <a:solidFill>
+                <a:srgbClr val="000000"/>
+              </a:solidFill>
+              <a:latin typeface="Arial"/>
+            </a:endParaRPr>
+          </a:p>
+          <a:p>
+            <a:pPr lvl="2" marL="1296000" indent="-288000">
               <a:spcBef>
-                <a:spcPts val="400"/>
+                <a:spcPts val="850"/>
               </a:spcBef>
               <a:buClr>
                 <a:srgbClr val="000000"/>
               </a:buClr>
-              <a:buFont typeface="Arial"/>
-              <a:buChar char="•"/>
-            </a:pPr>
-            <a:r>
-              <a:rPr b="0" lang="pl-PL" sz="2000" spc="-1" strike="noStrike">
-                <a:solidFill>
-                  <a:schemeClr val="dk1"/>
-                </a:solidFill>
-                <a:latin typeface="Calibri"/>
-              </a:rPr>
-              <a:t>Trzeci poziom</a:t>
-            </a:r>
-            <a:endParaRPr b="0" lang="pl-PL" sz="2000" spc="-1" strike="noStrike">
-              <a:solidFill>
-                <a:schemeClr val="dk1"/>
-              </a:solidFill>
-              <a:latin typeface="Calibri"/>
-            </a:endParaRPr>
-          </a:p>
-          <a:p>
-            <a:pPr lvl="3" marL="1600200" indent="-228600" defTabSz="914400">
-              <a:lnSpc>
-                <a:spcPct val="100000"/>
-              </a:lnSpc>
+              <a:buSzPct val="45000"/>
+              <a:buFont typeface="Wingdings" charset="2"/>
+              <a:buChar char=""/>
+            </a:pPr>
+            <a:r>
+              <a:rPr b="0" lang="en-US" sz="1800" spc="-1" strike="noStrike">
+                <a:solidFill>
+                  <a:srgbClr val="000000"/>
+                </a:solidFill>
+                <a:latin typeface="Arial"/>
+              </a:rPr>
+              <a:t>Third Outline Level</a:t>
+            </a:r>
+            <a:endParaRPr b="0" lang="en-US" sz="1800" spc="-1" strike="noStrike">
+              <a:solidFill>
+                <a:srgbClr val="000000"/>
+              </a:solidFill>
+              <a:latin typeface="Arial"/>
+            </a:endParaRPr>
+          </a:p>
+          <a:p>
+            <a:pPr lvl="3" marL="1728000" indent="-216000">
               <a:spcBef>
-                <a:spcPts val="360"/>
+                <a:spcPts val="567"/>
               </a:spcBef>
               <a:buClr>
                 <a:srgbClr val="000000"/>
               </a:buClr>
-              <a:buFont typeface="Arial"/>
-              <a:buChar char="–"/>
-            </a:pPr>
-            <a:r>
-              <a:rPr b="0" lang="pl-PL" sz="1800" spc="-1" strike="noStrike">
-                <a:solidFill>
-                  <a:schemeClr val="dk1"/>
-                </a:solidFill>
-                <a:latin typeface="Calibri"/>
-              </a:rPr>
-              <a:t>Czwarty poziom</a:t>
-            </a:r>
-            <a:endParaRPr b="0" lang="pl-PL" sz="1800" spc="-1" strike="noStrike">
-              <a:solidFill>
-                <a:schemeClr val="dk1"/>
-              </a:solidFill>
-              <a:latin typeface="Calibri"/>
-            </a:endParaRPr>
-          </a:p>
-          <a:p>
-            <a:pPr lvl="4" marL="2057400" indent="-228600" defTabSz="914400">
-              <a:lnSpc>
-                <a:spcPct val="100000"/>
-              </a:lnSpc>
+              <a:buSzPct val="75000"/>
+              <a:buFont typeface="Symbol" charset="2"/>
+              <a:buChar char=""/>
+            </a:pPr>
+            <a:r>
+              <a:rPr b="0" lang="en-US" sz="1800" spc="-1" strike="noStrike">
+                <a:solidFill>
+                  <a:srgbClr val="000000"/>
+                </a:solidFill>
+                <a:latin typeface="Arial"/>
+              </a:rPr>
+              <a:t>Fourth Outline Level</a:t>
+            </a:r>
+            <a:endParaRPr b="0" lang="en-US" sz="1800" spc="-1" strike="noStrike">
+              <a:solidFill>
+                <a:srgbClr val="000000"/>
+              </a:solidFill>
+              <a:latin typeface="Arial"/>
+            </a:endParaRPr>
+          </a:p>
+          <a:p>
+            <a:pPr lvl="4" marL="2160000" indent="-216000">
               <a:spcBef>
-                <a:spcPts val="360"/>
+                <a:spcPts val="283"/>
               </a:spcBef>
               <a:buClr>
                 <a:srgbClr val="000000"/>
               </a:buClr>
-              <a:buFont typeface="Arial"/>
-              <a:buChar char="»"/>
-            </a:pPr>
-            <a:r>
-              <a:rPr b="0" lang="pl-PL" sz="1800" spc="-1" strike="noStrike">
-                <a:solidFill>
-                  <a:schemeClr val="dk1"/>
-                </a:solidFill>
-                <a:latin typeface="Calibri"/>
-              </a:rPr>
-              <a:t>Piąty poziom</a:t>
-            </a:r>
-            <a:endParaRPr b="0" lang="pl-PL" sz="1800" spc="-1" strike="noStrike">
-              <a:solidFill>
-                <a:schemeClr val="dk1"/>
-              </a:solidFill>
-              <a:latin typeface="Calibri"/>
-            </a:endParaRPr>
-          </a:p>
-        </p:txBody>
-      </p:sp>
-      <p:sp>
-        <p:nvSpPr>
-          <p:cNvPr id="32" name="PlaceHolder 4"/>
+              <a:buSzPct val="45000"/>
+              <a:buFont typeface="Wingdings" charset="2"/>
+              <a:buChar char=""/>
+            </a:pPr>
+            <a:r>
+              <a:rPr b="0" lang="en-US" sz="1800" spc="-1" strike="noStrike">
+                <a:solidFill>
+                  <a:srgbClr val="000000"/>
+                </a:solidFill>
+                <a:latin typeface="Arial"/>
+              </a:rPr>
+              <a:t>Fifth Outline Level</a:t>
+            </a:r>
+            <a:endParaRPr b="0" lang="en-US" sz="1800" spc="-1" strike="noStrike">
+              <a:solidFill>
+                <a:srgbClr val="000000"/>
+              </a:solidFill>
+              <a:latin typeface="Arial"/>
+            </a:endParaRPr>
+          </a:p>
+          <a:p>
+            <a:pPr lvl="5" marL="2592000" indent="-216000">
+              <a:spcBef>
+                <a:spcPts val="283"/>
+              </a:spcBef>
+              <a:buClr>
+                <a:srgbClr val="000000"/>
+              </a:buClr>
+              <a:buSzPct val="45000"/>
+              <a:buFont typeface="Wingdings" charset="2"/>
+              <a:buChar char=""/>
+            </a:pPr>
+            <a:r>
+              <a:rPr b="0" lang="en-US" sz="1800" spc="-1" strike="noStrike">
+                <a:solidFill>
+                  <a:srgbClr val="000000"/>
+                </a:solidFill>
+                <a:latin typeface="Arial"/>
+              </a:rPr>
+              <a:t>Sixth Outline Level</a:t>
+            </a:r>
+            <a:endParaRPr b="0" lang="en-US" sz="1800" spc="-1" strike="noStrike">
+              <a:solidFill>
+                <a:srgbClr val="000000"/>
+              </a:solidFill>
+              <a:latin typeface="Arial"/>
+            </a:endParaRPr>
+          </a:p>
+          <a:p>
+            <a:pPr lvl="6" marL="3024000" indent="-216000">
+              <a:spcBef>
+                <a:spcPts val="283"/>
+              </a:spcBef>
+              <a:buClr>
+                <a:srgbClr val="000000"/>
+              </a:buClr>
+              <a:buSzPct val="45000"/>
+              <a:buFont typeface="Wingdings" charset="2"/>
+              <a:buChar char=""/>
+            </a:pPr>
+            <a:r>
+              <a:rPr b="0" lang="en-US" sz="1800" spc="-1" strike="noStrike">
+                <a:solidFill>
+                  <a:srgbClr val="000000"/>
+                </a:solidFill>
+                <a:latin typeface="Arial"/>
+              </a:rPr>
+              <a:t>Seventh Outline Level</a:t>
+            </a:r>
+            <a:endParaRPr b="0" lang="en-US" sz="1800" spc="-1" strike="noStrike">
+              <a:solidFill>
+                <a:srgbClr val="000000"/>
+              </a:solidFill>
+              <a:latin typeface="Arial"/>
+            </a:endParaRPr>
+          </a:p>
+        </p:txBody>
+      </p:sp>
+      <p:sp>
+        <p:nvSpPr>
+          <p:cNvPr id="26" name="PlaceHolder 4"/>
           <p:cNvSpPr>
             <a:spLocks noGrp="1"/>
           </p:cNvSpPr>
           <p:nvPr>
-            <p:ph type="dt" idx="16"/>
+            <p:ph type="ftr" idx="16"/>
           </p:nvPr>
         </p:nvSpPr>
         <p:spPr>
           <a:xfrm>
-            <a:off x="457200" y="6356520"/>
-            <a:ext cx="2133360" cy="364680"/>
+            <a:off x="3124080" y="6356520"/>
+            <a:ext cx="2894760" cy="364320"/>
           </a:xfrm>
           <a:prstGeom prst="rect">
             <a:avLst/>
@@ -5067,40 +4054,42 @@
             <a:noAutofit/>
           </a:bodyPr>
           <a:lstStyle>
-            <a:lvl1pPr indent="0" defTabSz="914400">
+            <a:lvl1pPr indent="0" algn="ctr">
               <a:lnSpc>
                 <a:spcPct val="100000"/>
               </a:lnSpc>
               <a:buNone/>
-              <a:defRPr b="0" lang="pl-PL" sz="1200" spc="-1" strike="noStrike">
-                <a:solidFill>
-                  <a:schemeClr val="dk1">
-                    <a:tint val="75000"/>
-                  </a:schemeClr>
-                </a:solidFill>
-                <a:latin typeface="Calibri"/>
+              <a:tabLst>
+                <a:tab algn="l" pos="0"/>
+              </a:tabLst>
+              <a:defRPr b="0" lang="en-US" sz="1400" spc="-1" strike="noStrike">
+                <a:solidFill>
+                  <a:srgbClr val="000000"/>
+                </a:solidFill>
+                <a:latin typeface="Times New Roman"/>
               </a:defRPr>
             </a:lvl1pPr>
           </a:lstStyle>
           <a:p>
-            <a:pPr indent="0" defTabSz="914400">
+            <a:pPr indent="0" algn="ctr">
               <a:lnSpc>
                 <a:spcPct val="100000"/>
               </a:lnSpc>
               <a:buNone/>
-            </a:pPr>
-            <a:r>
-              <a:rPr b="0" lang="pl-PL" sz="1200" spc="-1" strike="noStrike">
-                <a:solidFill>
-                  <a:schemeClr val="dk1">
-                    <a:tint val="75000"/>
-                  </a:schemeClr>
-                </a:solidFill>
-                <a:latin typeface="Calibri"/>
-              </a:rPr>
-              <a:t>&lt;date/time&gt;</a:t>
-            </a:r>
-            <a:endParaRPr b="0" lang="en-US" sz="1200" spc="-1" strike="noStrike">
+              <a:tabLst>
+                <a:tab algn="l" pos="0"/>
+              </a:tabLst>
+            </a:pPr>
+            <a:r>
+              <a:rPr b="0" lang="en-US" sz="1400" spc="-1" strike="noStrike">
+                <a:solidFill>
+                  <a:srgbClr val="000000"/>
+                </a:solidFill>
+                <a:latin typeface="Times New Roman"/>
+              </a:rPr>
+              <a:t>&lt;footer&gt;</a:t>
+            </a:r>
+            <a:endParaRPr b="0" lang="en-US" sz="1400" spc="-1" strike="noStrike">
               <a:solidFill>
                 <a:srgbClr val="000000"/>
               </a:solidFill>
@@ -5111,18 +4100,18 @@
       </p:sp>
       <p:sp>
         <p:nvSpPr>
-          <p:cNvPr id="33" name="PlaceHolder 5"/>
+          <p:cNvPr id="27" name="PlaceHolder 5"/>
           <p:cNvSpPr>
             <a:spLocks noGrp="1"/>
           </p:cNvSpPr>
           <p:nvPr>
-            <p:ph type="ftr" idx="17"/>
+            <p:ph type="sldNum" idx="17"/>
           </p:nvPr>
         </p:nvSpPr>
         <p:spPr>
           <a:xfrm>
-            <a:off x="3124080" y="6356520"/>
-            <a:ext cx="2895120" cy="364680"/>
+            <a:off x="6553080" y="6356520"/>
+            <a:ext cx="2133000" cy="364320"/>
           </a:xfrm>
           <a:prstGeom prst="rect">
             <a:avLst/>
@@ -5137,30 +4126,46 @@
             <a:noAutofit/>
           </a:bodyPr>
           <a:lstStyle>
-            <a:lvl1pPr indent="0" algn="ctr">
+            <a:lvl1pPr indent="0" algn="r" defTabSz="914400">
+              <a:lnSpc>
+                <a:spcPct val="100000"/>
+              </a:lnSpc>
               <a:buNone/>
-              <a:defRPr b="0" lang="en-US" sz="1400" spc="-1" strike="noStrike">
-                <a:solidFill>
-                  <a:srgbClr val="000000"/>
-                </a:solidFill>
-                <a:latin typeface="Times New Roman"/>
+              <a:tabLst>
+                <a:tab algn="l" pos="0"/>
+              </a:tabLst>
+              <a:defRPr b="0" lang="pl-PL" sz="1200" spc="-1" strike="noStrike">
+                <a:solidFill>
+                  <a:schemeClr val="dk1">
+                    <a:tint val="75000"/>
+                  </a:schemeClr>
+                </a:solidFill>
+                <a:latin typeface="Calibri"/>
               </a:defRPr>
             </a:lvl1pPr>
           </a:lstStyle>
           <a:p>
-            <a:pPr indent="0" algn="ctr">
+            <a:pPr indent="0" algn="r" defTabSz="914400">
+              <a:lnSpc>
+                <a:spcPct val="100000"/>
+              </a:lnSpc>
               <a:buNone/>
-            </a:pPr>
-            <a:r>
-              <a:rPr b="0" lang="en-US" sz="1400" spc="-1" strike="noStrike">
-                <a:solidFill>
-                  <a:srgbClr val="000000"/>
-                </a:solidFill>
-                <a:latin typeface="Times New Roman"/>
-              </a:rPr>
-              <a:t>&lt;footer&gt;</a:t>
-            </a:r>
-            <a:endParaRPr b="0" lang="en-US" sz="1400" spc="-1" strike="noStrike">
+              <a:tabLst>
+                <a:tab algn="l" pos="0"/>
+              </a:tabLst>
+            </a:pPr>
+            <a:fld id="{3B67EA82-C80F-457A-823C-81D4C32DA931}" type="slidenum">
+              <a:rPr b="0" lang="pl-PL" sz="1200" spc="-1" strike="noStrike">
+                <a:solidFill>
+                  <a:schemeClr val="dk1">
+                    <a:tint val="75000"/>
+                  </a:schemeClr>
+                </a:solidFill>
+                <a:latin typeface="Calibri"/>
+              </a:rPr>
+              <a:t>&lt;number&gt;</a:t>
+            </a:fld>
+            <a:endParaRPr b="0" lang="en-US" sz="1200" spc="-1" strike="noStrike">
               <a:solidFill>
                 <a:srgbClr val="000000"/>
               </a:solidFill>
@@ -5171,18 +4176,18 @@
       </p:sp>
       <p:sp>
         <p:nvSpPr>
-          <p:cNvPr id="34" name="PlaceHolder 6"/>
+          <p:cNvPr id="28" name="PlaceHolder 6"/>
           <p:cNvSpPr>
             <a:spLocks noGrp="1"/>
           </p:cNvSpPr>
           <p:nvPr>
-            <p:ph type="sldNum" idx="18"/>
+            <p:ph type="dt" idx="18"/>
           </p:nvPr>
         </p:nvSpPr>
         <p:spPr>
           <a:xfrm>
-            <a:off x="6553080" y="6356520"/>
-            <a:ext cx="2133360" cy="364680"/>
+            <a:off x="457200" y="6356520"/>
+            <a:ext cx="2133000" cy="364320"/>
           </a:xfrm>
           <a:prstGeom prst="rect">
             <a:avLst/>
@@ -5197,40 +4202,30 @@
             <a:noAutofit/>
           </a:bodyPr>
           <a:lstStyle>
-            <a:lvl1pPr indent="0" algn="r" defTabSz="914400">
-              <a:lnSpc>
-                <a:spcPct val="100000"/>
-              </a:lnSpc>
+            <a:lvl1pPr indent="0">
               <a:buNone/>
-              <a:defRPr b="0" lang="pl-PL" sz="1200" spc="-1" strike="noStrike">
-                <a:solidFill>
-                  <a:schemeClr val="dk1">
-                    <a:tint val="75000"/>
-                  </a:schemeClr>
-                </a:solidFill>
-                <a:latin typeface="Calibri"/>
+              <a:defRPr b="0" lang="en-US" sz="1400" spc="-1" strike="noStrike">
+                <a:solidFill>
+                  <a:srgbClr val="000000"/>
+                </a:solidFill>
+                <a:latin typeface="Times New Roman"/>
               </a:defRPr>
             </a:lvl1pPr>
           </a:lstStyle>
           <a:p>
-            <a:pPr indent="0" algn="r" defTabSz="914400">
-              <a:lnSpc>
-                <a:spcPct val="100000"/>
-              </a:lnSpc>
+            <a:pPr indent="0">
               <a:buNone/>
             </a:pPr>
-            <a:fld id="{CE37B576-630B-423C-AB4B-18D5400C7772}" type="slidenum">
-              <a:rPr b="0" lang="pl-PL" sz="1200" spc="-1" strike="noStrike">
-                <a:solidFill>
-                  <a:schemeClr val="dk1">
-                    <a:tint val="75000"/>
-                  </a:schemeClr>
-                </a:solidFill>
-                <a:latin typeface="Calibri"/>
-              </a:rPr>
-              <a:t>&lt;number&gt;</a:t>
-            </a:fld>
-            <a:endParaRPr b="0" lang="en-US" sz="1200" spc="-1" strike="noStrike">
+            <a:r>
+              <a:rPr b="0" lang="en-US" sz="1400" spc="-1" strike="noStrike">
+                <a:solidFill>
+                  <a:srgbClr val="000000"/>
+                </a:solidFill>
+                <a:latin typeface="Times New Roman"/>
+              </a:rPr>
+              <a:t>&lt;date/time&gt;</a:t>
+            </a:r>
+            <a:endParaRPr b="0" lang="en-US" sz="1400" spc="-1" strike="noStrike">
               <a:solidFill>
                 <a:srgbClr val="000000"/>
               </a:solidFill>
@@ -5274,18 +4269,18 @@
       </p:grpSpPr>
       <p:sp>
         <p:nvSpPr>
-          <p:cNvPr id="38" name="PlaceHolder 1"/>
+          <p:cNvPr id="32" name="PlaceHolder 1"/>
           <p:cNvSpPr>
             <a:spLocks noGrp="1"/>
           </p:cNvSpPr>
           <p:nvPr>
-            <p:ph type="title"/>
+            <p:ph type="ftr" idx="19"/>
           </p:nvPr>
         </p:nvSpPr>
         <p:spPr>
           <a:xfrm>
-            <a:off x="457200" y="274680"/>
-            <a:ext cx="8229240" cy="1142640"/>
+            <a:off x="3124080" y="6356520"/>
+            <a:ext cx="2894760" cy="364320"/>
           </a:xfrm>
           <a:prstGeom prst="rect">
             <a:avLst/>
@@ -5299,45 +4294,65 @@
           <a:bodyPr lIns="91440" rIns="91440" tIns="45720" bIns="45720" anchor="ctr">
             <a:noAutofit/>
           </a:bodyPr>
-          <a:p>
-            <a:pPr indent="0" algn="ctr" defTabSz="914400">
+          <a:lstStyle>
+            <a:lvl1pPr indent="0" algn="ctr">
               <a:lnSpc>
                 <a:spcPct val="100000"/>
               </a:lnSpc>
               <a:buNone/>
-            </a:pPr>
-            <a:r>
-              <a:rPr b="0" lang="pl-PL" sz="4400" spc="-1" strike="noStrike">
-                <a:solidFill>
-                  <a:schemeClr val="dk1"/>
-                </a:solidFill>
-                <a:latin typeface="Calibri"/>
-              </a:rPr>
-              <a:t>Kliknij, aby edytować styl</a:t>
-            </a:r>
-            <a:endParaRPr b="0" lang="pl-PL" sz="4400" spc="-1" strike="noStrike">
-              <a:solidFill>
-                <a:schemeClr val="dk1"/>
-              </a:solidFill>
-              <a:latin typeface="Calibri"/>
-            </a:endParaRPr>
-          </a:p>
-        </p:txBody>
-      </p:sp>
-      <p:sp>
-        <p:nvSpPr>
-          <p:cNvPr id="39" name="PlaceHolder 2"/>
+              <a:tabLst>
+                <a:tab algn="l" pos="0"/>
+              </a:tabLst>
+              <a:defRPr b="0" lang="en-US" sz="1400" spc="-1" strike="noStrike">
+                <a:solidFill>
+                  <a:srgbClr val="000000"/>
+                </a:solidFill>
+                <a:latin typeface="Times New Roman"/>
+              </a:defRPr>
+            </a:lvl1pPr>
+          </a:lstStyle>
+          <a:p>
+            <a:pPr indent="0" algn="ctr">
+              <a:lnSpc>
+                <a:spcPct val="100000"/>
+              </a:lnSpc>
+              <a:buNone/>
+              <a:tabLst>
+                <a:tab algn="l" pos="0"/>
+              </a:tabLst>
+            </a:pPr>
+            <a:r>
+              <a:rPr b="0" lang="en-US" sz="1400" spc="-1" strike="noStrike">
+                <a:solidFill>
+                  <a:srgbClr val="000000"/>
+                </a:solidFill>
+                <a:latin typeface="Times New Roman"/>
+              </a:rPr>
+              <a:t>&lt;footer&gt;</a:t>
+            </a:r>
+            <a:endParaRPr b="0" lang="en-US" sz="1400" spc="-1" strike="noStrike">
+              <a:solidFill>
+                <a:srgbClr val="000000"/>
+              </a:solidFill>
+              <a:latin typeface="Times New Roman"/>
+            </a:endParaRPr>
+          </a:p>
+        </p:txBody>
+      </p:sp>
+      <p:sp>
+        <p:nvSpPr>
+          <p:cNvPr id="33" name="PlaceHolder 2"/>
           <p:cNvSpPr>
             <a:spLocks noGrp="1"/>
           </p:cNvSpPr>
           <p:nvPr>
-            <p:ph type="body"/>
+            <p:ph type="sldNum" idx="20"/>
           </p:nvPr>
         </p:nvSpPr>
         <p:spPr>
           <a:xfrm>
-            <a:off x="457200" y="1535040"/>
-            <a:ext cx="4039920" cy="639360"/>
+            <a:off x="6553080" y="6356520"/>
+            <a:ext cx="2133000" cy="364320"/>
           </a:xfrm>
           <a:prstGeom prst="rect">
             <a:avLst/>
@@ -5348,54 +4363,72 @@
           </a:ln>
         </p:spPr>
         <p:txBody>
-          <a:bodyPr lIns="91440" rIns="91440" tIns="45720" bIns="45720" anchor="b">
+          <a:bodyPr lIns="91440" rIns="91440" tIns="45720" bIns="45720" anchor="ctr">
             <a:noAutofit/>
           </a:bodyPr>
-          <a:p>
-            <a:pPr indent="0" defTabSz="914400">
-              <a:lnSpc>
-                <a:spcPct val="100000"/>
-              </a:lnSpc>
-              <a:spcBef>
-                <a:spcPts val="479"/>
-              </a:spcBef>
+          <a:lstStyle>
+            <a:lvl1pPr indent="0" algn="r" defTabSz="914400">
+              <a:lnSpc>
+                <a:spcPct val="100000"/>
+              </a:lnSpc>
               <a:buNone/>
               <a:tabLst>
                 <a:tab algn="l" pos="0"/>
               </a:tabLst>
-            </a:pPr>
-            <a:r>
-              <a:rPr b="1" lang="pl-PL" sz="2400" spc="-1" strike="noStrike">
-                <a:solidFill>
-                  <a:schemeClr val="dk1"/>
+              <a:defRPr b="0" lang="pl-PL" sz="1200" spc="-1" strike="noStrike">
+                <a:solidFill>
+                  <a:schemeClr val="dk1">
+                    <a:tint val="75000"/>
+                  </a:schemeClr>
                 </a:solidFill>
                 <a:latin typeface="Calibri"/>
-              </a:rPr>
-              <a:t>Kliknij, aby edytować style wzorca tekstu</a:t>
-            </a:r>
-            <a:endParaRPr b="0" lang="pl-PL" sz="2400" spc="-1" strike="noStrike">
-              <a:solidFill>
-                <a:schemeClr val="dk1"/>
-              </a:solidFill>
-              <a:latin typeface="Calibri"/>
-            </a:endParaRPr>
-          </a:p>
-        </p:txBody>
-      </p:sp>
-      <p:sp>
-        <p:nvSpPr>
-          <p:cNvPr id="40" name="PlaceHolder 3"/>
+              </a:defRPr>
+            </a:lvl1pPr>
+          </a:lstStyle>
+          <a:p>
+            <a:pPr indent="0" algn="r" defTabSz="914400">
+              <a:lnSpc>
+                <a:spcPct val="100000"/>
+              </a:lnSpc>
+              <a:buNone/>
+              <a:tabLst>
+                <a:tab algn="l" pos="0"/>
+              </a:tabLst>
+            </a:pPr>
+            <a:fld id="{FF3CD25E-23F1-41E2-9929-360739F6D992}" type="slidenum">
+              <a:rPr b="0" lang="pl-PL" sz="1200" spc="-1" strike="noStrike">
+                <a:solidFill>
+                  <a:schemeClr val="dk1">
+                    <a:tint val="75000"/>
+                  </a:schemeClr>
+                </a:solidFill>
+                <a:latin typeface="Calibri"/>
+              </a:rPr>
+              <a:t>&lt;number&gt;</a:t>
+            </a:fld>
+            <a:endParaRPr b="0" lang="en-US" sz="1200" spc="-1" strike="noStrike">
+              <a:solidFill>
+                <a:srgbClr val="000000"/>
+              </a:solidFill>
+              <a:latin typeface="Times New Roman"/>
+            </a:endParaRPr>
+          </a:p>
+        </p:txBody>
+      </p:sp>
+      <p:sp>
+        <p:nvSpPr>
+          <p:cNvPr id="34" name="PlaceHolder 3"/>
           <p:cNvSpPr>
             <a:spLocks noGrp="1"/>
           </p:cNvSpPr>
           <p:nvPr>
-            <p:ph type="body"/>
+            <p:ph type="dt" idx="21"/>
           </p:nvPr>
         </p:nvSpPr>
         <p:spPr>
           <a:xfrm>
-            <a:off x="457200" y="2174760"/>
-            <a:ext cx="4039920" cy="3951000"/>
+            <a:off x="457200" y="6356520"/>
+            <a:ext cx="2133000" cy="364320"/>
           </a:xfrm>
           <a:prstGeom prst="rect">
             <a:avLst/>
@@ -5406,497 +4439,11 @@
           </a:ln>
         </p:spPr>
         <p:txBody>
-          <a:bodyPr lIns="91440" rIns="91440" tIns="45720" bIns="45720" anchor="t">
-            <a:noAutofit/>
-          </a:bodyPr>
-          <a:p>
-            <a:pPr marL="343080" indent="-343080" defTabSz="914400">
-              <a:lnSpc>
-                <a:spcPct val="100000"/>
-              </a:lnSpc>
-              <a:spcBef>
-                <a:spcPts val="479"/>
-              </a:spcBef>
-              <a:buClr>
-                <a:srgbClr val="000000"/>
-              </a:buClr>
-              <a:buFont typeface="Arial"/>
-              <a:buChar char="•"/>
-            </a:pPr>
-            <a:r>
-              <a:rPr b="0" lang="pl-PL" sz="2400" spc="-1" strike="noStrike">
-                <a:solidFill>
-                  <a:schemeClr val="dk1"/>
-                </a:solidFill>
-                <a:latin typeface="Calibri"/>
-              </a:rPr>
-              <a:t>Kliknij, aby edytować style wzorca tekstu</a:t>
-            </a:r>
-            <a:endParaRPr b="0" lang="pl-PL" sz="2400" spc="-1" strike="noStrike">
-              <a:solidFill>
-                <a:schemeClr val="dk1"/>
-              </a:solidFill>
-              <a:latin typeface="Calibri"/>
-            </a:endParaRPr>
-          </a:p>
-          <a:p>
-            <a:pPr lvl="1" marL="743040" indent="-285840" defTabSz="914400">
-              <a:lnSpc>
-                <a:spcPct val="100000"/>
-              </a:lnSpc>
-              <a:spcBef>
-                <a:spcPts val="400"/>
-              </a:spcBef>
-              <a:buClr>
-                <a:srgbClr val="000000"/>
-              </a:buClr>
-              <a:buFont typeface="Arial"/>
-              <a:buChar char="–"/>
-            </a:pPr>
-            <a:r>
-              <a:rPr b="0" lang="pl-PL" sz="2000" spc="-1" strike="noStrike">
-                <a:solidFill>
-                  <a:schemeClr val="dk1"/>
-                </a:solidFill>
-                <a:latin typeface="Calibri"/>
-              </a:rPr>
-              <a:t>Drugi poziom</a:t>
-            </a:r>
-            <a:endParaRPr b="0" lang="pl-PL" sz="2000" spc="-1" strike="noStrike">
-              <a:solidFill>
-                <a:schemeClr val="dk1"/>
-              </a:solidFill>
-              <a:latin typeface="Calibri"/>
-            </a:endParaRPr>
-          </a:p>
-          <a:p>
-            <a:pPr lvl="2" marL="1143000" indent="-228600" defTabSz="914400">
-              <a:lnSpc>
-                <a:spcPct val="100000"/>
-              </a:lnSpc>
-              <a:spcBef>
-                <a:spcPts val="360"/>
-              </a:spcBef>
-              <a:buClr>
-                <a:srgbClr val="000000"/>
-              </a:buClr>
-              <a:buFont typeface="Arial"/>
-              <a:buChar char="•"/>
-            </a:pPr>
-            <a:r>
-              <a:rPr b="0" lang="pl-PL" sz="1800" spc="-1" strike="noStrike">
-                <a:solidFill>
-                  <a:schemeClr val="dk1"/>
-                </a:solidFill>
-                <a:latin typeface="Calibri"/>
-              </a:rPr>
-              <a:t>Trzeci poziom</a:t>
-            </a:r>
-            <a:endParaRPr b="0" lang="pl-PL" sz="1800" spc="-1" strike="noStrike">
-              <a:solidFill>
-                <a:schemeClr val="dk1"/>
-              </a:solidFill>
-              <a:latin typeface="Calibri"/>
-            </a:endParaRPr>
-          </a:p>
-          <a:p>
-            <a:pPr lvl="3" marL="1600200" indent="-228600" defTabSz="914400">
-              <a:lnSpc>
-                <a:spcPct val="100000"/>
-              </a:lnSpc>
-              <a:spcBef>
-                <a:spcPts val="320"/>
-              </a:spcBef>
-              <a:buClr>
-                <a:srgbClr val="000000"/>
-              </a:buClr>
-              <a:buFont typeface="Arial"/>
-              <a:buChar char="–"/>
-            </a:pPr>
-            <a:r>
-              <a:rPr b="0" lang="pl-PL" sz="1600" spc="-1" strike="noStrike">
-                <a:solidFill>
-                  <a:schemeClr val="dk1"/>
-                </a:solidFill>
-                <a:latin typeface="Calibri"/>
-              </a:rPr>
-              <a:t>Czwarty poziom</a:t>
-            </a:r>
-            <a:endParaRPr b="0" lang="pl-PL" sz="1600" spc="-1" strike="noStrike">
-              <a:solidFill>
-                <a:schemeClr val="dk1"/>
-              </a:solidFill>
-              <a:latin typeface="Calibri"/>
-            </a:endParaRPr>
-          </a:p>
-          <a:p>
-            <a:pPr lvl="4" marL="2057400" indent="-228600" defTabSz="914400">
-              <a:lnSpc>
-                <a:spcPct val="100000"/>
-              </a:lnSpc>
-              <a:spcBef>
-                <a:spcPts val="320"/>
-              </a:spcBef>
-              <a:buClr>
-                <a:srgbClr val="000000"/>
-              </a:buClr>
-              <a:buFont typeface="Arial"/>
-              <a:buChar char="»"/>
-            </a:pPr>
-            <a:r>
-              <a:rPr b="0" lang="pl-PL" sz="1600" spc="-1" strike="noStrike">
-                <a:solidFill>
-                  <a:schemeClr val="dk1"/>
-                </a:solidFill>
-                <a:latin typeface="Calibri"/>
-              </a:rPr>
-              <a:t>Piąty poziom</a:t>
-            </a:r>
-            <a:endParaRPr b="0" lang="pl-PL" sz="1600" spc="-1" strike="noStrike">
-              <a:solidFill>
-                <a:schemeClr val="dk1"/>
-              </a:solidFill>
-              <a:latin typeface="Calibri"/>
-            </a:endParaRPr>
-          </a:p>
-        </p:txBody>
-      </p:sp>
-      <p:sp>
-        <p:nvSpPr>
-          <p:cNvPr id="41" name="PlaceHolder 4"/>
-          <p:cNvSpPr>
-            <a:spLocks noGrp="1"/>
-          </p:cNvSpPr>
-          <p:nvPr>
-            <p:ph type="body"/>
-          </p:nvPr>
-        </p:nvSpPr>
-        <p:spPr>
-          <a:xfrm>
-            <a:off x="4645080" y="1535040"/>
-            <a:ext cx="4041360" cy="639360"/>
-          </a:xfrm>
-          <a:prstGeom prst="rect">
-            <a:avLst/>
-          </a:prstGeom>
-          <a:noFill/>
-          <a:ln w="0">
-            <a:noFill/>
-          </a:ln>
-        </p:spPr>
-        <p:txBody>
-          <a:bodyPr lIns="91440" rIns="91440" tIns="45720" bIns="45720" anchor="b">
-            <a:noAutofit/>
-          </a:bodyPr>
-          <a:p>
-            <a:pPr indent="0" defTabSz="914400">
-              <a:lnSpc>
-                <a:spcPct val="100000"/>
-              </a:lnSpc>
-              <a:spcBef>
-                <a:spcPts val="479"/>
-              </a:spcBef>
-              <a:buNone/>
-              <a:tabLst>
-                <a:tab algn="l" pos="0"/>
-              </a:tabLst>
-            </a:pPr>
-            <a:r>
-              <a:rPr b="1" lang="pl-PL" sz="2400" spc="-1" strike="noStrike">
-                <a:solidFill>
-                  <a:schemeClr val="dk1"/>
-                </a:solidFill>
-                <a:latin typeface="Calibri"/>
-              </a:rPr>
-              <a:t>Kliknij, aby edytować style wzorca tekstu</a:t>
-            </a:r>
-            <a:endParaRPr b="0" lang="pl-PL" sz="2400" spc="-1" strike="noStrike">
-              <a:solidFill>
-                <a:schemeClr val="dk1"/>
-              </a:solidFill>
-              <a:latin typeface="Calibri"/>
-            </a:endParaRPr>
-          </a:p>
-        </p:txBody>
-      </p:sp>
-      <p:sp>
-        <p:nvSpPr>
-          <p:cNvPr id="42" name="PlaceHolder 5"/>
-          <p:cNvSpPr>
-            <a:spLocks noGrp="1"/>
-          </p:cNvSpPr>
-          <p:nvPr>
-            <p:ph type="body"/>
-          </p:nvPr>
-        </p:nvSpPr>
-        <p:spPr>
-          <a:xfrm>
-            <a:off x="4645080" y="2174760"/>
-            <a:ext cx="4041360" cy="3951000"/>
-          </a:xfrm>
-          <a:prstGeom prst="rect">
-            <a:avLst/>
-          </a:prstGeom>
-          <a:noFill/>
-          <a:ln w="0">
-            <a:noFill/>
-          </a:ln>
-        </p:spPr>
-        <p:txBody>
-          <a:bodyPr lIns="91440" rIns="91440" tIns="45720" bIns="45720" anchor="t">
-            <a:noAutofit/>
-          </a:bodyPr>
-          <a:p>
-            <a:pPr marL="343080" indent="-343080" defTabSz="914400">
-              <a:lnSpc>
-                <a:spcPct val="100000"/>
-              </a:lnSpc>
-              <a:spcBef>
-                <a:spcPts val="479"/>
-              </a:spcBef>
-              <a:buClr>
-                <a:srgbClr val="000000"/>
-              </a:buClr>
-              <a:buFont typeface="Arial"/>
-              <a:buChar char="•"/>
-            </a:pPr>
-            <a:r>
-              <a:rPr b="0" lang="pl-PL" sz="2400" spc="-1" strike="noStrike">
-                <a:solidFill>
-                  <a:schemeClr val="dk1"/>
-                </a:solidFill>
-                <a:latin typeface="Calibri"/>
-              </a:rPr>
-              <a:t>Kliknij, aby edytować style wzorca tekstu</a:t>
-            </a:r>
-            <a:endParaRPr b="0" lang="pl-PL" sz="2400" spc="-1" strike="noStrike">
-              <a:solidFill>
-                <a:schemeClr val="dk1"/>
-              </a:solidFill>
-              <a:latin typeface="Calibri"/>
-            </a:endParaRPr>
-          </a:p>
-          <a:p>
-            <a:pPr lvl="1" marL="743040" indent="-285840" defTabSz="914400">
-              <a:lnSpc>
-                <a:spcPct val="100000"/>
-              </a:lnSpc>
-              <a:spcBef>
-                <a:spcPts val="400"/>
-              </a:spcBef>
-              <a:buClr>
-                <a:srgbClr val="000000"/>
-              </a:buClr>
-              <a:buFont typeface="Arial"/>
-              <a:buChar char="–"/>
-            </a:pPr>
-            <a:r>
-              <a:rPr b="0" lang="pl-PL" sz="2000" spc="-1" strike="noStrike">
-                <a:solidFill>
-                  <a:schemeClr val="dk1"/>
-                </a:solidFill>
-                <a:latin typeface="Calibri"/>
-              </a:rPr>
-              <a:t>Drugi poziom</a:t>
-            </a:r>
-            <a:endParaRPr b="0" lang="pl-PL" sz="2000" spc="-1" strike="noStrike">
-              <a:solidFill>
-                <a:schemeClr val="dk1"/>
-              </a:solidFill>
-              <a:latin typeface="Calibri"/>
-            </a:endParaRPr>
-          </a:p>
-          <a:p>
-            <a:pPr lvl="2" marL="1143000" indent="-228600" defTabSz="914400">
-              <a:lnSpc>
-                <a:spcPct val="100000"/>
-              </a:lnSpc>
-              <a:spcBef>
-                <a:spcPts val="360"/>
-              </a:spcBef>
-              <a:buClr>
-                <a:srgbClr val="000000"/>
-              </a:buClr>
-              <a:buFont typeface="Arial"/>
-              <a:buChar char="•"/>
-            </a:pPr>
-            <a:r>
-              <a:rPr b="0" lang="pl-PL" sz="1800" spc="-1" strike="noStrike">
-                <a:solidFill>
-                  <a:schemeClr val="dk1"/>
-                </a:solidFill>
-                <a:latin typeface="Calibri"/>
-              </a:rPr>
-              <a:t>Trzeci poziom</a:t>
-            </a:r>
-            <a:endParaRPr b="0" lang="pl-PL" sz="1800" spc="-1" strike="noStrike">
-              <a:solidFill>
-                <a:schemeClr val="dk1"/>
-              </a:solidFill>
-              <a:latin typeface="Calibri"/>
-            </a:endParaRPr>
-          </a:p>
-          <a:p>
-            <a:pPr lvl="3" marL="1600200" indent="-228600" defTabSz="914400">
-              <a:lnSpc>
-                <a:spcPct val="100000"/>
-              </a:lnSpc>
-              <a:spcBef>
-                <a:spcPts val="320"/>
-              </a:spcBef>
-              <a:buClr>
-                <a:srgbClr val="000000"/>
-              </a:buClr>
-              <a:buFont typeface="Arial"/>
-              <a:buChar char="–"/>
-            </a:pPr>
-            <a:r>
-              <a:rPr b="0" lang="pl-PL" sz="1600" spc="-1" strike="noStrike">
-                <a:solidFill>
-                  <a:schemeClr val="dk1"/>
-                </a:solidFill>
-                <a:latin typeface="Calibri"/>
-              </a:rPr>
-              <a:t>Czwarty poziom</a:t>
-            </a:r>
-            <a:endParaRPr b="0" lang="pl-PL" sz="1600" spc="-1" strike="noStrike">
-              <a:solidFill>
-                <a:schemeClr val="dk1"/>
-              </a:solidFill>
-              <a:latin typeface="Calibri"/>
-            </a:endParaRPr>
-          </a:p>
-          <a:p>
-            <a:pPr lvl="4" marL="2057400" indent="-228600" defTabSz="914400">
-              <a:lnSpc>
-                <a:spcPct val="100000"/>
-              </a:lnSpc>
-              <a:spcBef>
-                <a:spcPts val="320"/>
-              </a:spcBef>
-              <a:buClr>
-                <a:srgbClr val="000000"/>
-              </a:buClr>
-              <a:buFont typeface="Arial"/>
-              <a:buChar char="»"/>
-            </a:pPr>
-            <a:r>
-              <a:rPr b="0" lang="pl-PL" sz="1600" spc="-1" strike="noStrike">
-                <a:solidFill>
-                  <a:schemeClr val="dk1"/>
-                </a:solidFill>
-                <a:latin typeface="Calibri"/>
-              </a:rPr>
-              <a:t>Piąty poziom</a:t>
-            </a:r>
-            <a:endParaRPr b="0" lang="pl-PL" sz="1600" spc="-1" strike="noStrike">
-              <a:solidFill>
-                <a:schemeClr val="dk1"/>
-              </a:solidFill>
-              <a:latin typeface="Calibri"/>
-            </a:endParaRPr>
-          </a:p>
-        </p:txBody>
-      </p:sp>
-      <p:sp>
-        <p:nvSpPr>
-          <p:cNvPr id="43" name="PlaceHolder 6"/>
-          <p:cNvSpPr>
-            <a:spLocks noGrp="1"/>
-          </p:cNvSpPr>
-          <p:nvPr>
-            <p:ph type="dt" idx="19"/>
-          </p:nvPr>
-        </p:nvSpPr>
-        <p:spPr>
-          <a:xfrm>
-            <a:off x="457200" y="6356520"/>
-            <a:ext cx="2133360" cy="364680"/>
-          </a:xfrm>
-          <a:prstGeom prst="rect">
-            <a:avLst/>
-          </a:prstGeom>
-          <a:noFill/>
-          <a:ln w="0">
-            <a:noFill/>
-          </a:ln>
-        </p:spPr>
-        <p:txBody>
           <a:bodyPr lIns="91440" rIns="91440" tIns="45720" bIns="45720" anchor="ctr">
             <a:noAutofit/>
           </a:bodyPr>
           <a:lstStyle>
-            <a:lvl1pPr indent="0" defTabSz="914400">
-              <a:lnSpc>
-                <a:spcPct val="100000"/>
-              </a:lnSpc>
-              <a:buNone/>
-              <a:defRPr b="0" lang="pl-PL" sz="1200" spc="-1" strike="noStrike">
-                <a:solidFill>
-                  <a:schemeClr val="dk1">
-                    <a:tint val="75000"/>
-                  </a:schemeClr>
-                </a:solidFill>
-                <a:latin typeface="Calibri"/>
-              </a:defRPr>
-            </a:lvl1pPr>
-          </a:lstStyle>
-          <a:p>
-            <a:pPr indent="0" defTabSz="914400">
-              <a:lnSpc>
-                <a:spcPct val="100000"/>
-              </a:lnSpc>
-              <a:buNone/>
-            </a:pPr>
-            <a:r>
-              <a:rPr b="0" lang="pl-PL" sz="1200" spc="-1" strike="noStrike">
-                <a:solidFill>
-                  <a:schemeClr val="dk1">
-                    <a:tint val="75000"/>
-                  </a:schemeClr>
-                </a:solidFill>
-                <a:latin typeface="Calibri"/>
-              </a:rPr>
-              <a:t>&lt;date/time&gt;</a:t>
-            </a:r>
-            <a:endParaRPr b="0" lang="en-US" sz="1200" spc="-1" strike="noStrike">
-              <a:solidFill>
-                <a:srgbClr val="000000"/>
-              </a:solidFill>
-              <a:latin typeface="Times New Roman"/>
-            </a:endParaRPr>
-          </a:p>
-        </p:txBody>
-      </p:sp>
-      <p:sp>
-        <p:nvSpPr>
-          <p:cNvPr id="44" name="PlaceHolder 7"/>
-          <p:cNvSpPr>
-            <a:spLocks noGrp="1"/>
-          </p:cNvSpPr>
-          <p:nvPr>
-            <p:ph type="ftr" idx="20"/>
-          </p:nvPr>
-        </p:nvSpPr>
-        <p:spPr>
-          <a:xfrm>
-            <a:off x="3124080" y="6356520"/>
-            <a:ext cx="2895120" cy="364680"/>
-          </a:xfrm>
-          <a:prstGeom prst="rect">
-            <a:avLst/>
-          </a:prstGeom>
-          <a:noFill/>
-          <a:ln w="0">
-            <a:noFill/>
-          </a:ln>
-        </p:spPr>
-        <p:txBody>
-          <a:bodyPr lIns="91440" rIns="91440" tIns="45720" bIns="45720" anchor="ctr">
-            <a:noAutofit/>
-          </a:bodyPr>
-          <a:lstStyle>
-            <a:lvl1pPr indent="0" algn="ctr">
+            <a:lvl1pPr indent="0">
               <a:buNone/>
               <a:defRPr b="0" lang="en-US" sz="1400" spc="-1" strike="noStrike">
                 <a:solidFill>
@@ -5907,7 +4454,7 @@
             </a:lvl1pPr>
           </a:lstStyle>
           <a:p>
-            <a:pPr indent="0" algn="ctr">
+            <a:pPr indent="0">
               <a:buNone/>
             </a:pPr>
             <a:r>
@@ -5917,79 +4464,9 @@
                 </a:solidFill>
                 <a:latin typeface="Times New Roman"/>
               </a:rPr>
-              <a:t>&lt;footer&gt;</a:t>
+              <a:t>&lt;date/time&gt;</a:t>
             </a:r>
             <a:endParaRPr b="0" lang="en-US" sz="1400" spc="-1" strike="noStrike">
-              <a:solidFill>
-                <a:srgbClr val="000000"/>
-              </a:solidFill>
-              <a:latin typeface="Times New Roman"/>
-            </a:endParaRPr>
-          </a:p>
-        </p:txBody>
-      </p:sp>
-      <p:sp>
-        <p:nvSpPr>
-          <p:cNvPr id="45" name="PlaceHolder 8"/>
-          <p:cNvSpPr>
-            <a:spLocks noGrp="1"/>
-          </p:cNvSpPr>
-          <p:nvPr>
-            <p:ph type="sldNum" idx="21"/>
-          </p:nvPr>
-        </p:nvSpPr>
-        <p:spPr>
-          <a:xfrm>
-            <a:off x="6553080" y="6356520"/>
-            <a:ext cx="2133360" cy="364680"/>
-          </a:xfrm>
-          <a:prstGeom prst="rect">
-            <a:avLst/>
-          </a:prstGeom>
-          <a:noFill/>
-          <a:ln w="0">
-            <a:noFill/>
-          </a:ln>
-        </p:spPr>
-        <p:txBody>
-          <a:bodyPr lIns="91440" rIns="91440" tIns="45720" bIns="45720" anchor="ctr">
-            <a:noAutofit/>
-          </a:bodyPr>
-          <a:lstStyle>
-            <a:lvl1pPr indent="0" algn="r" defTabSz="914400">
-              <a:lnSpc>
-                <a:spcPct val="100000"/>
-              </a:lnSpc>
-              <a:buNone/>
-              <a:defRPr b="0" lang="pl-PL" sz="1200" spc="-1" strike="noStrike">
-                <a:solidFill>
-                  <a:schemeClr val="dk1">
-                    <a:tint val="75000"/>
-                  </a:schemeClr>
-                </a:solidFill>
-                <a:latin typeface="Calibri"/>
-              </a:defRPr>
-            </a:lvl1pPr>
-          </a:lstStyle>
-          <a:p>
-            <a:pPr indent="0" algn="r" defTabSz="914400">
-              <a:lnSpc>
-                <a:spcPct val="100000"/>
-              </a:lnSpc>
-              <a:buNone/>
-            </a:pPr>
-            <a:fld id="{F156841E-D77D-4F14-BF51-057E1658D243}" type="slidenum">
-              <a:rPr b="0" lang="pl-PL" sz="1200" spc="-1" strike="noStrike">
-                <a:solidFill>
-                  <a:schemeClr val="dk1">
-                    <a:tint val="75000"/>
-                  </a:schemeClr>
-                </a:solidFill>
-                <a:latin typeface="Calibri"/>
-              </a:rPr>
-              <a:t>&lt;number&gt;</a:t>
-            </a:fld>
-            <a:endParaRPr b="0" lang="en-US" sz="1200" spc="-1" strike="noStrike">
               <a:solidFill>
                 <a:srgbClr val="000000"/>
               </a:solidFill>
@@ -6033,7 +4510,7 @@
       </p:grpSpPr>
       <p:sp>
         <p:nvSpPr>
-          <p:cNvPr id="46" name="PlaceHolder 1"/>
+          <p:cNvPr id="35" name="PlaceHolder 1"/>
           <p:cNvSpPr>
             <a:spLocks noGrp="1"/>
           </p:cNvSpPr>
@@ -6044,7 +4521,7 @@
         <p:spPr>
           <a:xfrm>
             <a:off x="457200" y="274680"/>
-            <a:ext cx="8229240" cy="1142640"/>
+            <a:ext cx="8228880" cy="1142280"/>
           </a:xfrm>
           <a:prstGeom prst="rect">
             <a:avLst/>
@@ -6055,48 +4532,45 @@
           </a:ln>
         </p:spPr>
         <p:txBody>
-          <a:bodyPr lIns="91440" rIns="91440" tIns="45720" bIns="45720" anchor="ctr">
+          <a:bodyPr lIns="0" rIns="0" tIns="0" bIns="0" anchor="ctr">
             <a:noAutofit/>
           </a:bodyPr>
           <a:p>
-            <a:pPr indent="0" algn="ctr" defTabSz="914400">
-              <a:lnSpc>
-                <a:spcPct val="100000"/>
-              </a:lnSpc>
+            <a:pPr indent="0">
               <a:buNone/>
             </a:pPr>
             <a:r>
-              <a:rPr b="0" lang="pl-PL" sz="4400" spc="-1" strike="noStrike">
-                <a:solidFill>
-                  <a:schemeClr val="dk1"/>
-                </a:solidFill>
-                <a:latin typeface="Calibri"/>
-              </a:rPr>
-              <a:t>Kliknij, aby edytować styl</a:t>
-            </a:r>
-            <a:endParaRPr b="0" lang="pl-PL" sz="4400" spc="-1" strike="noStrike">
-              <a:solidFill>
-                <a:schemeClr val="dk1"/>
-              </a:solidFill>
-              <a:latin typeface="Calibri"/>
-            </a:endParaRPr>
-          </a:p>
-        </p:txBody>
-      </p:sp>
-      <p:sp>
-        <p:nvSpPr>
-          <p:cNvPr id="47" name="PlaceHolder 2"/>
+              <a:rPr b="0" lang="en-US" sz="1800" spc="-1" strike="noStrike">
+                <a:solidFill>
+                  <a:srgbClr val="000000"/>
+                </a:solidFill>
+                <a:latin typeface="Arial"/>
+              </a:rPr>
+              <a:t>Click to edit the title text format</a:t>
+            </a:r>
+            <a:endParaRPr b="0" lang="en-US" sz="1800" spc="-1" strike="noStrike">
+              <a:solidFill>
+                <a:srgbClr val="000000"/>
+              </a:solidFill>
+              <a:latin typeface="Arial"/>
+            </a:endParaRPr>
+          </a:p>
+        </p:txBody>
+      </p:sp>
+      <p:sp>
+        <p:nvSpPr>
+          <p:cNvPr id="36" name="PlaceHolder 2"/>
           <p:cNvSpPr>
             <a:spLocks noGrp="1"/>
           </p:cNvSpPr>
           <p:nvPr>
-            <p:ph type="dt" idx="22"/>
+            <p:ph type="ftr" idx="22"/>
           </p:nvPr>
         </p:nvSpPr>
         <p:spPr>
           <a:xfrm>
-            <a:off x="457200" y="6356520"/>
-            <a:ext cx="2133360" cy="364680"/>
+            <a:off x="3124080" y="6356520"/>
+            <a:ext cx="2894760" cy="364320"/>
           </a:xfrm>
           <a:prstGeom prst="rect">
             <a:avLst/>
@@ -6111,40 +4585,42 @@
             <a:noAutofit/>
           </a:bodyPr>
           <a:lstStyle>
-            <a:lvl1pPr indent="0" defTabSz="914400">
+            <a:lvl1pPr indent="0" algn="ctr">
               <a:lnSpc>
                 <a:spcPct val="100000"/>
               </a:lnSpc>
               <a:buNone/>
-              <a:defRPr b="0" lang="pl-PL" sz="1200" spc="-1" strike="noStrike">
-                <a:solidFill>
-                  <a:schemeClr val="dk1">
-                    <a:tint val="75000"/>
-                  </a:schemeClr>
-                </a:solidFill>
-                <a:latin typeface="Calibri"/>
+              <a:tabLst>
+                <a:tab algn="l" pos="0"/>
+              </a:tabLst>
+              <a:defRPr b="0" lang="en-US" sz="1400" spc="-1" strike="noStrike">
+                <a:solidFill>
+                  <a:srgbClr val="000000"/>
+                </a:solidFill>
+                <a:latin typeface="Times New Roman"/>
               </a:defRPr>
             </a:lvl1pPr>
           </a:lstStyle>
           <a:p>
-            <a:pPr indent="0" defTabSz="914400">
+            <a:pPr indent="0" algn="ctr">
               <a:lnSpc>
                 <a:spcPct val="100000"/>
               </a:lnSpc>
               <a:buNone/>
-            </a:pPr>
-            <a:r>
-              <a:rPr b="0" lang="pl-PL" sz="1200" spc="-1" strike="noStrike">
-                <a:solidFill>
-                  <a:schemeClr val="dk1">
-                    <a:tint val="75000"/>
-                  </a:schemeClr>
-                </a:solidFill>
-                <a:latin typeface="Calibri"/>
-              </a:rPr>
-              <a:t>&lt;date/time&gt;</a:t>
-            </a:r>
-            <a:endParaRPr b="0" lang="en-US" sz="1200" spc="-1" strike="noStrike">
+              <a:tabLst>
+                <a:tab algn="l" pos="0"/>
+              </a:tabLst>
+            </a:pPr>
+            <a:r>
+              <a:rPr b="0" lang="en-US" sz="1400" spc="-1" strike="noStrike">
+                <a:solidFill>
+                  <a:srgbClr val="000000"/>
+                </a:solidFill>
+                <a:latin typeface="Times New Roman"/>
+              </a:rPr>
+              <a:t>&lt;footer&gt;</a:t>
+            </a:r>
+            <a:endParaRPr b="0" lang="en-US" sz="1400" spc="-1" strike="noStrike">
               <a:solidFill>
                 <a:srgbClr val="000000"/>
               </a:solidFill>
@@ -6155,18 +4631,18 @@
       </p:sp>
       <p:sp>
         <p:nvSpPr>
-          <p:cNvPr id="48" name="PlaceHolder 3"/>
+          <p:cNvPr id="37" name="PlaceHolder 3"/>
           <p:cNvSpPr>
             <a:spLocks noGrp="1"/>
           </p:cNvSpPr>
           <p:nvPr>
-            <p:ph type="ftr" idx="23"/>
+            <p:ph type="sldNum" idx="23"/>
           </p:nvPr>
         </p:nvSpPr>
         <p:spPr>
           <a:xfrm>
-            <a:off x="3124080" y="6356520"/>
-            <a:ext cx="2895120" cy="364680"/>
+            <a:off x="6553080" y="6356520"/>
+            <a:ext cx="2133000" cy="364320"/>
           </a:xfrm>
           <a:prstGeom prst="rect">
             <a:avLst/>
@@ -6181,30 +4657,46 @@
             <a:noAutofit/>
           </a:bodyPr>
           <a:lstStyle>
-            <a:lvl1pPr indent="0" algn="ctr">
+            <a:lvl1pPr indent="0" algn="r" defTabSz="914400">
+              <a:lnSpc>
+                <a:spcPct val="100000"/>
+              </a:lnSpc>
               <a:buNone/>
-              <a:defRPr b="0" lang="en-US" sz="1400" spc="-1" strike="noStrike">
-                <a:solidFill>
-                  <a:srgbClr val="000000"/>
-                </a:solidFill>
-                <a:latin typeface="Times New Roman"/>
+              <a:tabLst>
+                <a:tab algn="l" pos="0"/>
+              </a:tabLst>
+              <a:defRPr b="0" lang="pl-PL" sz="1200" spc="-1" strike="noStrike">
+                <a:solidFill>
+                  <a:schemeClr val="dk1">
+                    <a:tint val="75000"/>
+                  </a:schemeClr>
+                </a:solidFill>
+                <a:latin typeface="Calibri"/>
               </a:defRPr>
             </a:lvl1pPr>
           </a:lstStyle>
           <a:p>
-            <a:pPr indent="0" algn="ctr">
+            <a:pPr indent="0" algn="r" defTabSz="914400">
+              <a:lnSpc>
+                <a:spcPct val="100000"/>
+              </a:lnSpc>
               <a:buNone/>
-            </a:pPr>
-            <a:r>
-              <a:rPr b="0" lang="en-US" sz="1400" spc="-1" strike="noStrike">
-                <a:solidFill>
-                  <a:srgbClr val="000000"/>
-                </a:solidFill>
-                <a:latin typeface="Times New Roman"/>
-              </a:rPr>
-              <a:t>&lt;footer&gt;</a:t>
-            </a:r>
-            <a:endParaRPr b="0" lang="en-US" sz="1400" spc="-1" strike="noStrike">
+              <a:tabLst>
+                <a:tab algn="l" pos="0"/>
+              </a:tabLst>
+            </a:pPr>
+            <a:fld id="{E0803478-0B89-422C-B894-22CC7089FDC3}" type="slidenum">
+              <a:rPr b="0" lang="pl-PL" sz="1200" spc="-1" strike="noStrike">
+                <a:solidFill>
+                  <a:schemeClr val="dk1">
+                    <a:tint val="75000"/>
+                  </a:schemeClr>
+                </a:solidFill>
+                <a:latin typeface="Calibri"/>
+              </a:rPr>
+              <a:t>&lt;number&gt;</a:t>
+            </a:fld>
+            <a:endParaRPr b="0" lang="en-US" sz="1200" spc="-1" strike="noStrike">
               <a:solidFill>
                 <a:srgbClr val="000000"/>
               </a:solidFill>
@@ -6215,18 +4707,18 @@
       </p:sp>
       <p:sp>
         <p:nvSpPr>
-          <p:cNvPr id="49" name="PlaceHolder 4"/>
+          <p:cNvPr id="38" name="PlaceHolder 4"/>
           <p:cNvSpPr>
             <a:spLocks noGrp="1"/>
           </p:cNvSpPr>
           <p:nvPr>
-            <p:ph type="sldNum" idx="24"/>
+            <p:ph type="dt" idx="24"/>
           </p:nvPr>
         </p:nvSpPr>
         <p:spPr>
           <a:xfrm>
-            <a:off x="6553080" y="6356520"/>
-            <a:ext cx="2133360" cy="364680"/>
+            <a:off x="457200" y="6356520"/>
+            <a:ext cx="2133000" cy="364320"/>
           </a:xfrm>
           <a:prstGeom prst="rect">
             <a:avLst/>
@@ -6241,40 +4733,30 @@
             <a:noAutofit/>
           </a:bodyPr>
           <a:lstStyle>
-            <a:lvl1pPr indent="0" algn="r" defTabSz="914400">
-              <a:lnSpc>
-                <a:spcPct val="100000"/>
-              </a:lnSpc>
+            <a:lvl1pPr indent="0">
               <a:buNone/>
-              <a:defRPr b="0" lang="pl-PL" sz="1200" spc="-1" strike="noStrike">
-                <a:solidFill>
-                  <a:schemeClr val="dk1">
-                    <a:tint val="75000"/>
-                  </a:schemeClr>
-                </a:solidFill>
-                <a:latin typeface="Calibri"/>
+              <a:defRPr b="0" lang="en-US" sz="1400" spc="-1" strike="noStrike">
+                <a:solidFill>
+                  <a:srgbClr val="000000"/>
+                </a:solidFill>
+                <a:latin typeface="Times New Roman"/>
               </a:defRPr>
             </a:lvl1pPr>
           </a:lstStyle>
           <a:p>
-            <a:pPr indent="0" algn="r" defTabSz="914400">
-              <a:lnSpc>
-                <a:spcPct val="100000"/>
-              </a:lnSpc>
+            <a:pPr indent="0">
               <a:buNone/>
             </a:pPr>
-            <a:fld id="{A909E016-5FEE-492F-BA54-7EB421AEE9FF}" type="slidenum">
-              <a:rPr b="0" lang="pl-PL" sz="1200" spc="-1" strike="noStrike">
-                <a:solidFill>
-                  <a:schemeClr val="dk1">
-                    <a:tint val="75000"/>
-                  </a:schemeClr>
-                </a:solidFill>
-                <a:latin typeface="Calibri"/>
-              </a:rPr>
-              <a:t>&lt;number&gt;</a:t>
-            </a:fld>
-            <a:endParaRPr b="0" lang="en-US" sz="1200" spc="-1" strike="noStrike">
+            <a:r>
+              <a:rPr b="0" lang="en-US" sz="1400" spc="-1" strike="noStrike">
+                <a:solidFill>
+                  <a:srgbClr val="000000"/>
+                </a:solidFill>
+                <a:latin typeface="Times New Roman"/>
+              </a:rPr>
+              <a:t>&lt;date/time&gt;</a:t>
+            </a:r>
+            <a:endParaRPr b="0" lang="en-US" sz="1400" spc="-1" strike="noStrike">
               <a:solidFill>
                 <a:srgbClr val="000000"/>
               </a:solidFill>
@@ -6318,18 +4800,18 @@
       </p:grpSpPr>
       <p:sp>
         <p:nvSpPr>
-          <p:cNvPr id="51" name="PlaceHolder 1"/>
+          <p:cNvPr id="40" name="PlaceHolder 1"/>
           <p:cNvSpPr>
             <a:spLocks noGrp="1"/>
           </p:cNvSpPr>
           <p:nvPr>
-            <p:ph type="dt" idx="25"/>
+            <p:ph type="ftr" idx="25"/>
           </p:nvPr>
         </p:nvSpPr>
         <p:spPr>
           <a:xfrm>
-            <a:off x="457200" y="6356520"/>
-            <a:ext cx="2133360" cy="364680"/>
+            <a:off x="3124080" y="6356520"/>
+            <a:ext cx="2894760" cy="364320"/>
           </a:xfrm>
           <a:prstGeom prst="rect">
             <a:avLst/>
@@ -6344,40 +4826,42 @@
             <a:noAutofit/>
           </a:bodyPr>
           <a:lstStyle>
-            <a:lvl1pPr indent="0" defTabSz="914400">
+            <a:lvl1pPr indent="0" algn="ctr">
               <a:lnSpc>
                 <a:spcPct val="100000"/>
               </a:lnSpc>
               <a:buNone/>
-              <a:defRPr b="0" lang="pl-PL" sz="1200" spc="-1" strike="noStrike">
-                <a:solidFill>
-                  <a:schemeClr val="dk1">
-                    <a:tint val="75000"/>
-                  </a:schemeClr>
-                </a:solidFill>
-                <a:latin typeface="Calibri"/>
+              <a:tabLst>
+                <a:tab algn="l" pos="0"/>
+              </a:tabLst>
+              <a:defRPr b="0" lang="en-US" sz="1400" spc="-1" strike="noStrike">
+                <a:solidFill>
+                  <a:srgbClr val="000000"/>
+                </a:solidFill>
+                <a:latin typeface="Times New Roman"/>
               </a:defRPr>
             </a:lvl1pPr>
           </a:lstStyle>
           <a:p>
-            <a:pPr indent="0" defTabSz="914400">
+            <a:pPr indent="0" algn="ctr">
               <a:lnSpc>
                 <a:spcPct val="100000"/>
               </a:lnSpc>
               <a:buNone/>
-            </a:pPr>
-            <a:r>
-              <a:rPr b="0" lang="pl-PL" sz="1200" spc="-1" strike="noStrike">
-                <a:solidFill>
-                  <a:schemeClr val="dk1">
-                    <a:tint val="75000"/>
-                  </a:schemeClr>
-                </a:solidFill>
-                <a:latin typeface="Calibri"/>
-              </a:rPr>
-              <a:t>&lt;date/time&gt;</a:t>
-            </a:r>
-            <a:endParaRPr b="0" lang="en-US" sz="1200" spc="-1" strike="noStrike">
+              <a:tabLst>
+                <a:tab algn="l" pos="0"/>
+              </a:tabLst>
+            </a:pPr>
+            <a:r>
+              <a:rPr b="0" lang="en-US" sz="1400" spc="-1" strike="noStrike">
+                <a:solidFill>
+                  <a:srgbClr val="000000"/>
+                </a:solidFill>
+                <a:latin typeface="Times New Roman"/>
+              </a:rPr>
+              <a:t>&lt;footer&gt;</a:t>
+            </a:r>
+            <a:endParaRPr b="0" lang="en-US" sz="1400" spc="-1" strike="noStrike">
               <a:solidFill>
                 <a:srgbClr val="000000"/>
               </a:solidFill>
@@ -6388,18 +4872,18 @@
       </p:sp>
       <p:sp>
         <p:nvSpPr>
-          <p:cNvPr id="52" name="PlaceHolder 2"/>
+          <p:cNvPr id="41" name="PlaceHolder 2"/>
           <p:cNvSpPr>
             <a:spLocks noGrp="1"/>
           </p:cNvSpPr>
           <p:nvPr>
-            <p:ph type="ftr" idx="26"/>
+            <p:ph type="sldNum" idx="26"/>
           </p:nvPr>
         </p:nvSpPr>
         <p:spPr>
           <a:xfrm>
-            <a:off x="3124080" y="6356520"/>
-            <a:ext cx="2895120" cy="364680"/>
+            <a:off x="6553080" y="6356520"/>
+            <a:ext cx="2133000" cy="364320"/>
           </a:xfrm>
           <a:prstGeom prst="rect">
             <a:avLst/>
@@ -6414,30 +4898,46 @@
             <a:noAutofit/>
           </a:bodyPr>
           <a:lstStyle>
-            <a:lvl1pPr indent="0" algn="ctr">
+            <a:lvl1pPr indent="0" algn="r" defTabSz="914400">
+              <a:lnSpc>
+                <a:spcPct val="100000"/>
+              </a:lnSpc>
               <a:buNone/>
-              <a:defRPr b="0" lang="en-US" sz="1400" spc="-1" strike="noStrike">
-                <a:solidFill>
-                  <a:srgbClr val="000000"/>
-                </a:solidFill>
-                <a:latin typeface="Times New Roman"/>
+              <a:tabLst>
+                <a:tab algn="l" pos="0"/>
+              </a:tabLst>
+              <a:defRPr b="0" lang="pl-PL" sz="1200" spc="-1" strike="noStrike">
+                <a:solidFill>
+                  <a:schemeClr val="dk1">
+                    <a:tint val="75000"/>
+                  </a:schemeClr>
+                </a:solidFill>
+                <a:latin typeface="Calibri"/>
               </a:defRPr>
             </a:lvl1pPr>
           </a:lstStyle>
           <a:p>
-            <a:pPr indent="0" algn="ctr">
+            <a:pPr indent="0" algn="r" defTabSz="914400">
+              <a:lnSpc>
+                <a:spcPct val="100000"/>
+              </a:lnSpc>
               <a:buNone/>
-            </a:pPr>
-            <a:r>
-              <a:rPr b="0" lang="en-US" sz="1400" spc="-1" strike="noStrike">
-                <a:solidFill>
-                  <a:srgbClr val="000000"/>
-                </a:solidFill>
-                <a:latin typeface="Times New Roman"/>
-              </a:rPr>
-              <a:t>&lt;footer&gt;</a:t>
-            </a:r>
-            <a:endParaRPr b="0" lang="en-US" sz="1400" spc="-1" strike="noStrike">
+              <a:tabLst>
+                <a:tab algn="l" pos="0"/>
+              </a:tabLst>
+            </a:pPr>
+            <a:fld id="{134C447C-4F81-4FCA-A781-23E1F34579BF}" type="slidenum">
+              <a:rPr b="0" lang="pl-PL" sz="1200" spc="-1" strike="noStrike">
+                <a:solidFill>
+                  <a:schemeClr val="dk1">
+                    <a:tint val="75000"/>
+                  </a:schemeClr>
+                </a:solidFill>
+                <a:latin typeface="Calibri"/>
+              </a:rPr>
+              <a:t>&lt;number&gt;</a:t>
+            </a:fld>
+            <a:endParaRPr b="0" lang="en-US" sz="1200" spc="-1" strike="noStrike">
               <a:solidFill>
                 <a:srgbClr val="000000"/>
               </a:solidFill>
@@ -6448,18 +4948,18 @@
       </p:sp>
       <p:sp>
         <p:nvSpPr>
-          <p:cNvPr id="53" name="PlaceHolder 3"/>
+          <p:cNvPr id="42" name="PlaceHolder 3"/>
           <p:cNvSpPr>
             <a:spLocks noGrp="1"/>
           </p:cNvSpPr>
           <p:nvPr>
-            <p:ph type="sldNum" idx="27"/>
+            <p:ph type="dt" idx="27"/>
           </p:nvPr>
         </p:nvSpPr>
         <p:spPr>
           <a:xfrm>
-            <a:off x="6553080" y="6356520"/>
-            <a:ext cx="2133360" cy="364680"/>
+            <a:off x="457200" y="6356520"/>
+            <a:ext cx="2133000" cy="364320"/>
           </a:xfrm>
           <a:prstGeom prst="rect">
             <a:avLst/>
@@ -6474,40 +4974,30 @@
             <a:noAutofit/>
           </a:bodyPr>
           <a:lstStyle>
-            <a:lvl1pPr indent="0" algn="r" defTabSz="914400">
-              <a:lnSpc>
-                <a:spcPct val="100000"/>
-              </a:lnSpc>
+            <a:lvl1pPr indent="0">
               <a:buNone/>
-              <a:defRPr b="0" lang="pl-PL" sz="1200" spc="-1" strike="noStrike">
-                <a:solidFill>
-                  <a:schemeClr val="dk1">
-                    <a:tint val="75000"/>
-                  </a:schemeClr>
-                </a:solidFill>
-                <a:latin typeface="Calibri"/>
+              <a:defRPr b="0" lang="en-US" sz="1400" spc="-1" strike="noStrike">
+                <a:solidFill>
+                  <a:srgbClr val="000000"/>
+                </a:solidFill>
+                <a:latin typeface="Times New Roman"/>
               </a:defRPr>
             </a:lvl1pPr>
           </a:lstStyle>
           <a:p>
-            <a:pPr indent="0" algn="r" defTabSz="914400">
-              <a:lnSpc>
-                <a:spcPct val="100000"/>
-              </a:lnSpc>
+            <a:pPr indent="0">
               <a:buNone/>
             </a:pPr>
-            <a:fld id="{B8D638BC-B187-4557-B6EE-E6ED8B1DFB8F}" type="slidenum">
-              <a:rPr b="0" lang="pl-PL" sz="1200" spc="-1" strike="noStrike">
-                <a:solidFill>
-                  <a:schemeClr val="dk1">
-                    <a:tint val="75000"/>
-                  </a:schemeClr>
-                </a:solidFill>
-                <a:latin typeface="Calibri"/>
-              </a:rPr>
-              <a:t>&lt;number&gt;</a:t>
-            </a:fld>
-            <a:endParaRPr b="0" lang="en-US" sz="1200" spc="-1" strike="noStrike">
+            <a:r>
+              <a:rPr b="0" lang="en-US" sz="1400" spc="-1" strike="noStrike">
+                <a:solidFill>
+                  <a:srgbClr val="000000"/>
+                </a:solidFill>
+                <a:latin typeface="Times New Roman"/>
+              </a:rPr>
+              <a:t>&lt;date/time&gt;</a:t>
+            </a:r>
+            <a:endParaRPr b="0" lang="en-US" sz="1400" spc="-1" strike="noStrike">
               <a:solidFill>
                 <a:srgbClr val="000000"/>
               </a:solidFill>
@@ -6544,7 +5034,7 @@
       </p:grpSpPr>
       <p:sp>
         <p:nvSpPr>
-          <p:cNvPr id="66" name="PlaceHolder 1"/>
+          <p:cNvPr id="49" name="PlaceHolder 1"/>
           <p:cNvSpPr>
             <a:spLocks noGrp="1"/>
           </p:cNvSpPr>
@@ -6555,7 +5045,7 @@
         <p:spPr>
           <a:xfrm>
             <a:off x="457200" y="274680"/>
-            <a:ext cx="8229240" cy="1142640"/>
+            <a:ext cx="8228880" cy="1142280"/>
           </a:xfrm>
           <a:prstGeom prst="rect">
             <a:avLst/>
@@ -6575,6 +5065,9 @@
                 <a:spcPct val="100000"/>
               </a:lnSpc>
               <a:buNone/>
+              <a:tabLst>
+                <a:tab algn="l" pos="0"/>
+              </a:tabLst>
             </a:pPr>
             <a:r>
               <a:rPr b="0" lang="pl-PL" sz="3600" spc="-1" strike="noStrike">
@@ -6585,18 +5078,18 @@
               </a:rPr>
               <a:t>Zadanie nr 5</a:t>
             </a:r>
-            <a:endParaRPr b="0" lang="pl-PL" sz="3600" spc="-1" strike="noStrike">
-              <a:solidFill>
-                <a:schemeClr val="dk1"/>
-              </a:solidFill>
-              <a:latin typeface="Calibri"/>
+            <a:endParaRPr b="0" lang="en-US" sz="3600" spc="-1" strike="noStrike">
+              <a:solidFill>
+                <a:srgbClr val="000000"/>
+              </a:solidFill>
+              <a:latin typeface="Arial"/>
             </a:endParaRPr>
           </a:p>
         </p:txBody>
       </p:sp>
       <p:pic>
         <p:nvPicPr>
-          <p:cNvPr id="67" name="Picture 4" descr="Znalezione obrazy dla zapytania politechnika wrocławska logotyp">
+          <p:cNvPr id="50" name="Picture 4" descr="Znalezione obrazy dla zapytania politechnika wrocławska logotyp">
             <a:hlinkClick r:id="rId1"/>
           </p:cNvPr>
           <p:cNvPicPr/>
@@ -6609,7 +5102,7 @@
         <p:spPr>
           <a:xfrm>
             <a:off x="0" y="12960"/>
-            <a:ext cx="1824480" cy="535320"/>
+            <a:ext cx="1824120" cy="534960"/>
           </a:xfrm>
           <a:prstGeom prst="rect">
             <a:avLst/>
@@ -6621,7 +5114,7 @@
       </p:pic>
       <p:sp>
         <p:nvSpPr>
-          <p:cNvPr id="68" name="PlaceHolder 2"/>
+          <p:cNvPr id="51" name="PlaceHolder 2"/>
           <p:cNvSpPr>
             <a:spLocks noGrp="1"/>
           </p:cNvSpPr>
@@ -6632,7 +5125,7 @@
         <p:spPr>
           <a:xfrm>
             <a:off x="251640" y="1484640"/>
-            <a:ext cx="8640720" cy="4608000"/>
+            <a:ext cx="8640360" cy="4607640"/>
           </a:xfrm>
           <a:prstGeom prst="rect">
             <a:avLst/>
@@ -6669,11 +5162,11 @@
               </a:rPr>
               <a:t>Na rysuneczku na następnym slajdzie proszę o zgrubne przybliżenie, kto mógłby być naszym pierwszym klientem? Można go opisać np. poprzez mapę empatii 6a, czy szablon opisu persony 6b? </a:t>
             </a:r>
-            <a:endParaRPr b="0" lang="pl-PL" sz="2400" spc="-1" strike="noStrike">
-              <a:solidFill>
-                <a:schemeClr val="dk1"/>
-              </a:solidFill>
-              <a:latin typeface="Calibri"/>
+            <a:endParaRPr b="0" lang="en-US" sz="2400" spc="-1" strike="noStrike">
+              <a:solidFill>
+                <a:srgbClr val="000000"/>
+              </a:solidFill>
+              <a:latin typeface="Arial"/>
             </a:endParaRPr>
           </a:p>
           <a:p>
@@ -6699,11 +5192,11 @@
               </a:rPr>
               <a:t>Proszę wykorzystać minimum jeden szablon</a:t>
             </a:r>
-            <a:endParaRPr b="0" lang="pl-PL" sz="2400" spc="-1" strike="noStrike">
-              <a:solidFill>
-                <a:schemeClr val="dk1"/>
-              </a:solidFill>
-              <a:latin typeface="Calibri"/>
+            <a:endParaRPr b="0" lang="en-US" sz="2400" spc="-1" strike="noStrike">
+              <a:solidFill>
+                <a:srgbClr val="000000"/>
+              </a:solidFill>
+              <a:latin typeface="Arial"/>
             </a:endParaRPr>
           </a:p>
         </p:txBody>
@@ -6740,7 +5233,7 @@
       </p:grpSpPr>
       <p:pic>
         <p:nvPicPr>
-          <p:cNvPr id="69" name="Picture 4" descr="Znalezione obrazy dla zapytania politechnika wrocławska logotyp">
+          <p:cNvPr id="52" name="Picture 4" descr="Znalezione obrazy dla zapytania politechnika wrocławska logotyp">
             <a:hlinkClick r:id="rId1"/>
           </p:cNvPr>
           <p:cNvPicPr/>
@@ -6753,7 +5246,7 @@
         <p:spPr>
           <a:xfrm>
             <a:off x="0" y="11160"/>
-            <a:ext cx="1824480" cy="535320"/>
+            <a:ext cx="1824120" cy="534960"/>
           </a:xfrm>
           <a:prstGeom prst="rect">
             <a:avLst/>
@@ -6765,14 +5258,14 @@
       </p:pic>
       <p:sp>
         <p:nvSpPr>
-          <p:cNvPr id="70" name="pole tekstowe 32"/>
+          <p:cNvPr id="53" name="pole tekstowe 32"/>
           <p:cNvSpPr/>
           <p:nvPr/>
         </p:nvSpPr>
         <p:spPr>
           <a:xfrm>
             <a:off x="1907640" y="177840"/>
-            <a:ext cx="7128360" cy="363960"/>
+            <a:ext cx="7128000" cy="363960"/>
           </a:xfrm>
           <a:prstGeom prst="rect">
             <a:avLst/>
@@ -6818,14 +5311,14 @@
       </p:sp>
       <p:sp>
         <p:nvSpPr>
-          <p:cNvPr id="71" name="Schemat blokowy: wyodrębnianie 1"/>
+          <p:cNvPr id="54" name="Schemat blokowy: wyodrębnianie 1"/>
           <p:cNvSpPr/>
           <p:nvPr/>
         </p:nvSpPr>
         <p:spPr>
           <a:xfrm>
             <a:off x="467640" y="2520360"/>
-            <a:ext cx="8208720" cy="1844640"/>
+            <a:ext cx="8208360" cy="1844280"/>
           </a:xfrm>
           <a:prstGeom prst="flowChartExtract">
             <a:avLst/>
@@ -6875,14 +5368,14 @@
       </p:sp>
       <p:sp>
         <p:nvSpPr>
-          <p:cNvPr id="72" name="Schemat blokowy: wyodrębnianie 5"/>
+          <p:cNvPr id="55" name="Schemat blokowy: wyodrębnianie 5"/>
           <p:cNvSpPr/>
           <p:nvPr/>
         </p:nvSpPr>
         <p:spPr>
           <a:xfrm rot="10800000">
-            <a:off x="467640" y="620640"/>
-            <a:ext cx="8208720" cy="1800000"/>
+            <a:off x="468000" y="620640"/>
+            <a:ext cx="8208360" cy="1799640"/>
           </a:xfrm>
           <a:prstGeom prst="flowChartExtract">
             <a:avLst/>
@@ -6932,14 +5425,14 @@
       </p:sp>
       <p:sp>
         <p:nvSpPr>
-          <p:cNvPr id="73" name="pole tekstowe 3"/>
+          <p:cNvPr id="56" name="pole tekstowe 3"/>
           <p:cNvSpPr/>
           <p:nvPr/>
         </p:nvSpPr>
         <p:spPr>
           <a:xfrm>
             <a:off x="3636000" y="744480"/>
-            <a:ext cx="1944000" cy="1157040"/>
+            <a:ext cx="1943640" cy="1157040"/>
           </a:xfrm>
           <a:prstGeom prst="rect">
             <a:avLst/>
@@ -7088,14 +5581,14 @@
       </p:sp>
       <p:sp>
         <p:nvSpPr>
-          <p:cNvPr id="74" name="pole tekstowe 7"/>
+          <p:cNvPr id="57" name="pole tekstowe 7"/>
           <p:cNvSpPr/>
           <p:nvPr/>
         </p:nvSpPr>
         <p:spPr>
           <a:xfrm>
             <a:off x="3708000" y="3027600"/>
-            <a:ext cx="1908000" cy="1157040"/>
+            <a:ext cx="1907640" cy="1157040"/>
           </a:xfrm>
           <a:prstGeom prst="rect">
             <a:avLst/>
@@ -7244,14 +5737,14 @@
       </p:sp>
       <p:sp>
         <p:nvSpPr>
-          <p:cNvPr id="75" name="Prostokąt 4"/>
+          <p:cNvPr id="58" name="Prostokąt 4"/>
           <p:cNvSpPr/>
           <p:nvPr/>
         </p:nvSpPr>
         <p:spPr>
           <a:xfrm>
             <a:off x="467640" y="4437000"/>
-            <a:ext cx="4104000" cy="2232000"/>
+            <a:ext cx="4103640" cy="2231640"/>
           </a:xfrm>
           <a:prstGeom prst="rect">
             <a:avLst/>
@@ -7301,14 +5794,14 @@
       </p:sp>
       <p:sp>
         <p:nvSpPr>
-          <p:cNvPr id="76" name="Prostokąt 9"/>
+          <p:cNvPr id="59" name="Prostokąt 9"/>
           <p:cNvSpPr/>
           <p:nvPr/>
         </p:nvSpPr>
         <p:spPr>
           <a:xfrm>
             <a:off x="4601160" y="4437000"/>
-            <a:ext cx="4104000" cy="2232000"/>
+            <a:ext cx="4103640" cy="2231640"/>
           </a:xfrm>
           <a:prstGeom prst="rect">
             <a:avLst/>
@@ -7358,14 +5851,14 @@
       </p:sp>
       <p:sp>
         <p:nvSpPr>
-          <p:cNvPr id="77" name="Trójkąt równoramienny 6"/>
+          <p:cNvPr id="60" name="Trójkąt równoramienny 6"/>
           <p:cNvSpPr/>
           <p:nvPr/>
         </p:nvSpPr>
         <p:spPr>
           <a:xfrm rot="16200000">
-            <a:off x="5044320" y="560160"/>
-            <a:ext cx="3476160" cy="3845160"/>
+            <a:off x="5044320" y="560520"/>
+            <a:ext cx="3475800" cy="3844800"/>
           </a:xfrm>
           <a:prstGeom prst="triangle">
             <a:avLst>
@@ -7417,14 +5910,14 @@
       </p:sp>
       <p:sp>
         <p:nvSpPr>
-          <p:cNvPr id="78" name="Trójkąt równoramienny 12"/>
+          <p:cNvPr id="61" name="Trójkąt równoramienny 12"/>
           <p:cNvSpPr/>
           <p:nvPr/>
         </p:nvSpPr>
         <p:spPr>
           <a:xfrm flipV="1" rot="16200000">
-            <a:off x="651960" y="522720"/>
-            <a:ext cx="3513600" cy="3882240"/>
+            <a:off x="652320" y="522000"/>
+            <a:ext cx="3513240" cy="3881880"/>
           </a:xfrm>
           <a:prstGeom prst="triangle">
             <a:avLst>
@@ -7476,14 +5969,14 @@
       </p:sp>
       <p:sp>
         <p:nvSpPr>
-          <p:cNvPr id="79" name="pole tekstowe 14"/>
+          <p:cNvPr id="62" name="pole tekstowe 14"/>
           <p:cNvSpPr/>
           <p:nvPr/>
         </p:nvSpPr>
         <p:spPr>
           <a:xfrm>
             <a:off x="6498360" y="2048760"/>
-            <a:ext cx="1674000" cy="1157040"/>
+            <a:ext cx="1673640" cy="1157040"/>
           </a:xfrm>
           <a:prstGeom prst="rect">
             <a:avLst/>
@@ -7651,14 +6144,14 @@
       </p:sp>
       <p:sp>
         <p:nvSpPr>
-          <p:cNvPr id="80" name="pole tekstowe 15"/>
+          <p:cNvPr id="63" name="pole tekstowe 15"/>
           <p:cNvSpPr/>
           <p:nvPr/>
         </p:nvSpPr>
         <p:spPr>
           <a:xfrm>
             <a:off x="971640" y="2005920"/>
-            <a:ext cx="1800000" cy="1157040"/>
+            <a:ext cx="1799640" cy="1157040"/>
           </a:xfrm>
           <a:prstGeom prst="rect">
             <a:avLst/>
@@ -7816,14 +6309,14 @@
       </p:sp>
       <p:sp>
         <p:nvSpPr>
-          <p:cNvPr id="81" name="pole tekstowe 16"/>
+          <p:cNvPr id="64" name="pole tekstowe 16"/>
           <p:cNvSpPr/>
           <p:nvPr/>
         </p:nvSpPr>
         <p:spPr>
           <a:xfrm>
             <a:off x="1691640" y="4599000"/>
-            <a:ext cx="1944000" cy="1157040"/>
+            <a:ext cx="1943640" cy="1157040"/>
           </a:xfrm>
           <a:prstGeom prst="rect">
             <a:avLst/>
@@ -7972,14 +6465,14 @@
       </p:sp>
       <p:sp>
         <p:nvSpPr>
-          <p:cNvPr id="82" name="pole tekstowe 17"/>
+          <p:cNvPr id="65" name="pole tekstowe 17"/>
           <p:cNvSpPr/>
           <p:nvPr/>
         </p:nvSpPr>
         <p:spPr>
           <a:xfrm>
             <a:off x="5472000" y="4653000"/>
-            <a:ext cx="2052000" cy="1157040"/>
+            <a:ext cx="2051640" cy="1157040"/>
           </a:xfrm>
           <a:prstGeom prst="rect">
             <a:avLst/>
@@ -8128,7 +6621,7 @@
       </p:sp>
       <p:pic>
         <p:nvPicPr>
-          <p:cNvPr id="83" name="Picture 2" descr=""/>
+          <p:cNvPr id="66" name="Picture 2" descr=""/>
           <p:cNvPicPr/>
           <p:nvPr/>
         </p:nvPicPr>
@@ -8139,7 +6632,7 @@
         <p:spPr>
           <a:xfrm>
             <a:off x="4147920" y="1986840"/>
-            <a:ext cx="848160" cy="954360"/>
+            <a:ext cx="847800" cy="954000"/>
           </a:xfrm>
           <a:prstGeom prst="rect">
             <a:avLst/>
@@ -8181,7 +6674,7 @@
       </p:grpSpPr>
       <p:pic>
         <p:nvPicPr>
-          <p:cNvPr id="84" name="Picture 2" descr=""/>
+          <p:cNvPr id="67" name="Picture 2" descr=""/>
           <p:cNvPicPr/>
           <p:nvPr/>
         </p:nvPicPr>
@@ -8192,7 +6685,7 @@
         <p:spPr>
           <a:xfrm>
             <a:off x="28440" y="42840"/>
-            <a:ext cx="9086400" cy="6771960"/>
+            <a:ext cx="9086040" cy="6771600"/>
           </a:xfrm>
           <a:prstGeom prst="rect">
             <a:avLst/>
@@ -8204,14 +6697,14 @@
       </p:pic>
       <p:sp>
         <p:nvSpPr>
-          <p:cNvPr id="85" name="pole tekstowe 1"/>
+          <p:cNvPr id="68" name="pole tekstowe 1"/>
           <p:cNvSpPr/>
           <p:nvPr/>
         </p:nvSpPr>
         <p:spPr>
           <a:xfrm>
             <a:off x="5292000" y="87120"/>
-            <a:ext cx="2232000" cy="455400"/>
+            <a:ext cx="2231640" cy="455400"/>
           </a:xfrm>
           <a:prstGeom prst="rect">
             <a:avLst/>
@@ -8287,14 +6780,14 @@
       </p:grpSpPr>
       <p:sp>
         <p:nvSpPr>
-          <p:cNvPr id="86" name="Prostokąt 26"/>
+          <p:cNvPr id="69" name="Prostokąt 26"/>
           <p:cNvSpPr/>
           <p:nvPr/>
         </p:nvSpPr>
         <p:spPr>
           <a:xfrm>
             <a:off x="472320" y="3167640"/>
-            <a:ext cx="8237520" cy="1151280"/>
+            <a:ext cx="8237160" cy="1150920"/>
           </a:xfrm>
           <a:prstGeom prst="rect">
             <a:avLst/>
@@ -8396,14 +6889,14 @@
       </p:sp>
       <p:sp>
         <p:nvSpPr>
-          <p:cNvPr id="87" name="Prostokąt 29"/>
+          <p:cNvPr id="70" name="Prostokąt 29"/>
           <p:cNvSpPr/>
           <p:nvPr/>
         </p:nvSpPr>
         <p:spPr>
           <a:xfrm>
             <a:off x="467640" y="711360"/>
-            <a:ext cx="2200680" cy="2339280"/>
+            <a:ext cx="2200320" cy="2338920"/>
           </a:xfrm>
           <a:prstGeom prst="rect">
             <a:avLst/>
@@ -8505,7 +6998,7 @@
       </p:sp>
       <p:pic>
         <p:nvPicPr>
-          <p:cNvPr id="88" name="Picture 4" descr="Znalezione obrazy dla zapytania politechnika wrocławska logotyp">
+          <p:cNvPr id="71" name="Picture 4" descr="Znalezione obrazy dla zapytania politechnika wrocławska logotyp">
             <a:hlinkClick r:id="rId1"/>
           </p:cNvPr>
           <p:cNvPicPr/>
@@ -8518,7 +7011,7 @@
         <p:spPr>
           <a:xfrm>
             <a:off x="0" y="11160"/>
-            <a:ext cx="1824480" cy="535320"/>
+            <a:ext cx="1824120" cy="534960"/>
           </a:xfrm>
           <a:prstGeom prst="rect">
             <a:avLst/>
@@ -8530,14 +7023,14 @@
       </p:pic>
       <p:sp>
         <p:nvSpPr>
-          <p:cNvPr id="89" name="pole tekstowe 32"/>
+          <p:cNvPr id="72" name="pole tekstowe 32"/>
           <p:cNvSpPr/>
           <p:nvPr/>
         </p:nvSpPr>
         <p:spPr>
           <a:xfrm>
             <a:off x="1907640" y="177840"/>
-            <a:ext cx="7128360" cy="363960"/>
+            <a:ext cx="7128000" cy="363960"/>
           </a:xfrm>
           <a:prstGeom prst="rect">
             <a:avLst/>
@@ -8583,14 +7076,14 @@
       </p:sp>
       <p:sp>
         <p:nvSpPr>
-          <p:cNvPr id="90" name="Prostokąt 4"/>
+          <p:cNvPr id="73" name="Prostokąt 4"/>
           <p:cNvSpPr/>
           <p:nvPr/>
         </p:nvSpPr>
         <p:spPr>
           <a:xfrm>
             <a:off x="472320" y="5633280"/>
-            <a:ext cx="4104000" cy="1151280"/>
+            <a:ext cx="4103640" cy="1150920"/>
           </a:xfrm>
           <a:prstGeom prst="rect">
             <a:avLst/>
@@ -8692,14 +7185,14 @@
       </p:sp>
       <p:sp>
         <p:nvSpPr>
-          <p:cNvPr id="91" name="Prostokąt 9"/>
+          <p:cNvPr id="74" name="Prostokąt 9"/>
           <p:cNvSpPr/>
           <p:nvPr/>
         </p:nvSpPr>
         <p:spPr>
           <a:xfrm>
             <a:off x="4605840" y="5633280"/>
-            <a:ext cx="4104000" cy="1151280"/>
+            <a:ext cx="4103640" cy="1150920"/>
           </a:xfrm>
           <a:prstGeom prst="rect">
             <a:avLst/>
@@ -8749,14 +7242,14 @@
       </p:sp>
       <p:sp>
         <p:nvSpPr>
-          <p:cNvPr id="92" name="Prostokąt 20"/>
+          <p:cNvPr id="75" name="Prostokąt 20"/>
           <p:cNvSpPr/>
           <p:nvPr/>
         </p:nvSpPr>
         <p:spPr>
           <a:xfrm>
             <a:off x="472320" y="4410000"/>
-            <a:ext cx="4104000" cy="1151280"/>
+            <a:ext cx="4103640" cy="1150920"/>
           </a:xfrm>
           <a:prstGeom prst="rect">
             <a:avLst/>
@@ -8858,14 +7351,14 @@
       </p:sp>
       <p:sp>
         <p:nvSpPr>
-          <p:cNvPr id="93" name="Prostokąt 21"/>
+          <p:cNvPr id="76" name="Prostokąt 21"/>
           <p:cNvSpPr/>
           <p:nvPr/>
         </p:nvSpPr>
         <p:spPr>
           <a:xfrm>
             <a:off x="4641840" y="4374000"/>
-            <a:ext cx="4104000" cy="1151280"/>
+            <a:ext cx="4103640" cy="1150920"/>
           </a:xfrm>
           <a:prstGeom prst="rect">
             <a:avLst/>
@@ -8899,7 +7392,11 @@
             <a:noAutofit/>
           </a:bodyPr>
           <a:p>
-            <a:pPr algn="ctr"/>
+            <a:pPr algn="ctr">
+              <a:lnSpc>
+                <a:spcPct val="100000"/>
+              </a:lnSpc>
+            </a:pPr>
             <a:endParaRPr b="0" lang="pl-PL" sz="1800" spc="-1" strike="noStrike">
               <a:solidFill>
                 <a:schemeClr val="lt1"/>
@@ -8911,14 +7408,14 @@
       </p:sp>
       <p:sp>
         <p:nvSpPr>
-          <p:cNvPr id="94" name="pole tekstowe 27"/>
+          <p:cNvPr id="77" name="pole tekstowe 27"/>
           <p:cNvSpPr/>
           <p:nvPr/>
         </p:nvSpPr>
         <p:spPr>
           <a:xfrm>
             <a:off x="472320" y="3167640"/>
-            <a:ext cx="8237520" cy="943560"/>
+            <a:ext cx="8237160" cy="943560"/>
           </a:xfrm>
           <a:prstGeom prst="rect">
             <a:avLst/>
@@ -9055,7 +7552,7 @@
       </p:sp>
       <p:pic>
         <p:nvPicPr>
-          <p:cNvPr id="95" name="Picture 2" descr=""/>
+          <p:cNvPr id="78" name="Picture 2" descr=""/>
           <p:cNvPicPr/>
           <p:nvPr/>
         </p:nvPicPr>
@@ -9066,7 +7563,7 @@
         <p:spPr>
           <a:xfrm>
             <a:off x="719640" y="836640"/>
-            <a:ext cx="1331640" cy="1498320"/>
+            <a:ext cx="1331280" cy="1497960"/>
           </a:xfrm>
           <a:prstGeom prst="rect">
             <a:avLst/>
@@ -9078,14 +7575,14 @@
       </p:pic>
       <p:sp>
         <p:nvSpPr>
-          <p:cNvPr id="96" name="pole tekstowe 30"/>
+          <p:cNvPr id="79" name="pole tekstowe 30"/>
           <p:cNvSpPr/>
           <p:nvPr/>
         </p:nvSpPr>
         <p:spPr>
           <a:xfrm>
             <a:off x="395640" y="2422800"/>
-            <a:ext cx="2371320" cy="730080"/>
+            <a:ext cx="2370960" cy="730080"/>
           </a:xfrm>
           <a:prstGeom prst="rect">
             <a:avLst/>
@@ -9132,14 +7629,14 @@
       </p:sp>
       <p:sp>
         <p:nvSpPr>
-          <p:cNvPr id="97" name="Prostokąt 33"/>
+          <p:cNvPr id="80" name="Prostokąt 33"/>
           <p:cNvSpPr/>
           <p:nvPr/>
         </p:nvSpPr>
         <p:spPr>
           <a:xfrm>
             <a:off x="2915640" y="1871280"/>
-            <a:ext cx="5766120" cy="1151280"/>
+            <a:ext cx="5765760" cy="1150920"/>
           </a:xfrm>
           <a:prstGeom prst="rect">
             <a:avLst/>
@@ -9189,14 +7686,14 @@
       </p:sp>
       <p:sp>
         <p:nvSpPr>
-          <p:cNvPr id="98" name="pole tekstowe 34"/>
+          <p:cNvPr id="81" name="pole tekstowe 34"/>
           <p:cNvSpPr/>
           <p:nvPr/>
         </p:nvSpPr>
         <p:spPr>
           <a:xfrm>
             <a:off x="2915640" y="1862280"/>
-            <a:ext cx="5313960" cy="1371240"/>
+            <a:ext cx="5313600" cy="1370520"/>
           </a:xfrm>
           <a:prstGeom prst="rect">
             <a:avLst/>
@@ -9373,14 +7870,14 @@
       </p:sp>
       <p:sp>
         <p:nvSpPr>
-          <p:cNvPr id="99" name="Prostokąt 35"/>
+          <p:cNvPr id="82" name="Prostokąt 35"/>
           <p:cNvSpPr/>
           <p:nvPr/>
         </p:nvSpPr>
         <p:spPr>
           <a:xfrm>
             <a:off x="2915640" y="647640"/>
-            <a:ext cx="5766120" cy="1151280"/>
+            <a:ext cx="5765760" cy="1150920"/>
           </a:xfrm>
           <a:prstGeom prst="rect">
             <a:avLst/>
@@ -9414,11 +7911,25 @@
             <a:noAutofit/>
           </a:bodyPr>
           <a:p>
-            <a:pPr algn="ctr" defTabSz="914400">
-              <a:lnSpc>
-                <a:spcPct val="100000"/>
-              </a:lnSpc>
-            </a:pPr>
+            <a:pPr algn="ctr"/>
+            <a:r>
+              <a:rPr b="0" lang="pl-PL" sz="1800" spc="-1" strike="noStrike">
+                <a:solidFill>
+                  <a:srgbClr val="000000"/>
+                </a:solidFill>
+                <a:latin typeface="Calibri"/>
+              </a:rPr>
+              <a:t>„</a:t>
+            </a:r>
+            <a:r>
+              <a:rPr b="0" lang="pl-PL" sz="1800" spc="-1" strike="noStrike">
+                <a:solidFill>
+                  <a:srgbClr val="000000"/>
+                </a:solidFill>
+                <a:latin typeface="Calibri"/>
+              </a:rPr>
+              <a:t>Ucz się, ucz, bo nauka to potęgi klucz”</a:t>
+            </a:r>
             <a:endParaRPr b="0" lang="pl-PL" sz="1800" spc="-1" strike="noStrike">
               <a:solidFill>
                 <a:schemeClr val="lt1"/>
@@ -9430,14 +7941,14 @@
       </p:sp>
       <p:sp>
         <p:nvSpPr>
-          <p:cNvPr id="100" name="pole tekstowe 36"/>
+          <p:cNvPr id="83" name="pole tekstowe 36"/>
           <p:cNvSpPr/>
           <p:nvPr/>
         </p:nvSpPr>
         <p:spPr>
           <a:xfrm>
             <a:off x="3886200" y="647640"/>
-            <a:ext cx="3657600" cy="303840"/>
+            <a:ext cx="3657240" cy="303120"/>
           </a:xfrm>
           <a:prstGeom prst="rect">
             <a:avLst/>
@@ -9484,14 +7995,14 @@
       </p:sp>
       <p:sp>
         <p:nvSpPr>
-          <p:cNvPr id="101" name="pole tekstowe 37"/>
+          <p:cNvPr id="84" name="pole tekstowe 37"/>
           <p:cNvSpPr/>
           <p:nvPr/>
         </p:nvSpPr>
         <p:spPr>
           <a:xfrm>
             <a:off x="467640" y="4419000"/>
-            <a:ext cx="3168000" cy="1157040"/>
+            <a:ext cx="3167640" cy="1157040"/>
           </a:xfrm>
           <a:prstGeom prst="rect">
             <a:avLst/>
@@ -9637,14 +8148,14 @@
       </p:sp>
       <p:sp>
         <p:nvSpPr>
-          <p:cNvPr id="102" name="pole tekstowe 38"/>
+          <p:cNvPr id="85" name="pole tekstowe 38"/>
           <p:cNvSpPr/>
           <p:nvPr/>
         </p:nvSpPr>
         <p:spPr>
           <a:xfrm>
             <a:off x="4644000" y="4419000"/>
-            <a:ext cx="3168000" cy="944280"/>
+            <a:ext cx="4042800" cy="944280"/>
           </a:xfrm>
           <a:prstGeom prst="rect">
             <a:avLst/>
@@ -9732,7 +8243,7 @@
                 </a:solidFill>
                 <a:latin typeface="Calibri"/>
               </a:rPr>
-              <a:t> </a:t>
+              <a:t>Umiejętności techniczne, obsługa telefonu </a:t>
             </a:r>
             <a:endParaRPr b="0" lang="en-US" sz="1400" spc="-1" strike="noStrike">
               <a:solidFill>
@@ -9759,7 +8270,7 @@
                 </a:solidFill>
                 <a:latin typeface="Calibri"/>
               </a:rPr>
-              <a:t> </a:t>
+              <a:t>Radzenie sobie z trudnymi dziećmi </a:t>
             </a:r>
             <a:endParaRPr b="0" lang="en-US" sz="1400" spc="-1" strike="noStrike">
               <a:solidFill>
@@ -9772,14 +8283,14 @@
       </p:sp>
       <p:sp>
         <p:nvSpPr>
-          <p:cNvPr id="103" name="pole tekstowe 39"/>
+          <p:cNvPr id="86" name="pole tekstowe 39"/>
           <p:cNvSpPr/>
           <p:nvPr/>
         </p:nvSpPr>
         <p:spPr>
           <a:xfrm>
             <a:off x="472320" y="5633280"/>
-            <a:ext cx="4146840" cy="1004760"/>
+            <a:ext cx="4146480" cy="1004760"/>
           </a:xfrm>
           <a:prstGeom prst="rect">
             <a:avLst/>
@@ -9867,7 +8378,7 @@
                 </a:solidFill>
                 <a:latin typeface="Calibri"/>
               </a:rPr>
-              <a:t>Chce podnieść poziom edukacji w Polsce i usunąć  </a:t>
+              <a:t>Chce podnieść poziom edukacji w Polsce  </a:t>
             </a:r>
             <a:endParaRPr b="0" lang="en-US" sz="1200" spc="-1" strike="noStrike">
               <a:solidFill>
@@ -9894,7 +8405,7 @@
                 </a:solidFill>
                 <a:latin typeface="Calibri"/>
               </a:rPr>
-              <a:t> </a:t>
+              <a:t>Zarobki adekwatne do jego umiejętności </a:t>
             </a:r>
             <a:endParaRPr b="0" lang="en-US" sz="1200" spc="-1" strike="noStrike">
               <a:solidFill>
@@ -9907,14 +8418,14 @@
       </p:sp>
       <p:sp>
         <p:nvSpPr>
-          <p:cNvPr id="104" name="pole tekstowe 40"/>
+          <p:cNvPr id="87" name="pole tekstowe 40"/>
           <p:cNvSpPr/>
           <p:nvPr/>
         </p:nvSpPr>
         <p:spPr>
           <a:xfrm>
             <a:off x="4619160" y="5639040"/>
-            <a:ext cx="3168000" cy="1157040"/>
+            <a:ext cx="4067640" cy="944280"/>
           </a:xfrm>
           <a:prstGeom prst="rect">
             <a:avLst/>
@@ -9984,7 +8495,7 @@
                 </a:solidFill>
                 <a:latin typeface="Calibri"/>
               </a:rPr>
-              <a:t> </a:t>
+              <a:t>Ma młodsze rozdzeństwo </a:t>
             </a:r>
             <a:endParaRPr b="0" lang="en-US" sz="1400" spc="-1" strike="noStrike">
               <a:solidFill>
@@ -10011,7 +8522,7 @@
                 </a:solidFill>
                 <a:latin typeface="Calibri"/>
               </a:rPr>
-              <a:t> </a:t>
+              <a:t>Introwetryk, ale lubi dzielić się wiedzą</a:t>
             </a:r>
             <a:endParaRPr b="0" lang="en-US" sz="1400" spc="-1" strike="noStrike">
               <a:solidFill>
@@ -10038,7 +8549,7 @@
                 </a:solidFill>
                 <a:latin typeface="Calibri"/>
               </a:rPr>
-              <a:t> </a:t>
+              <a:t>Oczekuje rozsądnego wynagrodzenia </a:t>
             </a:r>
             <a:endParaRPr b="0" lang="en-US" sz="1400" spc="-1" strike="noStrike">
               <a:solidFill>
@@ -10081,7 +8592,7 @@
       </p:grpSpPr>
       <p:pic>
         <p:nvPicPr>
-          <p:cNvPr id="105" name="Picture 2" descr=""/>
+          <p:cNvPr id="88" name="Picture 2" descr=""/>
           <p:cNvPicPr/>
           <p:nvPr/>
         </p:nvPicPr>
@@ -10092,7 +8603,7 @@
         <p:spPr>
           <a:xfrm>
             <a:off x="35640" y="44640"/>
-            <a:ext cx="9205920" cy="6885360"/>
+            <a:ext cx="9205560" cy="6885000"/>
           </a:xfrm>
           <a:prstGeom prst="rect">
             <a:avLst/>
@@ -10104,14 +8615,14 @@
       </p:pic>
       <p:sp>
         <p:nvSpPr>
-          <p:cNvPr id="106" name="pole tekstowe 2"/>
+          <p:cNvPr id="89" name="pole tekstowe 2"/>
           <p:cNvSpPr/>
           <p:nvPr/>
         </p:nvSpPr>
         <p:spPr>
           <a:xfrm>
             <a:off x="5580000" y="116640"/>
-            <a:ext cx="2232000" cy="455400"/>
+            <a:ext cx="2231640" cy="455400"/>
           </a:xfrm>
           <a:prstGeom prst="rect">
             <a:avLst/>
